--- a/06_Final_Report/Final_Presentation.pptx
+++ b/06_Final_Report/Final_Presentation.pptx
@@ -20,9 +20,13 @@
     <p:sldId id="268" r:id="rId14"/>
     <p:sldId id="269" r:id="rId15"/>
     <p:sldId id="270" r:id="rId16"/>
+    <p:sldId id="271" r:id="rId17"/>
+    <p:sldId id="272" r:id="rId18"/>
+    <p:sldId id="273" r:id="rId19"/>
+    <p:sldId id="274" r:id="rId20"/>
   </p:sldIdLst>
   <p:notesMasterIdLst>
-    <p:notesMasterId r:id="rId17"/>
+    <p:notesMasterId r:id="rId21"/>
   </p:notesMasterIdLst>
   <p:sldSz cx="12192000" cy="6858000"/>
   <p:notesSz cx="6858000" cy="12192000"/>
@@ -605,6 +609,349 @@
 </c:chartSpace>
 </file>
 
+<file path=ppt/charts/chart3.xml><?xml version="1.0" encoding="utf-8"?>
+<c:chartSpace xmlns:c="http://schemas.openxmlformats.org/drawingml/2006/chart" xmlns:a="http://schemas.openxmlformats.org/drawingml/2006/main" xmlns:r="http://schemas.openxmlformats.org/officeDocument/2006/relationships">
+  <c:date1904 val="0"/>
+  <c:roundedCorners val="1"/>
+  <c:chart>
+    <c:autoTitleDeleted val="1"/>
+    <c:plotArea>
+      <c:layout/>
+      <c:barChart>
+        <c:barDir val="col"/>
+        <c:grouping val="clustered"/>
+        <c:varyColors val="0"/>
+        <c:ser>
+          <c:idx val="0"/>
+          <c:order val="0"/>
+          <c:tx>
+            <c:strRef>
+              <c:f>Sheet1!$B$1</c:f>
+              <c:strCache>
+                <c:ptCount val="1"/>
+                <c:pt idx="0">
+                  <c:v>Reasoning</c:v>
+                </c:pt>
+              </c:strCache>
+            </c:strRef>
+          </c:tx>
+          <c:spPr>
+            <a:solidFill>
+              <a:srgbClr val="1E2761"/>
+            </a:solidFill>
+            <a:effectLst/>
+          </c:spPr>
+          <c:invertIfNegative val="0"/>
+          <c:dLbls>
+            <c:numFmt formatCode="0.00" sourceLinked="0"/>
+            <c:txPr>
+              <a:bodyPr/>
+              <a:lstStyle/>
+              <a:p>
+                <a:pPr>
+                  <a:defRPr b="0" i="0" strike="noStrike" sz="1000" u="none">
+                    <a:solidFill>
+                      <a:srgbClr val="1F1F1F"/>
+                    </a:solidFill>
+                    <a:latin typeface="Arial"/>
+                  </a:defRPr>
+                </a:pPr>
+              </a:p>
+            </c:txPr>
+            <c:showLegendKey val="0"/>
+            <c:showVal val="1"/>
+            <c:showCatName val="0"/>
+            <c:showSerName val="0"/>
+            <c:showPercent val="0"/>
+            <c:showBubbleSize val="0"/>
+            <c:showLeaderLines val="0"/>
+          </c:dLbls>
+          <c:cat>
+            <c:multiLvlStrRef>
+              <c:f>Sheet1!$A$2:$A$4</c:f>
+              <c:multiLvlStrCache>
+                <c:ptCount val="3"/>
+                <c:lvl>
+                  <c:pt idx="0">
+                    <c:v>Gemini</c:v>
+                  </c:pt>
+                  <c:pt idx="1">
+                    <c:v>Mistral</c:v>
+                  </c:pt>
+                  <c:pt idx="2">
+                    <c:v>Groq</c:v>
+                  </c:pt>
+                </c:lvl>
+              </c:multiLvlStrCache>
+            </c:multiLvlStrRef>
+          </c:cat>
+          <c:val>
+            <c:numRef>
+              <c:f>Sheet1!$B$2:$B$4</c:f>
+              <c:numCache>
+                <c:formatCode>General</c:formatCode>
+                <c:ptCount val="3"/>
+                <c:pt idx="0">
+                  <c:v>9.68</c:v>
+                </c:pt>
+                <c:pt idx="1">
+                  <c:v>9.14</c:v>
+                </c:pt>
+                <c:pt idx="2">
+                  <c:v>9.86</c:v>
+                </c:pt>
+              </c:numCache>
+            </c:numRef>
+          </c:val>
+        </c:ser>
+        <c:ser>
+          <c:idx val="1"/>
+          <c:order val="1"/>
+          <c:tx>
+            <c:strRef>
+              <c:f>Sheet1!$C$1</c:f>
+              <c:strCache>
+                <c:ptCount val="1"/>
+                <c:pt idx="0">
+                  <c:v>Retrieval</c:v>
+                </c:pt>
+              </c:strCache>
+            </c:strRef>
+          </c:tx>
+          <c:spPr>
+            <a:solidFill>
+              <a:srgbClr val="CADCFC"/>
+            </a:solidFill>
+            <a:effectLst/>
+          </c:spPr>
+          <c:invertIfNegative val="0"/>
+          <c:dLbls>
+            <c:numFmt formatCode="0.00" sourceLinked="0"/>
+            <c:txPr>
+              <a:bodyPr/>
+              <a:lstStyle/>
+              <a:p>
+                <a:pPr>
+                  <a:defRPr b="0" i="0" strike="noStrike" sz="1000" u="none">
+                    <a:solidFill>
+                      <a:srgbClr val="1F1F1F"/>
+                    </a:solidFill>
+                    <a:latin typeface="Arial"/>
+                  </a:defRPr>
+                </a:pPr>
+              </a:p>
+            </c:txPr>
+            <c:showLegendKey val="0"/>
+            <c:showVal val="1"/>
+            <c:showCatName val="0"/>
+            <c:showSerName val="0"/>
+            <c:showPercent val="0"/>
+            <c:showBubbleSize val="0"/>
+            <c:showLeaderLines val="0"/>
+          </c:dLbls>
+          <c:cat>
+            <c:multiLvlStrRef>
+              <c:f>Sheet1!$A$2:$A$4</c:f>
+              <c:multiLvlStrCache>
+                <c:ptCount val="3"/>
+                <c:lvl>
+                  <c:pt idx="0">
+                    <c:v>Gemini</c:v>
+                  </c:pt>
+                  <c:pt idx="1">
+                    <c:v>Mistral</c:v>
+                  </c:pt>
+                  <c:pt idx="2">
+                    <c:v>Groq</c:v>
+                  </c:pt>
+                </c:lvl>
+              </c:multiLvlStrCache>
+            </c:multiLvlStrRef>
+          </c:cat>
+          <c:val>
+            <c:numRef>
+              <c:f>Sheet1!$C$2:$C$4</c:f>
+              <c:numCache>
+                <c:formatCode>General</c:formatCode>
+                <c:ptCount val="3"/>
+                <c:pt idx="0">
+                  <c:v>9.23</c:v>
+                </c:pt>
+                <c:pt idx="1">
+                  <c:v>9.05</c:v>
+                </c:pt>
+                <c:pt idx="2">
+                  <c:v>9.59</c:v>
+                </c:pt>
+              </c:numCache>
+            </c:numRef>
+          </c:val>
+        </c:ser>
+        <c:dLbls>
+          <c:numFmt formatCode="0.00" sourceLinked="0"/>
+          <c:txPr>
+            <a:bodyPr/>
+            <a:lstStyle/>
+            <a:p>
+              <a:pPr>
+                <a:defRPr b="0" i="0" strike="noStrike" sz="1000" u="none">
+                  <a:solidFill>
+                    <a:srgbClr val="1F1F1F"/>
+                  </a:solidFill>
+                  <a:latin typeface="Arial"/>
+                </a:defRPr>
+              </a:pPr>
+            </a:p>
+          </c:txPr>
+          <c:showLegendKey val="0"/>
+          <c:showVal val="1"/>
+          <c:showCatName val="0"/>
+          <c:showSerName val="0"/>
+          <c:showPercent val="0"/>
+          <c:showBubbleSize val="0"/>
+          <c:showLeaderLines val="0"/>
+        </c:dLbls>
+        <c:gapWidth val="150"/>
+        <c:overlap val="0"/>
+        <c:axId val="2094734554"/>
+        <c:axId val="2094734552"/>
+        <c:axId val="2094734556"/>
+      </c:barChart>
+      <c:catAx>
+        <c:axId val="2094734554"/>
+        <c:scaling>
+          <c:orientation val="minMax"/>
+        </c:scaling>
+        <c:delete val="0"/>
+        <c:axPos val="b"/>
+        <c:numFmt formatCode="General" sourceLinked="1"/>
+        <c:majorTickMark val="out"/>
+        <c:minorTickMark val="none"/>
+        <c:tickLblPos val="low"/>
+        <c:spPr>
+          <a:ln w="12700" cap="flat">
+            <a:solidFill>
+              <a:srgbClr val="888888"/>
+            </a:solidFill>
+            <a:prstDash val="solid"/>
+            <a:round/>
+          </a:ln>
+        </c:spPr>
+        <c:txPr>
+          <a:bodyPr/>
+          <a:lstStyle/>
+          <a:p>
+            <a:pPr>
+              <a:defRPr sz="1300" b="0" i="0" u="none" strike="noStrike">
+                <a:solidFill>
+                  <a:srgbClr val="1F1F1F"/>
+                </a:solidFill>
+                <a:latin typeface="Arial"/>
+              </a:defRPr>
+            </a:pPr>
+            <a:endParaRPr lang="en-US"/>
+          </a:p>
+        </c:txPr>
+        <c:crossAx val="2094734552"/>
+        <c:crosses val="autoZero"/>
+        <c:auto val="1"/>
+        <c:lblAlgn val="ctr"/>
+        <c:noMultiLvlLbl val="1"/>
+      </c:catAx>
+      <c:valAx>
+        <c:axId val="2094734552"/>
+        <c:scaling>
+          <c:orientation val="minMax"/>
+          <c:max val="11"/>
+          <c:min val="0"/>
+        </c:scaling>
+        <c:delete val="0"/>
+        <c:axPos val="l"/>
+        <c:majorGridlines>
+          <c:spPr>
+            <a:ln w="12700" cap="flat">
+              <a:solidFill>
+                <a:srgbClr val="E5E5E0"/>
+              </a:solidFill>
+              <a:prstDash val="solid"/>
+              <a:round/>
+            </a:ln>
+          </c:spPr>
+        </c:majorGridlines>
+        <c:numFmt formatCode="General" sourceLinked="0"/>
+        <c:majorTickMark val="out"/>
+        <c:minorTickMark val="none"/>
+        <c:tickLblPos val="nextTo"/>
+        <c:spPr>
+          <a:ln w="12700" cap="flat">
+            <a:solidFill>
+              <a:srgbClr val="888888"/>
+            </a:solidFill>
+            <a:prstDash val="solid"/>
+            <a:round/>
+          </a:ln>
+        </c:spPr>
+        <c:txPr>
+          <a:bodyPr/>
+          <a:lstStyle/>
+          <a:p>
+            <a:pPr>
+              <a:defRPr sz="1000" b="0" i="0" u="none" strike="noStrike">
+                <a:solidFill>
+                  <a:srgbClr val="5F5E5A"/>
+                </a:solidFill>
+                <a:latin typeface="Arial"/>
+              </a:defRPr>
+            </a:pPr>
+            <a:endParaRPr lang="en-US"/>
+          </a:p>
+        </c:txPr>
+        <c:crossAx val="2094734554"/>
+        <c:crosses val="autoZero"/>
+        <c:crossBetween val="between"/>
+      </c:valAx>
+      <c:spPr>
+        <a:noFill/>
+        <a:ln>
+          <a:noFill/>
+        </a:ln>
+        <a:effectLst/>
+      </c:spPr>
+    </c:plotArea>
+    <c:legend>
+      <c:legendPos val="b"/>
+      <c:overlay val="0"/>
+      <c:txPr>
+        <a:bodyPr/>
+        <a:lstStyle/>
+        <a:p>
+          <a:pPr>
+            <a:defRPr sz="1100">
+              <a:solidFill>
+                <a:srgbClr val="1F1F1F"/>
+              </a:solidFill>
+            </a:defRPr>
+          </a:pPr>
+          <a:endParaRPr lang="en-US"/>
+        </a:p>
+      </c:txPr>
+    </c:legend>
+    <c:plotVisOnly val="1"/>
+    <c:dispBlanksAs val="span"/>
+  </c:chart>
+  <c:spPr>
+    <a:noFill/>
+    <a:ln>
+      <a:noFill/>
+    </a:ln>
+    <a:effectLst/>
+  </c:spPr>
+  <c:externalData r:id="rId1">
+    <c:autoUpdate val="0"/>
+  </c:externalData>
+</c:chartSpace>
+</file>
+
 <file path=ppt/notesMasters/notesMaster1.xml><?xml version="1.0" encoding="utf-8"?>
 <p:notesMaster xmlns:a="http://schemas.openxmlformats.org/drawingml/2006/main" xmlns:r="http://schemas.openxmlformats.org/officeDocument/2006/relationships" xmlns:p="http://schemas.openxmlformats.org/presentationml/2006/main">
   <p:cSld>
@@ -1552,6 +1899,358 @@
             <a:fld id="{F7021451-1387-4CA6-816F-3879F97B5CBC}" type="slidenum">
               <a:rPr lang="en-US"/>
               <a:t>15</a:t>
+            </a:fld>
+            <a:endParaRPr lang="en-US"/>
+          </a:p>
+        </p:txBody>
+      </p:sp>
+    </p:spTree>
+    <p:extLst>
+      <p:ext uri="{BB962C8B-B14F-4D97-AF65-F5344CB8AC3E}">
+        <p14:creationId xmlns:p14="http://schemas.microsoft.com/office/powerpoint/2010/main" val="1024086991"/>
+      </p:ext>
+    </p:extLst>
+  </p:cSld>
+  <p:clrMapOvr>
+    <a:masterClrMapping/>
+  </p:clrMapOvr>
+</p:notes>
+</file>
+
+<file path=ppt/notesSlides/notesSlide16.xml><?xml version="1.0" encoding="utf-8"?>
+<p:notes xmlns:a="http://schemas.openxmlformats.org/drawingml/2006/main" xmlns:r="http://schemas.openxmlformats.org/officeDocument/2006/relationships" xmlns:p="http://schemas.openxmlformats.org/presentationml/2006/main">
+  <p:cSld>
+    <p:spTree>
+      <p:nvGrpSpPr>
+        <p:cNvPr id="1" name=""/>
+        <p:cNvGrpSpPr/>
+        <p:nvPr/>
+      </p:nvGrpSpPr>
+      <p:grpSpPr>
+        <a:xfrm>
+          <a:off x="0" y="0"/>
+          <a:ext cx="0" cy="0"/>
+          <a:chOff x="0" y="0"/>
+          <a:chExt cx="0" cy="0"/>
+        </a:xfrm>
+      </p:grpSpPr>
+      <p:sp>
+        <p:nvSpPr>
+          <p:cNvPr id="2" name="Slide Image Placeholder 1"/>
+          <p:cNvSpPr>
+            <a:spLocks noGrp="1" noRot="1" noChangeAspect="1"/>
+          </p:cNvSpPr>
+          <p:nvPr>
+            <p:ph type="sldImg"/>
+          </p:nvPr>
+        </p:nvSpPr>
+        <p:spPr/>
+      </p:sp>
+      <p:sp>
+        <p:nvSpPr>
+          <p:cNvPr id="3" name="Notes Placeholder 2"/>
+          <p:cNvSpPr>
+            <a:spLocks noGrp="1"/>
+          </p:cNvSpPr>
+          <p:nvPr>
+            <p:ph type="body" idx="1"/>
+          </p:nvPr>
+        </p:nvSpPr>
+        <p:spPr/>
+        <p:txBody>
+          <a:bodyPr/>
+          <a:lstStyle/>
+          <a:p>
+            <a:r>
+              <a:rPr lang="en-US" dirty="0"/>
+              <a:t/>
+            </a:r>
+            <a:endParaRPr lang="en-US" dirty="0"/>
+          </a:p>
+        </p:txBody>
+      </p:sp>
+      <p:sp>
+        <p:nvSpPr>
+          <p:cNvPr id="4" name="Slide Number Placeholder 3"/>
+          <p:cNvSpPr>
+            <a:spLocks noGrp="1"/>
+          </p:cNvSpPr>
+          <p:nvPr>
+            <p:ph type="sldNum" sz="quarter" idx="10"/>
+          </p:nvPr>
+        </p:nvSpPr>
+        <p:spPr/>
+        <p:txBody>
+          <a:bodyPr/>
+          <a:lstStyle/>
+          <a:p>
+            <a:fld id="{F7021451-1387-4CA6-816F-3879F97B5CBC}" type="slidenum">
+              <a:rPr lang="en-US"/>
+              <a:t>16</a:t>
+            </a:fld>
+            <a:endParaRPr lang="en-US"/>
+          </a:p>
+        </p:txBody>
+      </p:sp>
+    </p:spTree>
+    <p:extLst>
+      <p:ext uri="{BB962C8B-B14F-4D97-AF65-F5344CB8AC3E}">
+        <p14:creationId xmlns:p14="http://schemas.microsoft.com/office/powerpoint/2010/main" val="1024086991"/>
+      </p:ext>
+    </p:extLst>
+  </p:cSld>
+  <p:clrMapOvr>
+    <a:masterClrMapping/>
+  </p:clrMapOvr>
+</p:notes>
+</file>
+
+<file path=ppt/notesSlides/notesSlide17.xml><?xml version="1.0" encoding="utf-8"?>
+<p:notes xmlns:a="http://schemas.openxmlformats.org/drawingml/2006/main" xmlns:r="http://schemas.openxmlformats.org/officeDocument/2006/relationships" xmlns:p="http://schemas.openxmlformats.org/presentationml/2006/main">
+  <p:cSld>
+    <p:spTree>
+      <p:nvGrpSpPr>
+        <p:cNvPr id="1" name=""/>
+        <p:cNvGrpSpPr/>
+        <p:nvPr/>
+      </p:nvGrpSpPr>
+      <p:grpSpPr>
+        <a:xfrm>
+          <a:off x="0" y="0"/>
+          <a:ext cx="0" cy="0"/>
+          <a:chOff x="0" y="0"/>
+          <a:chExt cx="0" cy="0"/>
+        </a:xfrm>
+      </p:grpSpPr>
+      <p:sp>
+        <p:nvSpPr>
+          <p:cNvPr id="2" name="Slide Image Placeholder 1"/>
+          <p:cNvSpPr>
+            <a:spLocks noGrp="1" noRot="1" noChangeAspect="1"/>
+          </p:cNvSpPr>
+          <p:nvPr>
+            <p:ph type="sldImg"/>
+          </p:nvPr>
+        </p:nvSpPr>
+        <p:spPr/>
+      </p:sp>
+      <p:sp>
+        <p:nvSpPr>
+          <p:cNvPr id="3" name="Notes Placeholder 2"/>
+          <p:cNvSpPr>
+            <a:spLocks noGrp="1"/>
+          </p:cNvSpPr>
+          <p:nvPr>
+            <p:ph type="body" idx="1"/>
+          </p:nvPr>
+        </p:nvSpPr>
+        <p:spPr/>
+        <p:txBody>
+          <a:bodyPr/>
+          <a:lstStyle/>
+          <a:p>
+            <a:r>
+              <a:rPr lang="en-US" dirty="0"/>
+              <a:t/>
+            </a:r>
+            <a:endParaRPr lang="en-US" dirty="0"/>
+          </a:p>
+        </p:txBody>
+      </p:sp>
+      <p:sp>
+        <p:nvSpPr>
+          <p:cNvPr id="4" name="Slide Number Placeholder 3"/>
+          <p:cNvSpPr>
+            <a:spLocks noGrp="1"/>
+          </p:cNvSpPr>
+          <p:nvPr>
+            <p:ph type="sldNum" sz="quarter" idx="10"/>
+          </p:nvPr>
+        </p:nvSpPr>
+        <p:spPr/>
+        <p:txBody>
+          <a:bodyPr/>
+          <a:lstStyle/>
+          <a:p>
+            <a:fld id="{F7021451-1387-4CA6-816F-3879F97B5CBC}" type="slidenum">
+              <a:rPr lang="en-US"/>
+              <a:t>17</a:t>
+            </a:fld>
+            <a:endParaRPr lang="en-US"/>
+          </a:p>
+        </p:txBody>
+      </p:sp>
+    </p:spTree>
+    <p:extLst>
+      <p:ext uri="{BB962C8B-B14F-4D97-AF65-F5344CB8AC3E}">
+        <p14:creationId xmlns:p14="http://schemas.microsoft.com/office/powerpoint/2010/main" val="1024086991"/>
+      </p:ext>
+    </p:extLst>
+  </p:cSld>
+  <p:clrMapOvr>
+    <a:masterClrMapping/>
+  </p:clrMapOvr>
+</p:notes>
+</file>
+
+<file path=ppt/notesSlides/notesSlide18.xml><?xml version="1.0" encoding="utf-8"?>
+<p:notes xmlns:a="http://schemas.openxmlformats.org/drawingml/2006/main" xmlns:r="http://schemas.openxmlformats.org/officeDocument/2006/relationships" xmlns:p="http://schemas.openxmlformats.org/presentationml/2006/main">
+  <p:cSld>
+    <p:spTree>
+      <p:nvGrpSpPr>
+        <p:cNvPr id="1" name=""/>
+        <p:cNvGrpSpPr/>
+        <p:nvPr/>
+      </p:nvGrpSpPr>
+      <p:grpSpPr>
+        <a:xfrm>
+          <a:off x="0" y="0"/>
+          <a:ext cx="0" cy="0"/>
+          <a:chOff x="0" y="0"/>
+          <a:chExt cx="0" cy="0"/>
+        </a:xfrm>
+      </p:grpSpPr>
+      <p:sp>
+        <p:nvSpPr>
+          <p:cNvPr id="2" name="Slide Image Placeholder 1"/>
+          <p:cNvSpPr>
+            <a:spLocks noGrp="1" noRot="1" noChangeAspect="1"/>
+          </p:cNvSpPr>
+          <p:nvPr>
+            <p:ph type="sldImg"/>
+          </p:nvPr>
+        </p:nvSpPr>
+        <p:spPr/>
+      </p:sp>
+      <p:sp>
+        <p:nvSpPr>
+          <p:cNvPr id="3" name="Notes Placeholder 2"/>
+          <p:cNvSpPr>
+            <a:spLocks noGrp="1"/>
+          </p:cNvSpPr>
+          <p:nvPr>
+            <p:ph type="body" idx="1"/>
+          </p:nvPr>
+        </p:nvSpPr>
+        <p:spPr/>
+        <p:txBody>
+          <a:bodyPr/>
+          <a:lstStyle/>
+          <a:p>
+            <a:r>
+              <a:rPr lang="en-US" dirty="0"/>
+              <a:t/>
+            </a:r>
+            <a:endParaRPr lang="en-US" dirty="0"/>
+          </a:p>
+        </p:txBody>
+      </p:sp>
+      <p:sp>
+        <p:nvSpPr>
+          <p:cNvPr id="4" name="Slide Number Placeholder 3"/>
+          <p:cNvSpPr>
+            <a:spLocks noGrp="1"/>
+          </p:cNvSpPr>
+          <p:nvPr>
+            <p:ph type="sldNum" sz="quarter" idx="10"/>
+          </p:nvPr>
+        </p:nvSpPr>
+        <p:spPr/>
+        <p:txBody>
+          <a:bodyPr/>
+          <a:lstStyle/>
+          <a:p>
+            <a:fld id="{F7021451-1387-4CA6-816F-3879F97B5CBC}" type="slidenum">
+              <a:rPr lang="en-US"/>
+              <a:t>18</a:t>
+            </a:fld>
+            <a:endParaRPr lang="en-US"/>
+          </a:p>
+        </p:txBody>
+      </p:sp>
+    </p:spTree>
+    <p:extLst>
+      <p:ext uri="{BB962C8B-B14F-4D97-AF65-F5344CB8AC3E}">
+        <p14:creationId xmlns:p14="http://schemas.microsoft.com/office/powerpoint/2010/main" val="1024086991"/>
+      </p:ext>
+    </p:extLst>
+  </p:cSld>
+  <p:clrMapOvr>
+    <a:masterClrMapping/>
+  </p:clrMapOvr>
+</p:notes>
+</file>
+
+<file path=ppt/notesSlides/notesSlide19.xml><?xml version="1.0" encoding="utf-8"?>
+<p:notes xmlns:a="http://schemas.openxmlformats.org/drawingml/2006/main" xmlns:r="http://schemas.openxmlformats.org/officeDocument/2006/relationships" xmlns:p="http://schemas.openxmlformats.org/presentationml/2006/main">
+  <p:cSld>
+    <p:spTree>
+      <p:nvGrpSpPr>
+        <p:cNvPr id="1" name=""/>
+        <p:cNvGrpSpPr/>
+        <p:nvPr/>
+      </p:nvGrpSpPr>
+      <p:grpSpPr>
+        <a:xfrm>
+          <a:off x="0" y="0"/>
+          <a:ext cx="0" cy="0"/>
+          <a:chOff x="0" y="0"/>
+          <a:chExt cx="0" cy="0"/>
+        </a:xfrm>
+      </p:grpSpPr>
+      <p:sp>
+        <p:nvSpPr>
+          <p:cNvPr id="2" name="Slide Image Placeholder 1"/>
+          <p:cNvSpPr>
+            <a:spLocks noGrp="1" noRot="1" noChangeAspect="1"/>
+          </p:cNvSpPr>
+          <p:nvPr>
+            <p:ph type="sldImg"/>
+          </p:nvPr>
+        </p:nvSpPr>
+        <p:spPr/>
+      </p:sp>
+      <p:sp>
+        <p:nvSpPr>
+          <p:cNvPr id="3" name="Notes Placeholder 2"/>
+          <p:cNvSpPr>
+            <a:spLocks noGrp="1"/>
+          </p:cNvSpPr>
+          <p:nvPr>
+            <p:ph type="body" idx="1"/>
+          </p:nvPr>
+        </p:nvSpPr>
+        <p:spPr/>
+        <p:txBody>
+          <a:bodyPr/>
+          <a:lstStyle/>
+          <a:p>
+            <a:r>
+              <a:rPr lang="en-US" dirty="0"/>
+              <a:t/>
+            </a:r>
+            <a:endParaRPr lang="en-US" dirty="0"/>
+          </a:p>
+        </p:txBody>
+      </p:sp>
+      <p:sp>
+        <p:nvSpPr>
+          <p:cNvPr id="4" name="Slide Number Placeholder 3"/>
+          <p:cNvSpPr>
+            <a:spLocks noGrp="1"/>
+          </p:cNvSpPr>
+          <p:nvPr>
+            <p:ph type="sldNum" sz="quarter" idx="10"/>
+          </p:nvPr>
+        </p:nvSpPr>
+        <p:spPr/>
+        <p:txBody>
+          <a:bodyPr/>
+          <a:lstStyle/>
+          <a:p>
+            <a:fld id="{F7021451-1387-4CA6-816F-3879F97B5CBC}" type="slidenum">
+              <a:rPr lang="en-US"/>
+              <a:t>19</a:t>
             </a:fld>
             <a:endParaRPr lang="en-US"/>
           </a:p>
@@ -3118,24 +3817,24 @@
         </p:nvSpPr>
         <p:spPr>
           <a:xfrm>
-            <a:off x="548640" y="365760"/>
-            <a:ext cx="10515600" cy="640080"/>
-          </a:xfrm>
-          <a:prstGeom prst="rect">
-            <a:avLst/>
-          </a:prstGeom>
-          <a:noFill/>
-          <a:ln/>
-        </p:spPr>
-        <p:txBody>
-          <a:bodyPr wrap="square" rtlCol="0" anchor="ctr"/>
-          <a:lstStyle/>
-          <a:p>
-            <a:pPr indent="0" marL="0">
-              <a:buNone/>
-            </a:pPr>
-            <a:r>
-              <a:rPr lang="en-US" sz="3000" b="1" dirty="0">
+            <a:off x="548640" y="320040"/>
+            <a:ext cx="10972800" cy="640080"/>
+          </a:xfrm>
+          <a:prstGeom prst="rect">
+            <a:avLst/>
+          </a:prstGeom>
+          <a:noFill/>
+          <a:ln/>
+        </p:spPr>
+        <p:txBody>
+          <a:bodyPr wrap="square" rtlCol="0" anchor="ctr"/>
+          <a:lstStyle/>
+          <a:p>
+            <a:pPr indent="0" marL="0">
+              <a:buNone/>
+            </a:pPr>
+            <a:r>
+              <a:rPr lang="en-US" sz="2600" b="1" dirty="0">
                 <a:solidFill>
                   <a:srgbClr val="1E2761"/>
                 </a:solidFill>
@@ -3143,28 +3842,83 @@
                 <a:ea typeface="Cambria" pitchFamily="34" charset="-122"/>
                 <a:cs typeface="Cambria" pitchFamily="34" charset="-120"/>
               </a:rPr>
-              <a:t>Hypothesis Testing: What Held Up?</a:t>
-            </a:r>
-            <a:endParaRPr lang="en-US" sz="3000" dirty="0"/>
-          </a:p>
-        </p:txBody>
-      </p:sp>
-      <p:sp>
-        <p:nvSpPr>
-          <p:cNvPr id="3" name="Shape 1"/>
+              <a:t>H1: Reasoning vs. Retrieval — All Three Providers</a:t>
+            </a:r>
+            <a:endParaRPr lang="en-US" sz="2600" dirty="0"/>
+          </a:p>
+        </p:txBody>
+      </p:sp>
+      <p:sp>
+        <p:nvSpPr>
+          <p:cNvPr id="3" name="Text 1"/>
+          <p:cNvSpPr txBox="1"/>
+          <p:nvPr/>
+        </p:nvSpPr>
+        <p:spPr>
+          <a:xfrm>
+            <a:off x="548640" y="914400"/>
+            <a:ext cx="10972800" cy="365760"/>
+          </a:xfrm>
+          <a:prstGeom prst="rect">
+            <a:avLst/>
+          </a:prstGeom>
+          <a:noFill/>
+          <a:ln/>
+        </p:spPr>
+        <p:txBody>
+          <a:bodyPr wrap="square" rtlCol="0" anchor="ctr"/>
+          <a:lstStyle/>
+          <a:p>
+            <a:pPr indent="0" marL="0">
+              <a:buNone/>
+            </a:pPr>
+            <a:r>
+              <a:rPr lang="en-US" sz="1300" i="1" dirty="0">
+                <a:solidFill>
+                  <a:srgbClr val="5F5E5A"/>
+                </a:solidFill>
+                <a:latin typeface="Calibri" pitchFamily="34" charset="0"/>
+                <a:ea typeface="Calibri" pitchFamily="34" charset="-122"/>
+                <a:cs typeface="Calibri" pitchFamily="34" charset="-120"/>
+              </a:rPr>
+              <a:t>Mean score on Multi-step Reasoning prompts vs. Knowledge Retrieval prompts, per provider</a:t>
+            </a:r>
+            <a:endParaRPr lang="en-US" sz="1300" dirty="0"/>
+          </a:p>
+        </p:txBody>
+      </p:sp>
+      <p:graphicFrame>
+        <p:nvGraphicFramePr>
+          <p:cNvPr id="4" name="Chart 0" descr=""/>
+          <p:cNvGraphicFramePr/>
+          <p:nvPr/>
+        </p:nvGraphicFramePr>
+        <p:xfrm>
+          <a:off x="640080" y="1371600"/>
+          <a:ext cx="6949440" cy="4297680"/>
+        </p:xfrm>
+        <a:graphic xmlns:a="http://schemas.openxmlformats.org/drawingml/2006/main">
+          <a:graphicData uri="http://schemas.openxmlformats.org/drawingml/2006/chart">
+            <c:chart xmlns:c="http://schemas.openxmlformats.org/drawingml/2006/chart" r:id="rId1"/>
+          </a:graphicData>
+        </a:graphic>
+      </p:graphicFrame>
+      <p:sp>
+        <p:nvSpPr>
+          <p:cNvPr id="5" name="Shape 2"/>
           <p:cNvSpPr/>
           <p:nvPr/>
         </p:nvSpPr>
         <p:spPr>
           <a:xfrm>
-            <a:off x="548640" y="1463040"/>
-            <a:ext cx="11064240" cy="1280160"/>
+            <a:off x="7772400" y="1371600"/>
+            <a:ext cx="3840480" cy="4297680"/>
           </a:xfrm>
           <a:prstGeom prst="rect">
             <a:avLst/>
           </a:prstGeom>
           <a:solidFill>
-            <a:srgbClr val="FFFFFF"/>
+            <a:srgbClr val="F7F7F5"/>
           </a:solidFill>
           <a:ln w="12700">
             <a:solidFill>
@@ -3176,73 +3930,14 @@
       </p:sp>
       <p:sp>
         <p:nvSpPr>
-          <p:cNvPr id="4" name="Shape 2"/>
-          <p:cNvSpPr/>
-          <p:nvPr/>
-        </p:nvSpPr>
-        <p:spPr>
-          <a:xfrm>
-            <a:off x="822960" y="1737360"/>
-            <a:ext cx="731520" cy="731520"/>
-          </a:xfrm>
-          <a:prstGeom prst="ellipse">
-            <a:avLst/>
-          </a:prstGeom>
-          <a:solidFill>
-            <a:srgbClr val="5F5E5A"/>
-          </a:solidFill>
-          <a:ln/>
-        </p:spPr>
-      </p:sp>
-      <p:sp>
-        <p:nvSpPr>
-          <p:cNvPr id="5" name="Text 3"/>
-          <p:cNvSpPr txBox="1"/>
-          <p:nvPr/>
-        </p:nvSpPr>
-        <p:spPr>
-          <a:xfrm>
-            <a:off x="822960" y="1737360"/>
-            <a:ext cx="731520" cy="731520"/>
-          </a:xfrm>
-          <a:prstGeom prst="rect">
-            <a:avLst/>
-          </a:prstGeom>
-          <a:noFill/>
-          <a:ln/>
-        </p:spPr>
-        <p:txBody>
-          <a:bodyPr wrap="square" lIns="0" tIns="0" rIns="0" bIns="0" rtlCol="0" anchor="ctr"/>
-          <a:lstStyle/>
-          <a:p>
-            <a:pPr algn="ctr" indent="0" marL="0">
-              <a:buNone/>
-            </a:pPr>
-            <a:r>
-              <a:rPr lang="en-US" sz="1800" b="1" dirty="0">
-                <a:solidFill>
-                  <a:srgbClr val="FFFFFF"/>
-                </a:solidFill>
-                <a:latin typeface="Cambria" pitchFamily="34" charset="0"/>
-                <a:ea typeface="Cambria" pitchFamily="34" charset="-122"/>
-                <a:cs typeface="Cambria" pitchFamily="34" charset="-120"/>
-              </a:rPr>
-              <a:t>H1</a:t>
-            </a:r>
-            <a:endParaRPr lang="en-US" sz="1800" dirty="0"/>
-          </a:p>
-        </p:txBody>
-      </p:sp>
-      <p:sp>
-        <p:nvSpPr>
-          <p:cNvPr id="6" name="Text 4"/>
-          <p:cNvSpPr txBox="1"/>
-          <p:nvPr/>
-        </p:nvSpPr>
-        <p:spPr>
-          <a:xfrm>
-            <a:off x="1828800" y="1600200"/>
-            <a:ext cx="3931920" cy="457200"/>
+          <p:cNvPr id="6" name="Text 3"/>
+          <p:cNvSpPr txBox="1"/>
+          <p:nvPr/>
+        </p:nvSpPr>
+        <p:spPr>
+          <a:xfrm>
+            <a:off x="7955280" y="1508760"/>
+            <a:ext cx="3474720" cy="365760"/>
           </a:xfrm>
           <a:prstGeom prst="rect">
             <a:avLst/>
@@ -3266,7 +3961,7 @@
                 <a:ea typeface="Calibri" pitchFamily="34" charset="-122"/>
                 <a:cs typeface="Calibri" pitchFamily="34" charset="-120"/>
               </a:rPr>
-              <a:t>Reasoning vs. Retrieval</a:t>
+              <a:t>Real Results</a:t>
             </a:r>
             <a:endParaRPr lang="en-US" sz="1500" dirty="0"/>
           </a:p>
@@ -3274,14 +3969,365 @@
       </p:sp>
       <p:sp>
         <p:nvSpPr>
-          <p:cNvPr id="7" name="Text 5"/>
-          <p:cNvSpPr txBox="1"/>
-          <p:nvPr/>
-        </p:nvSpPr>
-        <p:spPr>
-          <a:xfrm>
-            <a:off x="1828800" y="2057400"/>
-            <a:ext cx="3931920" cy="548640"/>
+          <p:cNvPr id="7" name="Text 4"/>
+          <p:cNvSpPr txBox="1"/>
+          <p:nvPr/>
+        </p:nvSpPr>
+        <p:spPr>
+          <a:xfrm>
+            <a:off x="7955280" y="2011680"/>
+            <a:ext cx="1188720" cy="457200"/>
+          </a:xfrm>
+          <a:prstGeom prst="rect">
+            <a:avLst/>
+          </a:prstGeom>
+          <a:noFill/>
+          <a:ln/>
+        </p:spPr>
+        <p:txBody>
+          <a:bodyPr wrap="square" rtlCol="0" anchor="ctr"/>
+          <a:lstStyle/>
+          <a:p>
+            <a:pPr indent="0" marL="0">
+              <a:buNone/>
+            </a:pPr>
+            <a:r>
+              <a:rPr lang="en-US" sz="1300" b="1" dirty="0">
+                <a:solidFill>
+                  <a:srgbClr val="1E2761"/>
+                </a:solidFill>
+                <a:latin typeface="Calibri" pitchFamily="34" charset="0"/>
+                <a:ea typeface="Calibri" pitchFamily="34" charset="-122"/>
+                <a:cs typeface="Calibri" pitchFamily="34" charset="-120"/>
+              </a:rPr>
+              <a:t>Gemini</a:t>
+            </a:r>
+            <a:endParaRPr lang="en-US" sz="1300" dirty="0"/>
+          </a:p>
+        </p:txBody>
+      </p:sp>
+      <p:sp>
+        <p:nvSpPr>
+          <p:cNvPr id="8" name="Text 5"/>
+          <p:cNvSpPr txBox="1"/>
+          <p:nvPr/>
+        </p:nvSpPr>
+        <p:spPr>
+          <a:xfrm>
+            <a:off x="9144000" y="2011680"/>
+            <a:ext cx="1097280" cy="457200"/>
+          </a:xfrm>
+          <a:prstGeom prst="rect">
+            <a:avLst/>
+          </a:prstGeom>
+          <a:noFill/>
+          <a:ln/>
+        </p:spPr>
+        <p:txBody>
+          <a:bodyPr wrap="square" rtlCol="0" anchor="ctr"/>
+          <a:lstStyle/>
+          <a:p>
+            <a:pPr indent="0" marL="0">
+              <a:buNone/>
+            </a:pPr>
+            <a:r>
+              <a:rPr lang="en-US" sz="1200" dirty="0">
+                <a:solidFill>
+                  <a:srgbClr val="1F1F1F"/>
+                </a:solidFill>
+                <a:latin typeface="Calibri" pitchFamily="34" charset="0"/>
+                <a:ea typeface="Calibri" pitchFamily="34" charset="-122"/>
+                <a:cs typeface="Calibri" pitchFamily="34" charset="-120"/>
+              </a:rPr>
+              <a:t>d = 0.47</a:t>
+            </a:r>
+            <a:endParaRPr lang="en-US" sz="1200" dirty="0"/>
+          </a:p>
+        </p:txBody>
+      </p:sp>
+      <p:sp>
+        <p:nvSpPr>
+          <p:cNvPr id="9" name="Text 6"/>
+          <p:cNvSpPr txBox="1"/>
+          <p:nvPr/>
+        </p:nvSpPr>
+        <p:spPr>
+          <a:xfrm>
+            <a:off x="10241280" y="2011680"/>
+            <a:ext cx="1280160" cy="457200"/>
+          </a:xfrm>
+          <a:prstGeom prst="rect">
+            <a:avLst/>
+          </a:prstGeom>
+          <a:noFill/>
+          <a:ln/>
+        </p:spPr>
+        <p:txBody>
+          <a:bodyPr wrap="square" rtlCol="0" anchor="ctr"/>
+          <a:lstStyle/>
+          <a:p>
+            <a:pPr indent="0" marL="0">
+              <a:buNone/>
+            </a:pPr>
+            <a:r>
+              <a:rPr lang="en-US" sz="1200" dirty="0">
+                <a:solidFill>
+                  <a:srgbClr val="5F5E5A"/>
+                </a:solidFill>
+                <a:latin typeface="Calibri" pitchFamily="34" charset="0"/>
+                <a:ea typeface="Calibri" pitchFamily="34" charset="-122"/>
+                <a:cs typeface="Calibri" pitchFamily="34" charset="-120"/>
+              </a:rPr>
+              <a:t>p = 0.124</a:t>
+            </a:r>
+            <a:endParaRPr lang="en-US" sz="1200" dirty="0"/>
+          </a:p>
+        </p:txBody>
+      </p:sp>
+      <p:sp>
+        <p:nvSpPr>
+          <p:cNvPr id="10" name="Text 7"/>
+          <p:cNvSpPr txBox="1"/>
+          <p:nvPr/>
+        </p:nvSpPr>
+        <p:spPr>
+          <a:xfrm>
+            <a:off x="7955280" y="2560320"/>
+            <a:ext cx="1188720" cy="457200"/>
+          </a:xfrm>
+          <a:prstGeom prst="rect">
+            <a:avLst/>
+          </a:prstGeom>
+          <a:noFill/>
+          <a:ln/>
+        </p:spPr>
+        <p:txBody>
+          <a:bodyPr wrap="square" rtlCol="0" anchor="ctr"/>
+          <a:lstStyle/>
+          <a:p>
+            <a:pPr indent="0" marL="0">
+              <a:buNone/>
+            </a:pPr>
+            <a:r>
+              <a:rPr lang="en-US" sz="1300" b="1" dirty="0">
+                <a:solidFill>
+                  <a:srgbClr val="1E2761"/>
+                </a:solidFill>
+                <a:latin typeface="Calibri" pitchFamily="34" charset="0"/>
+                <a:ea typeface="Calibri" pitchFamily="34" charset="-122"/>
+                <a:cs typeface="Calibri" pitchFamily="34" charset="-120"/>
+              </a:rPr>
+              <a:t>Mistral</a:t>
+            </a:r>
+            <a:endParaRPr lang="en-US" sz="1300" dirty="0"/>
+          </a:p>
+        </p:txBody>
+      </p:sp>
+      <p:sp>
+        <p:nvSpPr>
+          <p:cNvPr id="11" name="Text 8"/>
+          <p:cNvSpPr txBox="1"/>
+          <p:nvPr/>
+        </p:nvSpPr>
+        <p:spPr>
+          <a:xfrm>
+            <a:off x="9144000" y="2560320"/>
+            <a:ext cx="1097280" cy="457200"/>
+          </a:xfrm>
+          <a:prstGeom prst="rect">
+            <a:avLst/>
+          </a:prstGeom>
+          <a:noFill/>
+          <a:ln/>
+        </p:spPr>
+        <p:txBody>
+          <a:bodyPr wrap="square" rtlCol="0" anchor="ctr"/>
+          <a:lstStyle/>
+          <a:p>
+            <a:pPr indent="0" marL="0">
+              <a:buNone/>
+            </a:pPr>
+            <a:r>
+              <a:rPr lang="en-US" sz="1200" dirty="0">
+                <a:solidFill>
+                  <a:srgbClr val="1F1F1F"/>
+                </a:solidFill>
+                <a:latin typeface="Calibri" pitchFamily="34" charset="0"/>
+                <a:ea typeface="Calibri" pitchFamily="34" charset="-122"/>
+                <a:cs typeface="Calibri" pitchFamily="34" charset="-120"/>
+              </a:rPr>
+              <a:t>d = 0.05</a:t>
+            </a:r>
+            <a:endParaRPr lang="en-US" sz="1200" dirty="0"/>
+          </a:p>
+        </p:txBody>
+      </p:sp>
+      <p:sp>
+        <p:nvSpPr>
+          <p:cNvPr id="12" name="Text 9"/>
+          <p:cNvSpPr txBox="1"/>
+          <p:nvPr/>
+        </p:nvSpPr>
+        <p:spPr>
+          <a:xfrm>
+            <a:off x="10241280" y="2560320"/>
+            <a:ext cx="1280160" cy="457200"/>
+          </a:xfrm>
+          <a:prstGeom prst="rect">
+            <a:avLst/>
+          </a:prstGeom>
+          <a:noFill/>
+          <a:ln/>
+        </p:spPr>
+        <p:txBody>
+          <a:bodyPr wrap="square" rtlCol="0" anchor="ctr"/>
+          <a:lstStyle/>
+          <a:p>
+            <a:pPr indent="0" marL="0">
+              <a:buNone/>
+            </a:pPr>
+            <a:r>
+              <a:rPr lang="en-US" sz="1200" dirty="0">
+                <a:solidFill>
+                  <a:srgbClr val="5F5E5A"/>
+                </a:solidFill>
+                <a:latin typeface="Calibri" pitchFamily="34" charset="0"/>
+                <a:ea typeface="Calibri" pitchFamily="34" charset="-122"/>
+                <a:cs typeface="Calibri" pitchFamily="34" charset="-120"/>
+              </a:rPr>
+              <a:t>p = 0.859</a:t>
+            </a:r>
+            <a:endParaRPr lang="en-US" sz="1200" dirty="0"/>
+          </a:p>
+        </p:txBody>
+      </p:sp>
+      <p:sp>
+        <p:nvSpPr>
+          <p:cNvPr id="13" name="Text 10"/>
+          <p:cNvSpPr txBox="1"/>
+          <p:nvPr/>
+        </p:nvSpPr>
+        <p:spPr>
+          <a:xfrm>
+            <a:off x="7955280" y="3108960"/>
+            <a:ext cx="1188720" cy="457200"/>
+          </a:xfrm>
+          <a:prstGeom prst="rect">
+            <a:avLst/>
+          </a:prstGeom>
+          <a:noFill/>
+          <a:ln/>
+        </p:spPr>
+        <p:txBody>
+          <a:bodyPr wrap="square" rtlCol="0" anchor="ctr"/>
+          <a:lstStyle/>
+          <a:p>
+            <a:pPr indent="0" marL="0">
+              <a:buNone/>
+            </a:pPr>
+            <a:r>
+              <a:rPr lang="en-US" sz="1300" b="1" dirty="0">
+                <a:solidFill>
+                  <a:srgbClr val="1E2761"/>
+                </a:solidFill>
+                <a:latin typeface="Calibri" pitchFamily="34" charset="0"/>
+                <a:ea typeface="Calibri" pitchFamily="34" charset="-122"/>
+                <a:cs typeface="Calibri" pitchFamily="34" charset="-120"/>
+              </a:rPr>
+              <a:t>Groq</a:t>
+            </a:r>
+            <a:endParaRPr lang="en-US" sz="1300" dirty="0"/>
+          </a:p>
+        </p:txBody>
+      </p:sp>
+      <p:sp>
+        <p:nvSpPr>
+          <p:cNvPr id="14" name="Text 11"/>
+          <p:cNvSpPr txBox="1"/>
+          <p:nvPr/>
+        </p:nvSpPr>
+        <p:spPr>
+          <a:xfrm>
+            <a:off x="9144000" y="3108960"/>
+            <a:ext cx="1097280" cy="457200"/>
+          </a:xfrm>
+          <a:prstGeom prst="rect">
+            <a:avLst/>
+          </a:prstGeom>
+          <a:noFill/>
+          <a:ln/>
+        </p:spPr>
+        <p:txBody>
+          <a:bodyPr wrap="square" rtlCol="0" anchor="ctr"/>
+          <a:lstStyle/>
+          <a:p>
+            <a:pPr indent="0" marL="0">
+              <a:buNone/>
+            </a:pPr>
+            <a:r>
+              <a:rPr lang="en-US" sz="1200" dirty="0">
+                <a:solidFill>
+                  <a:srgbClr val="1F1F1F"/>
+                </a:solidFill>
+                <a:latin typeface="Calibri" pitchFamily="34" charset="0"/>
+                <a:ea typeface="Calibri" pitchFamily="34" charset="-122"/>
+                <a:cs typeface="Calibri" pitchFamily="34" charset="-120"/>
+              </a:rPr>
+              <a:t>d = 0.44</a:t>
+            </a:r>
+            <a:endParaRPr lang="en-US" sz="1200" dirty="0"/>
+          </a:p>
+        </p:txBody>
+      </p:sp>
+      <p:sp>
+        <p:nvSpPr>
+          <p:cNvPr id="15" name="Text 12"/>
+          <p:cNvSpPr txBox="1"/>
+          <p:nvPr/>
+        </p:nvSpPr>
+        <p:spPr>
+          <a:xfrm>
+            <a:off x="10241280" y="3108960"/>
+            <a:ext cx="1280160" cy="457200"/>
+          </a:xfrm>
+          <a:prstGeom prst="rect">
+            <a:avLst/>
+          </a:prstGeom>
+          <a:noFill/>
+          <a:ln/>
+        </p:spPr>
+        <p:txBody>
+          <a:bodyPr wrap="square" rtlCol="0" anchor="ctr"/>
+          <a:lstStyle/>
+          <a:p>
+            <a:pPr indent="0" marL="0">
+              <a:buNone/>
+            </a:pPr>
+            <a:r>
+              <a:rPr lang="en-US" sz="1200" dirty="0">
+                <a:solidFill>
+                  <a:srgbClr val="5F5E5A"/>
+                </a:solidFill>
+                <a:latin typeface="Calibri" pitchFamily="34" charset="0"/>
+                <a:ea typeface="Calibri" pitchFamily="34" charset="-122"/>
+                <a:cs typeface="Calibri" pitchFamily="34" charset="-120"/>
+              </a:rPr>
+              <a:t>p = 0.150</a:t>
+            </a:r>
+            <a:endParaRPr lang="en-US" sz="1200" dirty="0"/>
+          </a:p>
+        </p:txBody>
+      </p:sp>
+      <p:sp>
+        <p:nvSpPr>
+          <p:cNvPr id="16" name="Text 13"/>
+          <p:cNvSpPr txBox="1"/>
+          <p:nvPr/>
+        </p:nvSpPr>
+        <p:spPr>
+          <a:xfrm>
+            <a:off x="7955280" y="3840480"/>
+            <a:ext cx="3474720" cy="1645920"/>
           </a:xfrm>
           <a:prstGeom prst="rect">
             <a:avLst/>
@@ -3299,456 +4345,15 @@
             <a:r>
               <a:rPr lang="en-US" sz="1100" i="1" dirty="0">
                 <a:solidFill>
-                  <a:srgbClr val="5F5E5A"/>
-                </a:solidFill>
-                <a:latin typeface="Calibri" pitchFamily="34" charset="0"/>
-                <a:ea typeface="Calibri" pitchFamily="34" charset="-122"/>
-                <a:cs typeface="Calibri" pitchFamily="34" charset="-120"/>
-              </a:rPr>
-              <a:t>Small-medium effect, consistent direction</a:t>
+                  <a:srgbClr val="1F1F1F"/>
+                </a:solidFill>
+                <a:latin typeface="Calibri" pitchFamily="34" charset="0"/>
+                <a:ea typeface="Calibri" pitchFamily="34" charset="-122"/>
+                <a:cs typeface="Calibri" pitchFamily="34" charset="-120"/>
+              </a:rPr>
+              <a:t>H1 not confirmed for any provider — all p &gt; 0.05. Gemini and Groq show a small-to-medium effect trending toward stronger reasoning than retrieval; Mistral shows negligible difference.</a:t>
             </a:r>
             <a:endParaRPr lang="en-US" sz="1100" dirty="0"/>
-          </a:p>
-        </p:txBody>
-      </p:sp>
-      <p:sp>
-        <p:nvSpPr>
-          <p:cNvPr id="8" name="Text 6"/>
-          <p:cNvSpPr txBox="1"/>
-          <p:nvPr/>
-        </p:nvSpPr>
-        <p:spPr>
-          <a:xfrm>
-            <a:off x="5943600" y="1783080"/>
-            <a:ext cx="5486400" cy="640080"/>
-          </a:xfrm>
-          <a:prstGeom prst="rect">
-            <a:avLst/>
-          </a:prstGeom>
-          <a:noFill/>
-          <a:ln/>
-        </p:spPr>
-        <p:txBody>
-          <a:bodyPr wrap="square" rtlCol="0" anchor="ctr"/>
-          <a:lstStyle/>
-          <a:p>
-            <a:pPr indent="0" marL="0">
-              <a:buNone/>
-            </a:pPr>
-            <a:r>
-              <a:rPr lang="en-US" sz="1600" dirty="0">
-                <a:solidFill>
-                  <a:srgbClr val="1F1F1F"/>
-                </a:solidFill>
-                <a:latin typeface="Calibri" pitchFamily="34" charset="0"/>
-                <a:ea typeface="Calibri" pitchFamily="34" charset="-122"/>
-                <a:cs typeface="Calibri" pitchFamily="34" charset="-120"/>
-              </a:rPr>
-              <a:t>Not significant</a:t>
-            </a:r>
-            <a:endParaRPr lang="en-US" sz="1600" dirty="0"/>
-          </a:p>
-        </p:txBody>
-      </p:sp>
-      <p:sp>
-        <p:nvSpPr>
-          <p:cNvPr id="9" name="Shape 7"/>
-          <p:cNvSpPr/>
-          <p:nvPr/>
-        </p:nvSpPr>
-        <p:spPr>
-          <a:xfrm>
-            <a:off x="548640" y="2971800"/>
-            <a:ext cx="11064240" cy="1280160"/>
-          </a:xfrm>
-          <a:prstGeom prst="rect">
-            <a:avLst/>
-          </a:prstGeom>
-          <a:solidFill>
-            <a:srgbClr val="FFFFFF"/>
-          </a:solidFill>
-          <a:ln w="12700">
-            <a:solidFill>
-              <a:srgbClr val="D5D5D0"/>
-            </a:solidFill>
-            <a:prstDash val="solid"/>
-          </a:ln>
-        </p:spPr>
-      </p:sp>
-      <p:sp>
-        <p:nvSpPr>
-          <p:cNvPr id="10" name="Shape 8"/>
-          <p:cNvSpPr/>
-          <p:nvPr/>
-        </p:nvSpPr>
-        <p:spPr>
-          <a:xfrm>
-            <a:off x="822960" y="3246120"/>
-            <a:ext cx="731520" cy="731520"/>
-          </a:xfrm>
-          <a:prstGeom prst="ellipse">
-            <a:avLst/>
-          </a:prstGeom>
-          <a:solidFill>
-            <a:srgbClr val="5F5E5A"/>
-          </a:solidFill>
-          <a:ln/>
-        </p:spPr>
-      </p:sp>
-      <p:sp>
-        <p:nvSpPr>
-          <p:cNvPr id="11" name="Text 9"/>
-          <p:cNvSpPr txBox="1"/>
-          <p:nvPr/>
-        </p:nvSpPr>
-        <p:spPr>
-          <a:xfrm>
-            <a:off x="822960" y="3246120"/>
-            <a:ext cx="731520" cy="731520"/>
-          </a:xfrm>
-          <a:prstGeom prst="rect">
-            <a:avLst/>
-          </a:prstGeom>
-          <a:noFill/>
-          <a:ln/>
-        </p:spPr>
-        <p:txBody>
-          <a:bodyPr wrap="square" lIns="0" tIns="0" rIns="0" bIns="0" rtlCol="0" anchor="ctr"/>
-          <a:lstStyle/>
-          <a:p>
-            <a:pPr algn="ctr" indent="0" marL="0">
-              <a:buNone/>
-            </a:pPr>
-            <a:r>
-              <a:rPr lang="en-US" sz="1800" b="1" dirty="0">
-                <a:solidFill>
-                  <a:srgbClr val="FFFFFF"/>
-                </a:solidFill>
-                <a:latin typeface="Cambria" pitchFamily="34" charset="0"/>
-                <a:ea typeface="Cambria" pitchFamily="34" charset="-122"/>
-                <a:cs typeface="Cambria" pitchFamily="34" charset="-120"/>
-              </a:rPr>
-              <a:t>H2</a:t>
-            </a:r>
-            <a:endParaRPr lang="en-US" sz="1800" dirty="0"/>
-          </a:p>
-        </p:txBody>
-      </p:sp>
-      <p:sp>
-        <p:nvSpPr>
-          <p:cNvPr id="12" name="Text 10"/>
-          <p:cNvSpPr txBox="1"/>
-          <p:nvPr/>
-        </p:nvSpPr>
-        <p:spPr>
-          <a:xfrm>
-            <a:off x="1828800" y="3108960"/>
-            <a:ext cx="3931920" cy="457200"/>
-          </a:xfrm>
-          <a:prstGeom prst="rect">
-            <a:avLst/>
-          </a:prstGeom>
-          <a:noFill/>
-          <a:ln/>
-        </p:spPr>
-        <p:txBody>
-          <a:bodyPr wrap="square" rtlCol="0" anchor="ctr"/>
-          <a:lstStyle/>
-          <a:p>
-            <a:pPr indent="0" marL="0">
-              <a:buNone/>
-            </a:pPr>
-            <a:r>
-              <a:rPr lang="en-US" sz="1500" b="1" dirty="0">
-                <a:solidFill>
-                  <a:srgbClr val="1E2761"/>
-                </a:solidFill>
-                <a:latin typeface="Calibri" pitchFamily="34" charset="0"/>
-                <a:ea typeface="Calibri" pitchFamily="34" charset="-122"/>
-                <a:cs typeface="Calibri" pitchFamily="34" charset="-120"/>
-              </a:rPr>
-              <a:t>Instruction Following vs. Difficulty</a:t>
-            </a:r>
-            <a:endParaRPr lang="en-US" sz="1500" dirty="0"/>
-          </a:p>
-        </p:txBody>
-      </p:sp>
-      <p:sp>
-        <p:nvSpPr>
-          <p:cNvPr id="13" name="Text 11"/>
-          <p:cNvSpPr txBox="1"/>
-          <p:nvPr/>
-        </p:nvSpPr>
-        <p:spPr>
-          <a:xfrm>
-            <a:off x="1828800" y="3566160"/>
-            <a:ext cx="3931920" cy="548640"/>
-          </a:xfrm>
-          <a:prstGeom prst="rect">
-            <a:avLst/>
-          </a:prstGeom>
-          <a:noFill/>
-          <a:ln/>
-        </p:spPr>
-        <p:txBody>
-          <a:bodyPr wrap="square" rtlCol="0" anchor="ctr"/>
-          <a:lstStyle/>
-          <a:p>
-            <a:pPr indent="0" marL="0">
-              <a:buNone/>
-            </a:pPr>
-            <a:r>
-              <a:rPr lang="en-US" sz="1100" i="1" dirty="0">
-                <a:solidFill>
-                  <a:srgbClr val="5F5E5A"/>
-                </a:solidFill>
-                <a:latin typeface="Calibri" pitchFamily="34" charset="0"/>
-                <a:ea typeface="Calibri" pitchFamily="34" charset="-122"/>
-                <a:cs typeface="Calibri" pitchFamily="34" charset="-120"/>
-              </a:rPr>
-              <a:t>Weak, inconsistent correlation</a:t>
-            </a:r>
-            <a:endParaRPr lang="en-US" sz="1100" dirty="0"/>
-          </a:p>
-        </p:txBody>
-      </p:sp>
-      <p:sp>
-        <p:nvSpPr>
-          <p:cNvPr id="14" name="Text 12"/>
-          <p:cNvSpPr txBox="1"/>
-          <p:nvPr/>
-        </p:nvSpPr>
-        <p:spPr>
-          <a:xfrm>
-            <a:off x="5943600" y="3291840"/>
-            <a:ext cx="5486400" cy="640080"/>
-          </a:xfrm>
-          <a:prstGeom prst="rect">
-            <a:avLst/>
-          </a:prstGeom>
-          <a:noFill/>
-          <a:ln/>
-        </p:spPr>
-        <p:txBody>
-          <a:bodyPr wrap="square" rtlCol="0" anchor="ctr"/>
-          <a:lstStyle/>
-          <a:p>
-            <a:pPr indent="0" marL="0">
-              <a:buNone/>
-            </a:pPr>
-            <a:r>
-              <a:rPr lang="en-US" sz="1600" dirty="0">
-                <a:solidFill>
-                  <a:srgbClr val="1F1F1F"/>
-                </a:solidFill>
-                <a:latin typeface="Calibri" pitchFamily="34" charset="0"/>
-                <a:ea typeface="Calibri" pitchFamily="34" charset="-122"/>
-                <a:cs typeface="Calibri" pitchFamily="34" charset="-120"/>
-              </a:rPr>
-              <a:t>Not significant</a:t>
-            </a:r>
-            <a:endParaRPr lang="en-US" sz="1600" dirty="0"/>
-          </a:p>
-        </p:txBody>
-      </p:sp>
-      <p:sp>
-        <p:nvSpPr>
-          <p:cNvPr id="15" name="Shape 13"/>
-          <p:cNvSpPr/>
-          <p:nvPr/>
-        </p:nvSpPr>
-        <p:spPr>
-          <a:xfrm>
-            <a:off x="548640" y="4480560"/>
-            <a:ext cx="11064240" cy="1280160"/>
-          </a:xfrm>
-          <a:prstGeom prst="rect">
-            <a:avLst/>
-          </a:prstGeom>
-          <a:solidFill>
-            <a:srgbClr val="CADCFC"/>
-          </a:solidFill>
-          <a:ln w="25400">
-            <a:solidFill>
-              <a:srgbClr val="1E2761"/>
-            </a:solidFill>
-            <a:prstDash val="solid"/>
-          </a:ln>
-        </p:spPr>
-      </p:sp>
-      <p:sp>
-        <p:nvSpPr>
-          <p:cNvPr id="16" name="Shape 14"/>
-          <p:cNvSpPr/>
-          <p:nvPr/>
-        </p:nvSpPr>
-        <p:spPr>
-          <a:xfrm>
-            <a:off x="822960" y="4754880"/>
-            <a:ext cx="731520" cy="731520"/>
-          </a:xfrm>
-          <a:prstGeom prst="ellipse">
-            <a:avLst/>
-          </a:prstGeom>
-          <a:solidFill>
-            <a:srgbClr val="1E2761"/>
-          </a:solidFill>
-          <a:ln/>
-        </p:spPr>
-      </p:sp>
-      <p:sp>
-        <p:nvSpPr>
-          <p:cNvPr id="17" name="Text 15"/>
-          <p:cNvSpPr txBox="1"/>
-          <p:nvPr/>
-        </p:nvSpPr>
-        <p:spPr>
-          <a:xfrm>
-            <a:off x="822960" y="4754880"/>
-            <a:ext cx="731520" cy="731520"/>
-          </a:xfrm>
-          <a:prstGeom prst="rect">
-            <a:avLst/>
-          </a:prstGeom>
-          <a:noFill/>
-          <a:ln/>
-        </p:spPr>
-        <p:txBody>
-          <a:bodyPr wrap="square" lIns="0" tIns="0" rIns="0" bIns="0" rtlCol="0" anchor="ctr"/>
-          <a:lstStyle/>
-          <a:p>
-            <a:pPr algn="ctr" indent="0" marL="0">
-              <a:buNone/>
-            </a:pPr>
-            <a:r>
-              <a:rPr lang="en-US" sz="1800" b="1" dirty="0">
-                <a:solidFill>
-                  <a:srgbClr val="FFFFFF"/>
-                </a:solidFill>
-                <a:latin typeface="Cambria" pitchFamily="34" charset="0"/>
-                <a:ea typeface="Cambria" pitchFamily="34" charset="-122"/>
-                <a:cs typeface="Cambria" pitchFamily="34" charset="-120"/>
-              </a:rPr>
-              <a:t>H3</a:t>
-            </a:r>
-            <a:endParaRPr lang="en-US" sz="1800" dirty="0"/>
-          </a:p>
-        </p:txBody>
-      </p:sp>
-      <p:sp>
-        <p:nvSpPr>
-          <p:cNvPr id="18" name="Text 16"/>
-          <p:cNvSpPr txBox="1"/>
-          <p:nvPr/>
-        </p:nvSpPr>
-        <p:spPr>
-          <a:xfrm>
-            <a:off x="1828800" y="4617720"/>
-            <a:ext cx="3931920" cy="457200"/>
-          </a:xfrm>
-          <a:prstGeom prst="rect">
-            <a:avLst/>
-          </a:prstGeom>
-          <a:noFill/>
-          <a:ln/>
-        </p:spPr>
-        <p:txBody>
-          <a:bodyPr wrap="square" rtlCol="0" anchor="ctr"/>
-          <a:lstStyle/>
-          <a:p>
-            <a:pPr indent="0" marL="0">
-              <a:buNone/>
-            </a:pPr>
-            <a:r>
-              <a:rPr lang="en-US" sz="1500" b="1" dirty="0">
-                <a:solidFill>
-                  <a:srgbClr val="1E2761"/>
-                </a:solidFill>
-                <a:latin typeface="Calibri" pitchFamily="34" charset="0"/>
-                <a:ea typeface="Calibri" pitchFamily="34" charset="-122"/>
-                <a:cs typeface="Calibri" pitchFamily="34" charset="-120"/>
-              </a:rPr>
-              <a:t>Hallucination: Mistral vs. Groq</a:t>
-            </a:r>
-            <a:endParaRPr lang="en-US" sz="1500" dirty="0"/>
-          </a:p>
-        </p:txBody>
-      </p:sp>
-      <p:sp>
-        <p:nvSpPr>
-          <p:cNvPr id="19" name="Text 17"/>
-          <p:cNvSpPr txBox="1"/>
-          <p:nvPr/>
-        </p:nvSpPr>
-        <p:spPr>
-          <a:xfrm>
-            <a:off x="1828800" y="5074920"/>
-            <a:ext cx="3931920" cy="548640"/>
-          </a:xfrm>
-          <a:prstGeom prst="rect">
-            <a:avLst/>
-          </a:prstGeom>
-          <a:noFill/>
-          <a:ln/>
-        </p:spPr>
-        <p:txBody>
-          <a:bodyPr wrap="square" rtlCol="0" anchor="ctr"/>
-          <a:lstStyle/>
-          <a:p>
-            <a:pPr indent="0" marL="0">
-              <a:buNone/>
-            </a:pPr>
-            <a:r>
-              <a:rPr lang="en-US" sz="1100" i="1" dirty="0">
-                <a:solidFill>
-                  <a:srgbClr val="5F5E5A"/>
-                </a:solidFill>
-                <a:latin typeface="Calibri" pitchFamily="34" charset="0"/>
-                <a:ea typeface="Calibri" pitchFamily="34" charset="-122"/>
-                <a:cs typeface="Calibri" pitchFamily="34" charset="-120"/>
-              </a:rPr>
-              <a:t>Large effect (d = 0.84)</a:t>
-            </a:r>
-            <a:endParaRPr lang="en-US" sz="1100" dirty="0"/>
-          </a:p>
-        </p:txBody>
-      </p:sp>
-      <p:sp>
-        <p:nvSpPr>
-          <p:cNvPr id="20" name="Text 18"/>
-          <p:cNvSpPr txBox="1"/>
-          <p:nvPr/>
-        </p:nvSpPr>
-        <p:spPr>
-          <a:xfrm>
-            <a:off x="5943600" y="4800600"/>
-            <a:ext cx="5486400" cy="640080"/>
-          </a:xfrm>
-          <a:prstGeom prst="rect">
-            <a:avLst/>
-          </a:prstGeom>
-          <a:noFill/>
-          <a:ln/>
-        </p:spPr>
-        <p:txBody>
-          <a:bodyPr wrap="square" rtlCol="0" anchor="ctr"/>
-          <a:lstStyle/>
-          <a:p>
-            <a:pPr indent="0" marL="0">
-              <a:buNone/>
-            </a:pPr>
-            <a:r>
-              <a:rPr lang="en-US" sz="1600" b="1" dirty="0">
-                <a:solidFill>
-                  <a:srgbClr val="2E7D32"/>
-                </a:solidFill>
-                <a:latin typeface="Calibri" pitchFamily="34" charset="0"/>
-                <a:ea typeface="Calibri" pitchFamily="34" charset="-122"/>
-                <a:cs typeface="Calibri" pitchFamily="34" charset="-120"/>
-              </a:rPr>
-              <a:t>p = 0.01 — SIGNIFICANT</a:t>
-            </a:r>
-            <a:endParaRPr lang="en-US" sz="1600" dirty="0"/>
           </a:p>
         </p:txBody>
       </p:sp>
@@ -3766,7 +4371,7 @@
     <p:bg>
       <p:bgPr>
         <a:solidFill>
-          <a:srgbClr val="1E2761"/>
+          <a:srgbClr val="FFFFFF"/>
         </a:solidFill>
       </p:bgPr>
     </p:bg>
@@ -3792,34 +4397,34 @@
         </p:nvSpPr>
         <p:spPr>
           <a:xfrm>
-            <a:off x="548640" y="457200"/>
-            <a:ext cx="10515600" cy="640080"/>
-          </a:xfrm>
-          <a:prstGeom prst="rect">
-            <a:avLst/>
-          </a:prstGeom>
-          <a:noFill/>
-          <a:ln/>
-        </p:spPr>
-        <p:txBody>
-          <a:bodyPr wrap="square" rtlCol="0" anchor="ctr"/>
-          <a:lstStyle/>
-          <a:p>
-            <a:pPr indent="0" marL="0">
-              <a:buNone/>
-            </a:pPr>
-            <a:r>
-              <a:rPr lang="en-US" sz="2800" dirty="0">
-                <a:solidFill>
-                  <a:srgbClr val="CADCFC"/>
+            <a:off x="548640" y="320040"/>
+            <a:ext cx="10972800" cy="640080"/>
+          </a:xfrm>
+          <a:prstGeom prst="rect">
+            <a:avLst/>
+          </a:prstGeom>
+          <a:noFill/>
+          <a:ln/>
+        </p:spPr>
+        <p:txBody>
+          <a:bodyPr wrap="square" rtlCol="0" anchor="ctr"/>
+          <a:lstStyle/>
+          <a:p>
+            <a:pPr indent="0" marL="0">
+              <a:buNone/>
+            </a:pPr>
+            <a:r>
+              <a:rPr lang="en-US" sz="2500" b="1" dirty="0">
+                <a:solidFill>
+                  <a:srgbClr val="1E2761"/>
                 </a:solidFill>
                 <a:latin typeface="Cambria" pitchFamily="34" charset="0"/>
                 <a:ea typeface="Cambria" pitchFamily="34" charset="-122"/>
                 <a:cs typeface="Cambria" pitchFamily="34" charset="-120"/>
               </a:rPr>
-              <a:t>The Headline Finding</a:t>
-            </a:r>
-            <a:endParaRPr lang="en-US" sz="2800" dirty="0"/>
+              <a:t>H2: Instruction Following vs. Difficulty — All Three Providers</a:t>
+            </a:r>
+            <a:endParaRPr lang="en-US" sz="2500" dirty="0"/>
           </a:p>
         </p:txBody>
       </p:sp>
@@ -3831,103 +4436,155 @@
         </p:nvSpPr>
         <p:spPr>
           <a:xfrm>
-            <a:off x="548640" y="1188720"/>
-            <a:ext cx="10515600" cy="1188720"/>
-          </a:xfrm>
-          <a:prstGeom prst="rect">
-            <a:avLst/>
-          </a:prstGeom>
-          <a:noFill/>
-          <a:ln/>
-        </p:spPr>
-        <p:txBody>
-          <a:bodyPr wrap="square" rtlCol="0" anchor="ctr"/>
-          <a:lstStyle/>
-          <a:p>
-            <a:pPr indent="0" marL="0">
-              <a:buNone/>
-            </a:pPr>
-            <a:r>
-              <a:rPr lang="en-US" sz="3600" b="1" dirty="0">
-                <a:solidFill>
-                  <a:srgbClr val="FFFFFF"/>
-                </a:solidFill>
-                <a:latin typeface="Cambria" pitchFamily="34" charset="0"/>
-                <a:ea typeface="Cambria" pitchFamily="34" charset="-122"/>
-                <a:cs typeface="Cambria" pitchFamily="34" charset="-120"/>
-              </a:rPr>
-              <a:t>Groq significantly outperforms Mistral</a:t>
-            </a:r>
-            <a:endParaRPr lang="en-US" sz="3600" dirty="0"/>
-          </a:p>
-          <a:p>
-            <a:pPr indent="0" marL="0">
-              <a:buNone/>
-            </a:pPr>
-            <a:r>
-              <a:rPr lang="en-US" sz="3600" b="1" dirty="0">
-                <a:solidFill>
-                  <a:srgbClr val="FFFFFF"/>
-                </a:solidFill>
-                <a:latin typeface="Cambria" pitchFamily="34" charset="0"/>
-                <a:ea typeface="Cambria" pitchFamily="34" charset="-122"/>
-                <a:cs typeface="Cambria" pitchFamily="34" charset="-120"/>
-              </a:rPr>
-              <a:t>on hallucination resistance</a:t>
-            </a:r>
-            <a:endParaRPr lang="en-US" sz="3600" dirty="0"/>
-          </a:p>
-        </p:txBody>
-      </p:sp>
-      <p:sp>
-        <p:nvSpPr>
-          <p:cNvPr id="4" name="Text 2"/>
-          <p:cNvSpPr txBox="1"/>
-          <p:nvPr/>
-        </p:nvSpPr>
-        <p:spPr>
-          <a:xfrm>
-            <a:off x="548640" y="2743200"/>
-            <a:ext cx="3566160" cy="914400"/>
-          </a:xfrm>
-          <a:prstGeom prst="rect">
-            <a:avLst/>
-          </a:prstGeom>
-          <a:noFill/>
-          <a:ln/>
-        </p:spPr>
-        <p:txBody>
-          <a:bodyPr wrap="square" lIns="0" tIns="0" rIns="0" bIns="0" rtlCol="0" anchor="ctr"/>
+            <a:off x="548640" y="914400"/>
+            <a:ext cx="10972800" cy="365760"/>
+          </a:xfrm>
+          <a:prstGeom prst="rect">
+            <a:avLst/>
+          </a:prstGeom>
+          <a:noFill/>
+          <a:ln/>
+        </p:spPr>
+        <p:txBody>
+          <a:bodyPr wrap="square" rtlCol="0" anchor="ctr"/>
+          <a:lstStyle/>
+          <a:p>
+            <a:pPr indent="0" marL="0">
+              <a:buNone/>
+            </a:pPr>
+            <a:r>
+              <a:rPr lang="en-US" sz="1300" i="1" dirty="0">
+                <a:solidFill>
+                  <a:srgbClr val="5F5E5A"/>
+                </a:solidFill>
+                <a:latin typeface="Calibri" pitchFamily="34" charset="0"/>
+                <a:ea typeface="Calibri" pitchFamily="34" charset="-122"/>
+                <a:cs typeface="Calibri" pitchFamily="34" charset="-120"/>
+              </a:rPr>
+              <a:t>Pearson correlation between prompt difficulty tier and Instruction Following score, per provider</a:t>
+            </a:r>
+            <a:endParaRPr lang="en-US" sz="1300" dirty="0"/>
+          </a:p>
+        </p:txBody>
+      </p:sp>
+      <p:sp>
+        <p:nvSpPr>
+          <p:cNvPr id="4" name="Shape 2"/>
+          <p:cNvSpPr/>
+          <p:nvPr/>
+        </p:nvSpPr>
+        <p:spPr>
+          <a:xfrm>
+            <a:off x="914400" y="2926080"/>
+            <a:ext cx="9692640" cy="0"/>
+          </a:xfrm>
+          <a:prstGeom prst="line">
+            <a:avLst/>
+          </a:prstGeom>
+          <a:noFill/>
+          <a:ln w="25400">
+            <a:solidFill>
+              <a:srgbClr val="5F5E5A"/>
+            </a:solidFill>
+            <a:prstDash val="solid"/>
+          </a:ln>
+        </p:spPr>
+      </p:sp>
+      <p:sp>
+        <p:nvSpPr>
+          <p:cNvPr id="5" name="Shape 3"/>
+          <p:cNvSpPr/>
+          <p:nvPr/>
+        </p:nvSpPr>
+        <p:spPr>
+          <a:xfrm>
+            <a:off x="914400" y="2880360"/>
+            <a:ext cx="0" cy="137160"/>
+          </a:xfrm>
+          <a:prstGeom prst="line">
+            <a:avLst/>
+          </a:prstGeom>
+          <a:noFill/>
+          <a:ln w="19050">
+            <a:solidFill>
+              <a:srgbClr val="5F5E5A"/>
+            </a:solidFill>
+            <a:prstDash val="solid"/>
+          </a:ln>
+        </p:spPr>
+      </p:sp>
+      <p:sp>
+        <p:nvSpPr>
+          <p:cNvPr id="6" name="Text 4"/>
+          <p:cNvSpPr txBox="1"/>
+          <p:nvPr/>
+        </p:nvSpPr>
+        <p:spPr>
+          <a:xfrm>
+            <a:off x="548640" y="3063240"/>
+            <a:ext cx="731520" cy="320040"/>
+          </a:xfrm>
+          <a:prstGeom prst="rect">
+            <a:avLst/>
+          </a:prstGeom>
+          <a:noFill/>
+          <a:ln/>
+        </p:spPr>
+        <p:txBody>
+          <a:bodyPr wrap="square" rtlCol="0" anchor="ctr"/>
           <a:lstStyle/>
           <a:p>
             <a:pPr algn="ctr" indent="0" marL="0">
               <a:buNone/>
             </a:pPr>
             <a:r>
-              <a:rPr lang="en-US" sz="4000" b="1" dirty="0">
-                <a:solidFill>
-                  <a:srgbClr val="CADCFC"/>
-                </a:solidFill>
-                <a:latin typeface="Cambria" pitchFamily="34" charset="0"/>
-                <a:ea typeface="Cambria" pitchFamily="34" charset="-122"/>
-                <a:cs typeface="Cambria" pitchFamily="34" charset="-120"/>
-              </a:rPr>
-              <a:t>p = 0.01</a:t>
-            </a:r>
-            <a:endParaRPr lang="en-US" sz="4000" dirty="0"/>
-          </a:p>
-        </p:txBody>
-      </p:sp>
-      <p:sp>
-        <p:nvSpPr>
-          <p:cNvPr id="5" name="Text 3"/>
-          <p:cNvSpPr txBox="1"/>
-          <p:nvPr/>
-        </p:nvSpPr>
-        <p:spPr>
-          <a:xfrm>
-            <a:off x="548640" y="3657600"/>
-            <a:ext cx="3566160" cy="548640"/>
+              <a:rPr lang="en-US" sz="1200" dirty="0">
+                <a:solidFill>
+                  <a:srgbClr val="5F5E5A"/>
+                </a:solidFill>
+                <a:latin typeface="Calibri" pitchFamily="34" charset="0"/>
+                <a:ea typeface="Calibri" pitchFamily="34" charset="-122"/>
+                <a:cs typeface="Calibri" pitchFamily="34" charset="-120"/>
+              </a:rPr>
+              <a:t>-1.0</a:t>
+            </a:r>
+            <a:endParaRPr lang="en-US" sz="1200" dirty="0"/>
+          </a:p>
+        </p:txBody>
+      </p:sp>
+      <p:sp>
+        <p:nvSpPr>
+          <p:cNvPr id="7" name="Shape 5"/>
+          <p:cNvSpPr/>
+          <p:nvPr/>
+        </p:nvSpPr>
+        <p:spPr>
+          <a:xfrm>
+            <a:off x="3337560" y="2880360"/>
+            <a:ext cx="0" cy="137160"/>
+          </a:xfrm>
+          <a:prstGeom prst="line">
+            <a:avLst/>
+          </a:prstGeom>
+          <a:noFill/>
+          <a:ln w="19050">
+            <a:solidFill>
+              <a:srgbClr val="5F5E5A"/>
+            </a:solidFill>
+            <a:prstDash val="solid"/>
+          </a:ln>
+        </p:spPr>
+      </p:sp>
+      <p:sp>
+        <p:nvSpPr>
+          <p:cNvPr id="8" name="Text 6"/>
+          <p:cNvSpPr txBox="1"/>
+          <p:nvPr/>
+        </p:nvSpPr>
+        <p:spPr>
+          <a:xfrm>
+            <a:off x="2971800" y="3063240"/>
+            <a:ext cx="731520" cy="320040"/>
           </a:xfrm>
           <a:prstGeom prst="rect">
             <a:avLst/>
@@ -3943,212 +4600,529 @@
               <a:buNone/>
             </a:pPr>
             <a:r>
+              <a:rPr lang="en-US" sz="1200" dirty="0">
+                <a:solidFill>
+                  <a:srgbClr val="5F5E5A"/>
+                </a:solidFill>
+                <a:latin typeface="Calibri" pitchFamily="34" charset="0"/>
+                <a:ea typeface="Calibri" pitchFamily="34" charset="-122"/>
+                <a:cs typeface="Calibri" pitchFamily="34" charset="-120"/>
+              </a:rPr>
+              <a:t>-0.5</a:t>
+            </a:r>
+            <a:endParaRPr lang="en-US" sz="1200" dirty="0"/>
+          </a:p>
+        </p:txBody>
+      </p:sp>
+      <p:sp>
+        <p:nvSpPr>
+          <p:cNvPr id="9" name="Shape 7"/>
+          <p:cNvSpPr/>
+          <p:nvPr/>
+        </p:nvSpPr>
+        <p:spPr>
+          <a:xfrm>
+            <a:off x="5760720" y="2880360"/>
+            <a:ext cx="0" cy="137160"/>
+          </a:xfrm>
+          <a:prstGeom prst="line">
+            <a:avLst/>
+          </a:prstGeom>
+          <a:noFill/>
+          <a:ln w="19050">
+            <a:solidFill>
+              <a:srgbClr val="5F5E5A"/>
+            </a:solidFill>
+            <a:prstDash val="solid"/>
+          </a:ln>
+        </p:spPr>
+      </p:sp>
+      <p:sp>
+        <p:nvSpPr>
+          <p:cNvPr id="10" name="Text 8"/>
+          <p:cNvSpPr txBox="1"/>
+          <p:nvPr/>
+        </p:nvSpPr>
+        <p:spPr>
+          <a:xfrm>
+            <a:off x="5394960" y="3063240"/>
+            <a:ext cx="731520" cy="320040"/>
+          </a:xfrm>
+          <a:prstGeom prst="rect">
+            <a:avLst/>
+          </a:prstGeom>
+          <a:noFill/>
+          <a:ln/>
+        </p:spPr>
+        <p:txBody>
+          <a:bodyPr wrap="square" rtlCol="0" anchor="ctr"/>
+          <a:lstStyle/>
+          <a:p>
+            <a:pPr algn="ctr" indent="0" marL="0">
+              <a:buNone/>
+            </a:pPr>
+            <a:r>
+              <a:rPr lang="en-US" sz="1200" dirty="0">
+                <a:solidFill>
+                  <a:srgbClr val="5F5E5A"/>
+                </a:solidFill>
+                <a:latin typeface="Calibri" pitchFamily="34" charset="0"/>
+                <a:ea typeface="Calibri" pitchFamily="34" charset="-122"/>
+                <a:cs typeface="Calibri" pitchFamily="34" charset="-120"/>
+              </a:rPr>
+              <a:t>0.0</a:t>
+            </a:r>
+            <a:endParaRPr lang="en-US" sz="1200" dirty="0"/>
+          </a:p>
+        </p:txBody>
+      </p:sp>
+      <p:sp>
+        <p:nvSpPr>
+          <p:cNvPr id="11" name="Shape 9"/>
+          <p:cNvSpPr/>
+          <p:nvPr/>
+        </p:nvSpPr>
+        <p:spPr>
+          <a:xfrm>
+            <a:off x="8183880" y="2880360"/>
+            <a:ext cx="0" cy="137160"/>
+          </a:xfrm>
+          <a:prstGeom prst="line">
+            <a:avLst/>
+          </a:prstGeom>
+          <a:noFill/>
+          <a:ln w="19050">
+            <a:solidFill>
+              <a:srgbClr val="5F5E5A"/>
+            </a:solidFill>
+            <a:prstDash val="solid"/>
+          </a:ln>
+        </p:spPr>
+      </p:sp>
+      <p:sp>
+        <p:nvSpPr>
+          <p:cNvPr id="12" name="Text 10"/>
+          <p:cNvSpPr txBox="1"/>
+          <p:nvPr/>
+        </p:nvSpPr>
+        <p:spPr>
+          <a:xfrm>
+            <a:off x="7818120" y="3063240"/>
+            <a:ext cx="731520" cy="320040"/>
+          </a:xfrm>
+          <a:prstGeom prst="rect">
+            <a:avLst/>
+          </a:prstGeom>
+          <a:noFill/>
+          <a:ln/>
+        </p:spPr>
+        <p:txBody>
+          <a:bodyPr wrap="square" rtlCol="0" anchor="ctr"/>
+          <a:lstStyle/>
+          <a:p>
+            <a:pPr algn="ctr" indent="0" marL="0">
+              <a:buNone/>
+            </a:pPr>
+            <a:r>
+              <a:rPr lang="en-US" sz="1200" dirty="0">
+                <a:solidFill>
+                  <a:srgbClr val="5F5E5A"/>
+                </a:solidFill>
+                <a:latin typeface="Calibri" pitchFamily="34" charset="0"/>
+                <a:ea typeface="Calibri" pitchFamily="34" charset="-122"/>
+                <a:cs typeface="Calibri" pitchFamily="34" charset="-120"/>
+              </a:rPr>
+              <a:t>+0.5</a:t>
+            </a:r>
+            <a:endParaRPr lang="en-US" sz="1200" dirty="0"/>
+          </a:p>
+        </p:txBody>
+      </p:sp>
+      <p:sp>
+        <p:nvSpPr>
+          <p:cNvPr id="13" name="Shape 11"/>
+          <p:cNvSpPr/>
+          <p:nvPr/>
+        </p:nvSpPr>
+        <p:spPr>
+          <a:xfrm>
+            <a:off x="10607040" y="2880360"/>
+            <a:ext cx="0" cy="137160"/>
+          </a:xfrm>
+          <a:prstGeom prst="line">
+            <a:avLst/>
+          </a:prstGeom>
+          <a:noFill/>
+          <a:ln w="19050">
+            <a:solidFill>
+              <a:srgbClr val="5F5E5A"/>
+            </a:solidFill>
+            <a:prstDash val="solid"/>
+          </a:ln>
+        </p:spPr>
+      </p:sp>
+      <p:sp>
+        <p:nvSpPr>
+          <p:cNvPr id="14" name="Text 12"/>
+          <p:cNvSpPr txBox="1"/>
+          <p:nvPr/>
+        </p:nvSpPr>
+        <p:spPr>
+          <a:xfrm>
+            <a:off x="10241280" y="3063240"/>
+            <a:ext cx="731520" cy="320040"/>
+          </a:xfrm>
+          <a:prstGeom prst="rect">
+            <a:avLst/>
+          </a:prstGeom>
+          <a:noFill/>
+          <a:ln/>
+        </p:spPr>
+        <p:txBody>
+          <a:bodyPr wrap="square" rtlCol="0" anchor="ctr"/>
+          <a:lstStyle/>
+          <a:p>
+            <a:pPr algn="ctr" indent="0" marL="0">
+              <a:buNone/>
+            </a:pPr>
+            <a:r>
+              <a:rPr lang="en-US" sz="1200" dirty="0">
+                <a:solidFill>
+                  <a:srgbClr val="5F5E5A"/>
+                </a:solidFill>
+                <a:latin typeface="Calibri" pitchFamily="34" charset="0"/>
+                <a:ea typeface="Calibri" pitchFamily="34" charset="-122"/>
+                <a:cs typeface="Calibri" pitchFamily="34" charset="-120"/>
+              </a:rPr>
+              <a:t>+1.0</a:t>
+            </a:r>
+            <a:endParaRPr lang="en-US" sz="1200" dirty="0"/>
+          </a:p>
+        </p:txBody>
+      </p:sp>
+      <p:sp>
+        <p:nvSpPr>
+          <p:cNvPr id="15" name="Shape 13"/>
+          <p:cNvSpPr/>
+          <p:nvPr/>
+        </p:nvSpPr>
+        <p:spPr>
+          <a:xfrm>
+            <a:off x="6053328" y="2788920"/>
+            <a:ext cx="182880" cy="182880"/>
+          </a:xfrm>
+          <a:prstGeom prst="ellipse">
+            <a:avLst/>
+          </a:prstGeom>
+          <a:solidFill>
+            <a:srgbClr val="1E2761"/>
+          </a:solidFill>
+          <a:ln/>
+        </p:spPr>
+      </p:sp>
+      <p:sp>
+        <p:nvSpPr>
+          <p:cNvPr id="16" name="Text 14"/>
+          <p:cNvSpPr txBox="1"/>
+          <p:nvPr/>
+        </p:nvSpPr>
+        <p:spPr>
+          <a:xfrm>
+            <a:off x="5504688" y="2103120"/>
+            <a:ext cx="1280160" cy="594360"/>
+          </a:xfrm>
+          <a:prstGeom prst="rect">
+            <a:avLst/>
+          </a:prstGeom>
+          <a:noFill/>
+          <a:ln/>
+        </p:spPr>
+        <p:txBody>
+          <a:bodyPr wrap="square" rtlCol="0" anchor="ctr"/>
+          <a:lstStyle/>
+          <a:p>
+            <a:pPr algn="ctr" indent="0" marL="0">
+              <a:buNone/>
+            </a:pPr>
+            <a:r>
+              <a:rPr lang="en-US" sz="1200" b="1" dirty="0">
+                <a:solidFill>
+                  <a:srgbClr val="1E2761"/>
+                </a:solidFill>
+                <a:latin typeface="Calibri" pitchFamily="34" charset="0"/>
+                <a:ea typeface="Calibri" pitchFamily="34" charset="-122"/>
+                <a:cs typeface="Calibri" pitchFamily="34" charset="-120"/>
+              </a:rPr>
+              <a:t>Gemini</a:t>
+            </a:r>
+            <a:endParaRPr lang="en-US" sz="1200" dirty="0"/>
+          </a:p>
+          <a:p>
+            <a:pPr algn="ctr" indent="0" marL="0">
+              <a:buNone/>
+            </a:pPr>
+            <a:r>
+              <a:rPr lang="en-US" sz="1200" b="1" dirty="0">
+                <a:solidFill>
+                  <a:srgbClr val="1E2761"/>
+                </a:solidFill>
+                <a:latin typeface="Calibri" pitchFamily="34" charset="0"/>
+                <a:ea typeface="Calibri" pitchFamily="34" charset="-122"/>
+                <a:cs typeface="Calibri" pitchFamily="34" charset="-120"/>
+              </a:rPr>
+              <a:t>r = 0.08</a:t>
+            </a:r>
+            <a:endParaRPr lang="en-US" sz="1200" dirty="0"/>
+          </a:p>
+        </p:txBody>
+      </p:sp>
+      <p:sp>
+        <p:nvSpPr>
+          <p:cNvPr id="17" name="Shape 15"/>
+          <p:cNvSpPr/>
+          <p:nvPr/>
+        </p:nvSpPr>
+        <p:spPr>
+          <a:xfrm>
+            <a:off x="4507992" y="2788920"/>
+            <a:ext cx="182880" cy="182880"/>
+          </a:xfrm>
+          <a:prstGeom prst="ellipse">
+            <a:avLst/>
+          </a:prstGeom>
+          <a:solidFill>
+            <a:srgbClr val="C62828"/>
+          </a:solidFill>
+          <a:ln/>
+        </p:spPr>
+      </p:sp>
+      <p:sp>
+        <p:nvSpPr>
+          <p:cNvPr id="18" name="Text 16"/>
+          <p:cNvSpPr txBox="1"/>
+          <p:nvPr/>
+        </p:nvSpPr>
+        <p:spPr>
+          <a:xfrm>
+            <a:off x="3959352" y="3337560"/>
+            <a:ext cx="1280160" cy="594360"/>
+          </a:xfrm>
+          <a:prstGeom prst="rect">
+            <a:avLst/>
+          </a:prstGeom>
+          <a:noFill/>
+          <a:ln/>
+        </p:spPr>
+        <p:txBody>
+          <a:bodyPr wrap="square" rtlCol="0" anchor="ctr"/>
+          <a:lstStyle/>
+          <a:p>
+            <a:pPr algn="ctr" indent="0" marL="0">
+              <a:buNone/>
+            </a:pPr>
+            <a:r>
+              <a:rPr lang="en-US" sz="1200" b="1" dirty="0">
+                <a:solidFill>
+                  <a:srgbClr val="C62828"/>
+                </a:solidFill>
+                <a:latin typeface="Calibri" pitchFamily="34" charset="0"/>
+                <a:ea typeface="Calibri" pitchFamily="34" charset="-122"/>
+                <a:cs typeface="Calibri" pitchFamily="34" charset="-120"/>
+              </a:rPr>
+              <a:t>Mistral</a:t>
+            </a:r>
+            <a:endParaRPr lang="en-US" sz="1200" dirty="0"/>
+          </a:p>
+          <a:p>
+            <a:pPr algn="ctr" indent="0" marL="0">
+              <a:buNone/>
+            </a:pPr>
+            <a:r>
+              <a:rPr lang="en-US" sz="1200" b="1" dirty="0">
+                <a:solidFill>
+                  <a:srgbClr val="C62828"/>
+                </a:solidFill>
+                <a:latin typeface="Calibri" pitchFamily="34" charset="0"/>
+                <a:ea typeface="Calibri" pitchFamily="34" charset="-122"/>
+                <a:cs typeface="Calibri" pitchFamily="34" charset="-120"/>
+              </a:rPr>
+              <a:t>r = -0.24</a:t>
+            </a:r>
+            <a:endParaRPr lang="en-US" sz="1200" dirty="0"/>
+          </a:p>
+        </p:txBody>
+      </p:sp>
+      <p:sp>
+        <p:nvSpPr>
+          <p:cNvPr id="19" name="Shape 17"/>
+          <p:cNvSpPr/>
+          <p:nvPr/>
+        </p:nvSpPr>
+        <p:spPr>
+          <a:xfrm>
+            <a:off x="6300216" y="2788920"/>
+            <a:ext cx="182880" cy="182880"/>
+          </a:xfrm>
+          <a:prstGeom prst="ellipse">
+            <a:avLst/>
+          </a:prstGeom>
+          <a:solidFill>
+            <a:srgbClr val="2E7D32"/>
+          </a:solidFill>
+          <a:ln/>
+        </p:spPr>
+      </p:sp>
+      <p:sp>
+        <p:nvSpPr>
+          <p:cNvPr id="20" name="Text 18"/>
+          <p:cNvSpPr txBox="1"/>
+          <p:nvPr/>
+        </p:nvSpPr>
+        <p:spPr>
+          <a:xfrm>
+            <a:off x="6848856" y="2103120"/>
+            <a:ext cx="1280160" cy="594360"/>
+          </a:xfrm>
+          <a:prstGeom prst="rect">
+            <a:avLst/>
+          </a:prstGeom>
+          <a:noFill/>
+          <a:ln/>
+        </p:spPr>
+        <p:txBody>
+          <a:bodyPr wrap="square" rtlCol="0" anchor="ctr"/>
+          <a:lstStyle/>
+          <a:p>
+            <a:pPr algn="ctr" indent="0" marL="0">
+              <a:buNone/>
+            </a:pPr>
+            <a:r>
+              <a:rPr lang="en-US" sz="1200" b="1" dirty="0">
+                <a:solidFill>
+                  <a:srgbClr val="2E7D32"/>
+                </a:solidFill>
+                <a:latin typeface="Calibri" pitchFamily="34" charset="0"/>
+                <a:ea typeface="Calibri" pitchFamily="34" charset="-122"/>
+                <a:cs typeface="Calibri" pitchFamily="34" charset="-120"/>
+              </a:rPr>
+              <a:t>Groq</a:t>
+            </a:r>
+            <a:endParaRPr lang="en-US" sz="1200" dirty="0"/>
+          </a:p>
+          <a:p>
+            <a:pPr algn="ctr" indent="0" marL="0">
+              <a:buNone/>
+            </a:pPr>
+            <a:r>
+              <a:rPr lang="en-US" sz="1200" b="1" dirty="0">
+                <a:solidFill>
+                  <a:srgbClr val="2E7D32"/>
+                </a:solidFill>
+                <a:latin typeface="Calibri" pitchFamily="34" charset="0"/>
+                <a:ea typeface="Calibri" pitchFamily="34" charset="-122"/>
+                <a:cs typeface="Calibri" pitchFamily="34" charset="-120"/>
+              </a:rPr>
+              <a:t>r = 0.13</a:t>
+            </a:r>
+            <a:endParaRPr lang="en-US" sz="1200" dirty="0"/>
+          </a:p>
+        </p:txBody>
+      </p:sp>
+      <p:sp>
+        <p:nvSpPr>
+          <p:cNvPr id="21" name="Shape 19"/>
+          <p:cNvSpPr/>
+          <p:nvPr/>
+        </p:nvSpPr>
+        <p:spPr>
+          <a:xfrm>
+            <a:off x="548640" y="4206240"/>
+            <a:ext cx="11064240" cy="1828800"/>
+          </a:xfrm>
+          <a:prstGeom prst="rect">
+            <a:avLst/>
+          </a:prstGeom>
+          <a:solidFill>
+            <a:srgbClr val="CADCFC"/>
+          </a:solidFill>
+          <a:ln/>
+        </p:spPr>
+      </p:sp>
+      <p:sp>
+        <p:nvSpPr>
+          <p:cNvPr id="22" name="Text 20"/>
+          <p:cNvSpPr txBox="1"/>
+          <p:nvPr/>
+        </p:nvSpPr>
+        <p:spPr>
+          <a:xfrm>
+            <a:off x="822960" y="4389120"/>
+            <a:ext cx="10515600" cy="457200"/>
+          </a:xfrm>
+          <a:prstGeom prst="rect">
+            <a:avLst/>
+          </a:prstGeom>
+          <a:noFill/>
+          <a:ln/>
+        </p:spPr>
+        <p:txBody>
+          <a:bodyPr wrap="square" rtlCol="0" anchor="ctr"/>
+          <a:lstStyle/>
+          <a:p>
+            <a:pPr indent="0" marL="0">
+              <a:buNone/>
+            </a:pPr>
+            <a:r>
+              <a:rPr lang="en-US" sz="1600" b="1" dirty="0">
+                <a:solidFill>
+                  <a:srgbClr val="1E2761"/>
+                </a:solidFill>
+                <a:latin typeface="Calibri" pitchFamily="34" charset="0"/>
+                <a:ea typeface="Calibri" pitchFamily="34" charset="-122"/>
+                <a:cs typeface="Calibri" pitchFamily="34" charset="-120"/>
+              </a:rPr>
+              <a:t>H2 not confirmed for any provider</a:t>
+            </a:r>
+            <a:endParaRPr lang="en-US" sz="1600" dirty="0"/>
+          </a:p>
+        </p:txBody>
+      </p:sp>
+      <p:sp>
+        <p:nvSpPr>
+          <p:cNvPr id="23" name="Text 21"/>
+          <p:cNvSpPr txBox="1"/>
+          <p:nvPr/>
+        </p:nvSpPr>
+        <p:spPr>
+          <a:xfrm>
+            <a:off x="822960" y="4846320"/>
+            <a:ext cx="10515600" cy="1097280"/>
+          </a:xfrm>
+          <a:prstGeom prst="rect">
+            <a:avLst/>
+          </a:prstGeom>
+          <a:noFill/>
+          <a:ln/>
+        </p:spPr>
+        <p:txBody>
+          <a:bodyPr wrap="square" rtlCol="0" anchor="ctr"/>
+          <a:lstStyle/>
+          <a:p>
+            <a:pPr indent="0" marL="0">
+              <a:buNone/>
+            </a:pPr>
+            <a:r>
               <a:rPr lang="en-US" sz="1300" dirty="0">
                 <a:solidFill>
-                  <a:srgbClr val="FFFFFF"/>
-                </a:solidFill>
-                <a:latin typeface="Calibri" pitchFamily="34" charset="0"/>
-                <a:ea typeface="Calibri" pitchFamily="34" charset="-122"/>
-                <a:cs typeface="Calibri" pitchFamily="34" charset="-120"/>
-              </a:rPr>
-              <a:t>Statistically significant</a:t>
+                  <a:srgbClr val="1F1F1F"/>
+                </a:solidFill>
+                <a:latin typeface="Calibri" pitchFamily="34" charset="0"/>
+                <a:ea typeface="Calibri" pitchFamily="34" charset="-122"/>
+                <a:cs typeface="Calibri" pitchFamily="34" charset="-120"/>
+              </a:rPr>
+              <a:t>All three correlations are weak in magnitude (|r| &lt; 0.25) and inconsistent in direction: Gemini and Groq show a slight positive trend (harder prompts scored marginally higher), while Mistral shows a slight negative trend (harder prompts scored marginally lower). None of the three providers show the hypothesized systematic degradation in constraint-following as difficulty increases.</a:t>
             </a:r>
             <a:endParaRPr lang="en-US" sz="1300" dirty="0"/>
-          </a:p>
-        </p:txBody>
-      </p:sp>
-      <p:sp>
-        <p:nvSpPr>
-          <p:cNvPr id="6" name="Text 4"/>
-          <p:cNvSpPr txBox="1"/>
-          <p:nvPr/>
-        </p:nvSpPr>
-        <p:spPr>
-          <a:xfrm>
-            <a:off x="4251960" y="2743200"/>
-            <a:ext cx="3566160" cy="914400"/>
-          </a:xfrm>
-          <a:prstGeom prst="rect">
-            <a:avLst/>
-          </a:prstGeom>
-          <a:noFill/>
-          <a:ln/>
-        </p:spPr>
-        <p:txBody>
-          <a:bodyPr wrap="square" lIns="0" tIns="0" rIns="0" bIns="0" rtlCol="0" anchor="ctr"/>
-          <a:lstStyle/>
-          <a:p>
-            <a:pPr algn="ctr" indent="0" marL="0">
-              <a:buNone/>
-            </a:pPr>
-            <a:r>
-              <a:rPr lang="en-US" sz="4000" b="1" dirty="0">
-                <a:solidFill>
-                  <a:srgbClr val="CADCFC"/>
-                </a:solidFill>
-                <a:latin typeface="Cambria" pitchFamily="34" charset="0"/>
-                <a:ea typeface="Cambria" pitchFamily="34" charset="-122"/>
-                <a:cs typeface="Cambria" pitchFamily="34" charset="-120"/>
-              </a:rPr>
-              <a:t>d = 0.84</a:t>
-            </a:r>
-            <a:endParaRPr lang="en-US" sz="4000" dirty="0"/>
-          </a:p>
-        </p:txBody>
-      </p:sp>
-      <p:sp>
-        <p:nvSpPr>
-          <p:cNvPr id="7" name="Text 5"/>
-          <p:cNvSpPr txBox="1"/>
-          <p:nvPr/>
-        </p:nvSpPr>
-        <p:spPr>
-          <a:xfrm>
-            <a:off x="4251960" y="3657600"/>
-            <a:ext cx="3566160" cy="548640"/>
-          </a:xfrm>
-          <a:prstGeom prst="rect">
-            <a:avLst/>
-          </a:prstGeom>
-          <a:noFill/>
-          <a:ln/>
-        </p:spPr>
-        <p:txBody>
-          <a:bodyPr wrap="square" rtlCol="0" anchor="ctr"/>
-          <a:lstStyle/>
-          <a:p>
-            <a:pPr algn="ctr" indent="0" marL="0">
-              <a:buNone/>
-            </a:pPr>
-            <a:r>
-              <a:rPr lang="en-US" sz="1300" dirty="0">
-                <a:solidFill>
-                  <a:srgbClr val="FFFFFF"/>
-                </a:solidFill>
-                <a:latin typeface="Calibri" pitchFamily="34" charset="0"/>
-                <a:ea typeface="Calibri" pitchFamily="34" charset="-122"/>
-                <a:cs typeface="Calibri" pitchFamily="34" charset="-120"/>
-              </a:rPr>
-              <a:t>Large effect size</a:t>
-            </a:r>
-            <a:endParaRPr lang="en-US" sz="1300" dirty="0"/>
-          </a:p>
-        </p:txBody>
-      </p:sp>
-      <p:sp>
-        <p:nvSpPr>
-          <p:cNvPr id="8" name="Text 6"/>
-          <p:cNvSpPr txBox="1"/>
-          <p:nvPr/>
-        </p:nvSpPr>
-        <p:spPr>
-          <a:xfrm>
-            <a:off x="7955280" y="2743200"/>
-            <a:ext cx="3566160" cy="914400"/>
-          </a:xfrm>
-          <a:prstGeom prst="rect">
-            <a:avLst/>
-          </a:prstGeom>
-          <a:noFill/>
-          <a:ln/>
-        </p:spPr>
-        <p:txBody>
-          <a:bodyPr wrap="square" lIns="0" tIns="0" rIns="0" bIns="0" rtlCol="0" anchor="ctr"/>
-          <a:lstStyle/>
-          <a:p>
-            <a:pPr algn="ctr" indent="0" marL="0">
-              <a:buNone/>
-            </a:pPr>
-            <a:r>
-              <a:rPr lang="en-US" sz="4000" b="1" dirty="0">
-                <a:solidFill>
-                  <a:srgbClr val="CADCFC"/>
-                </a:solidFill>
-                <a:latin typeface="Cambria" pitchFamily="34" charset="0"/>
-                <a:ea typeface="Cambria" pitchFamily="34" charset="-122"/>
-                <a:cs typeface="Cambria" pitchFamily="34" charset="-120"/>
-              </a:rPr>
-              <a:t>22</a:t>
-            </a:r>
-            <a:endParaRPr lang="en-US" sz="4000" dirty="0"/>
-          </a:p>
-        </p:txBody>
-      </p:sp>
-      <p:sp>
-        <p:nvSpPr>
-          <p:cNvPr id="9" name="Text 7"/>
-          <p:cNvSpPr txBox="1"/>
-          <p:nvPr/>
-        </p:nvSpPr>
-        <p:spPr>
-          <a:xfrm>
-            <a:off x="7955280" y="3657600"/>
-            <a:ext cx="3566160" cy="548640"/>
-          </a:xfrm>
-          <a:prstGeom prst="rect">
-            <a:avLst/>
-          </a:prstGeom>
-          <a:noFill/>
-          <a:ln/>
-        </p:spPr>
-        <p:txBody>
-          <a:bodyPr wrap="square" rtlCol="0" anchor="ctr"/>
-          <a:lstStyle/>
-          <a:p>
-            <a:pPr algn="ctr" indent="0" marL="0">
-              <a:buNone/>
-            </a:pPr>
-            <a:r>
-              <a:rPr lang="en-US" sz="1300" dirty="0">
-                <a:solidFill>
-                  <a:srgbClr val="FFFFFF"/>
-                </a:solidFill>
-                <a:latin typeface="Calibri" pitchFamily="34" charset="0"/>
-                <a:ea typeface="Calibri" pitchFamily="34" charset="-122"/>
-                <a:cs typeface="Calibri" pitchFamily="34" charset="-120"/>
-              </a:rPr>
-              <a:t>prompts per category, per provider</a:t>
-            </a:r>
-            <a:endParaRPr lang="en-US" sz="1300" dirty="0"/>
-          </a:p>
-        </p:txBody>
-      </p:sp>
-      <p:sp>
-        <p:nvSpPr>
-          <p:cNvPr id="10" name="Text 8"/>
-          <p:cNvSpPr txBox="1"/>
-          <p:nvPr/>
-        </p:nvSpPr>
-        <p:spPr>
-          <a:xfrm>
-            <a:off x="548640" y="4663440"/>
-            <a:ext cx="10515600" cy="1371600"/>
-          </a:xfrm>
-          <a:prstGeom prst="rect">
-            <a:avLst/>
-          </a:prstGeom>
-          <a:noFill/>
-          <a:ln/>
-        </p:spPr>
-        <p:txBody>
-          <a:bodyPr wrap="square" rtlCol="0" anchor="ctr"/>
-          <a:lstStyle/>
-          <a:p>
-            <a:pPr indent="0" marL="0">
-              <a:buNone/>
-            </a:pPr>
-            <a:r>
-              <a:rPr lang="en-US" sz="1500" i="1" dirty="0">
-                <a:solidFill>
-                  <a:srgbClr val="CADCFC"/>
-                </a:solidFill>
-                <a:latin typeface="Calibri" pitchFamily="34" charset="0"/>
-                <a:ea typeface="Calibri" pitchFamily="34" charset="-122"/>
-                <a:cs typeface="Calibri" pitchFamily="34" charset="-120"/>
-              </a:rPr>
-              <a:t>Why it matters: hallucination resistance is the capability dimension with the greatest practical consequence — a confidently fabricated answer carries real cost in higher-stakes applications.</a:t>
-            </a:r>
-            <a:endParaRPr lang="en-US" sz="1500" dirty="0"/>
           </a:p>
         </p:txBody>
       </p:sp>
@@ -4192,24 +5166,24 @@
         </p:nvSpPr>
         <p:spPr>
           <a:xfrm>
-            <a:off x="548640" y="365760"/>
-            <a:ext cx="10515600" cy="640080"/>
-          </a:xfrm>
-          <a:prstGeom prst="rect">
-            <a:avLst/>
-          </a:prstGeom>
-          <a:noFill/>
-          <a:ln/>
-        </p:spPr>
-        <p:txBody>
-          <a:bodyPr wrap="square" rtlCol="0" anchor="ctr"/>
-          <a:lstStyle/>
-          <a:p>
-            <a:pPr indent="0" marL="0">
-              <a:buNone/>
-            </a:pPr>
-            <a:r>
-              <a:rPr lang="en-US" sz="3000" b="1" dirty="0">
+            <a:off x="548640" y="320040"/>
+            <a:ext cx="10972800" cy="640080"/>
+          </a:xfrm>
+          <a:prstGeom prst="rect">
+            <a:avLst/>
+          </a:prstGeom>
+          <a:noFill/>
+          <a:ln/>
+        </p:spPr>
+        <p:txBody>
+          <a:bodyPr wrap="square" rtlCol="0" anchor="ctr"/>
+          <a:lstStyle/>
+          <a:p>
+            <a:pPr indent="0" marL="0">
+              <a:buNone/>
+            </a:pPr>
+            <a:r>
+              <a:rPr lang="en-US" sz="2600" b="1" dirty="0">
                 <a:solidFill>
                   <a:srgbClr val="1E2761"/>
                 </a:solidFill>
@@ -4217,22 +5191,423 @@
                 <a:ea typeface="Cambria" pitchFamily="34" charset="-122"/>
                 <a:cs typeface="Cambria" pitchFamily="34" charset="-120"/>
               </a:rPr>
-              <a:t>Limitations — Stated Plainly</a:t>
-            </a:r>
-            <a:endParaRPr lang="en-US" sz="3000" dirty="0"/>
-          </a:p>
-        </p:txBody>
-      </p:sp>
-      <p:sp>
-        <p:nvSpPr>
-          <p:cNvPr id="3" name="Shape 1"/>
+              <a:t>H3: Hallucination Resistance — All Pairwise Comparisons</a:t>
+            </a:r>
+            <a:endParaRPr lang="en-US" sz="2600" dirty="0"/>
+          </a:p>
+        </p:txBody>
+      </p:sp>
+      <p:sp>
+        <p:nvSpPr>
+          <p:cNvPr id="3" name="Text 1"/>
+          <p:cNvSpPr txBox="1"/>
+          <p:nvPr/>
+        </p:nvSpPr>
+        <p:spPr>
+          <a:xfrm>
+            <a:off x="548640" y="914400"/>
+            <a:ext cx="10972800" cy="365760"/>
+          </a:xfrm>
+          <a:prstGeom prst="rect">
+            <a:avLst/>
+          </a:prstGeom>
+          <a:noFill/>
+          <a:ln/>
+        </p:spPr>
+        <p:txBody>
+          <a:bodyPr wrap="square" rtlCol="0" anchor="ctr"/>
+          <a:lstStyle/>
+          <a:p>
+            <a:pPr indent="0" marL="0">
+              <a:buNone/>
+            </a:pPr>
+            <a:r>
+              <a:rPr lang="en-US" sz="1300" i="1" dirty="0">
+                <a:solidFill>
+                  <a:srgbClr val="5F5E5A"/>
+                </a:solidFill>
+                <a:latin typeface="Calibri" pitchFamily="34" charset="0"/>
+                <a:ea typeface="Calibri" pitchFamily="34" charset="-122"/>
+                <a:cs typeface="Calibri" pitchFamily="34" charset="-120"/>
+              </a:rPr>
+              <a:t>Every provider pair tested on the Hallucination Stress Test category (n = 22 per provider)</a:t>
+            </a:r>
+            <a:endParaRPr lang="en-US" sz="1300" dirty="0"/>
+          </a:p>
+        </p:txBody>
+      </p:sp>
+      <p:sp>
+        <p:nvSpPr>
+          <p:cNvPr id="4" name="Shape 2"/>
           <p:cNvSpPr/>
           <p:nvPr/>
         </p:nvSpPr>
         <p:spPr>
           <a:xfrm>
-            <a:off x="548640" y="1463040"/>
-            <a:ext cx="2551176" cy="4206240"/>
+            <a:off x="548640" y="1554480"/>
+            <a:ext cx="11064240" cy="1188720"/>
+          </a:xfrm>
+          <a:prstGeom prst="rect">
+            <a:avLst/>
+          </a:prstGeom>
+          <a:solidFill>
+            <a:srgbClr val="FFFFFF"/>
+          </a:solidFill>
+          <a:ln w="12700">
+            <a:solidFill>
+              <a:srgbClr val="D5D5D0"/>
+            </a:solidFill>
+            <a:prstDash val="solid"/>
+          </a:ln>
+        </p:spPr>
+      </p:sp>
+      <p:sp>
+        <p:nvSpPr>
+          <p:cNvPr id="5" name="Text 3"/>
+          <p:cNvSpPr txBox="1"/>
+          <p:nvPr/>
+        </p:nvSpPr>
+        <p:spPr>
+          <a:xfrm>
+            <a:off x="822960" y="1691640"/>
+            <a:ext cx="3200400" cy="548640"/>
+          </a:xfrm>
+          <a:prstGeom prst="rect">
+            <a:avLst/>
+          </a:prstGeom>
+          <a:noFill/>
+          <a:ln/>
+        </p:spPr>
+        <p:txBody>
+          <a:bodyPr wrap="square" rtlCol="0" anchor="ctr"/>
+          <a:lstStyle/>
+          <a:p>
+            <a:pPr indent="0" marL="0">
+              <a:buNone/>
+            </a:pPr>
+            <a:r>
+              <a:rPr lang="en-US" sz="1700" b="1" dirty="0">
+                <a:solidFill>
+                  <a:srgbClr val="1E2761"/>
+                </a:solidFill>
+                <a:latin typeface="Calibri" pitchFamily="34" charset="0"/>
+                <a:ea typeface="Calibri" pitchFamily="34" charset="-122"/>
+                <a:cs typeface="Calibri" pitchFamily="34" charset="-120"/>
+              </a:rPr>
+              <a:t>Gemini vs. Mistral</a:t>
+            </a:r>
+            <a:endParaRPr lang="en-US" sz="1700" dirty="0"/>
+          </a:p>
+        </p:txBody>
+      </p:sp>
+      <p:sp>
+        <p:nvSpPr>
+          <p:cNvPr id="6" name="Text 4"/>
+          <p:cNvSpPr txBox="1"/>
+          <p:nvPr/>
+        </p:nvSpPr>
+        <p:spPr>
+          <a:xfrm>
+            <a:off x="4206240" y="1691640"/>
+            <a:ext cx="1645920" cy="548640"/>
+          </a:xfrm>
+          <a:prstGeom prst="rect">
+            <a:avLst/>
+          </a:prstGeom>
+          <a:noFill/>
+          <a:ln/>
+        </p:spPr>
+        <p:txBody>
+          <a:bodyPr wrap="square" rtlCol="0" anchor="ctr"/>
+          <a:lstStyle/>
+          <a:p>
+            <a:pPr indent="0" marL="0">
+              <a:buNone/>
+            </a:pPr>
+            <a:r>
+              <a:rPr lang="en-US" sz="1500" dirty="0">
+                <a:solidFill>
+                  <a:srgbClr val="1F1F1F"/>
+                </a:solidFill>
+                <a:latin typeface="Calibri" pitchFamily="34" charset="0"/>
+                <a:ea typeface="Calibri" pitchFamily="34" charset="-122"/>
+                <a:cs typeface="Calibri" pitchFamily="34" charset="-120"/>
+              </a:rPr>
+              <a:t>p = 0.145</a:t>
+            </a:r>
+            <a:endParaRPr lang="en-US" sz="1500" dirty="0"/>
+          </a:p>
+        </p:txBody>
+      </p:sp>
+      <p:sp>
+        <p:nvSpPr>
+          <p:cNvPr id="7" name="Text 5"/>
+          <p:cNvSpPr txBox="1"/>
+          <p:nvPr/>
+        </p:nvSpPr>
+        <p:spPr>
+          <a:xfrm>
+            <a:off x="5943600" y="1691640"/>
+            <a:ext cx="1645920" cy="548640"/>
+          </a:xfrm>
+          <a:prstGeom prst="rect">
+            <a:avLst/>
+          </a:prstGeom>
+          <a:noFill/>
+          <a:ln/>
+        </p:spPr>
+        <p:txBody>
+          <a:bodyPr wrap="square" rtlCol="0" anchor="ctr"/>
+          <a:lstStyle/>
+          <a:p>
+            <a:pPr indent="0" marL="0">
+              <a:buNone/>
+            </a:pPr>
+            <a:r>
+              <a:rPr lang="en-US" sz="1500" dirty="0">
+                <a:solidFill>
+                  <a:srgbClr val="1F1F1F"/>
+                </a:solidFill>
+                <a:latin typeface="Calibri" pitchFamily="34" charset="0"/>
+                <a:ea typeface="Calibri" pitchFamily="34" charset="-122"/>
+                <a:cs typeface="Calibri" pitchFamily="34" charset="-120"/>
+              </a:rPr>
+              <a:t>d = 0.45</a:t>
+            </a:r>
+            <a:endParaRPr lang="en-US" sz="1500" dirty="0"/>
+          </a:p>
+        </p:txBody>
+      </p:sp>
+      <p:sp>
+        <p:nvSpPr>
+          <p:cNvPr id="8" name="Text 6"/>
+          <p:cNvSpPr txBox="1"/>
+          <p:nvPr/>
+        </p:nvSpPr>
+        <p:spPr>
+          <a:xfrm>
+            <a:off x="7680960" y="1691640"/>
+            <a:ext cx="3749040" cy="548640"/>
+          </a:xfrm>
+          <a:prstGeom prst="rect">
+            <a:avLst/>
+          </a:prstGeom>
+          <a:noFill/>
+          <a:ln/>
+        </p:spPr>
+        <p:txBody>
+          <a:bodyPr wrap="square" rtlCol="0" anchor="ctr"/>
+          <a:lstStyle/>
+          <a:p>
+            <a:pPr indent="0" marL="0">
+              <a:buNone/>
+            </a:pPr>
+            <a:r>
+              <a:rPr lang="en-US" sz="1500" dirty="0">
+                <a:solidFill>
+                  <a:srgbClr val="5F5E5A"/>
+                </a:solidFill>
+                <a:latin typeface="Calibri" pitchFamily="34" charset="0"/>
+                <a:ea typeface="Calibri" pitchFamily="34" charset="-122"/>
+                <a:cs typeface="Calibri" pitchFamily="34" charset="-120"/>
+              </a:rPr>
+              <a:t>Not significant</a:t>
+            </a:r>
+            <a:endParaRPr lang="en-US" sz="1500" dirty="0"/>
+          </a:p>
+        </p:txBody>
+      </p:sp>
+      <p:sp>
+        <p:nvSpPr>
+          <p:cNvPr id="9" name="Shape 7"/>
+          <p:cNvSpPr/>
+          <p:nvPr/>
+        </p:nvSpPr>
+        <p:spPr>
+          <a:xfrm>
+            <a:off x="548640" y="2926080"/>
+            <a:ext cx="11064240" cy="1188720"/>
+          </a:xfrm>
+          <a:prstGeom prst="rect">
+            <a:avLst/>
+          </a:prstGeom>
+          <a:solidFill>
+            <a:srgbClr val="FFFFFF"/>
+          </a:solidFill>
+          <a:ln w="12700">
+            <a:solidFill>
+              <a:srgbClr val="D5D5D0"/>
+            </a:solidFill>
+            <a:prstDash val="solid"/>
+          </a:ln>
+        </p:spPr>
+      </p:sp>
+      <p:sp>
+        <p:nvSpPr>
+          <p:cNvPr id="10" name="Text 8"/>
+          <p:cNvSpPr txBox="1"/>
+          <p:nvPr/>
+        </p:nvSpPr>
+        <p:spPr>
+          <a:xfrm>
+            <a:off x="822960" y="3063240"/>
+            <a:ext cx="3200400" cy="548640"/>
+          </a:xfrm>
+          <a:prstGeom prst="rect">
+            <a:avLst/>
+          </a:prstGeom>
+          <a:noFill/>
+          <a:ln/>
+        </p:spPr>
+        <p:txBody>
+          <a:bodyPr wrap="square" rtlCol="0" anchor="ctr"/>
+          <a:lstStyle/>
+          <a:p>
+            <a:pPr indent="0" marL="0">
+              <a:buNone/>
+            </a:pPr>
+            <a:r>
+              <a:rPr lang="en-US" sz="1700" b="1" dirty="0">
+                <a:solidFill>
+                  <a:srgbClr val="1E2761"/>
+                </a:solidFill>
+                <a:latin typeface="Calibri" pitchFamily="34" charset="0"/>
+                <a:ea typeface="Calibri" pitchFamily="34" charset="-122"/>
+                <a:cs typeface="Calibri" pitchFamily="34" charset="-120"/>
+              </a:rPr>
+              <a:t>Gemini vs. Groq</a:t>
+            </a:r>
+            <a:endParaRPr lang="en-US" sz="1700" dirty="0"/>
+          </a:p>
+        </p:txBody>
+      </p:sp>
+      <p:sp>
+        <p:nvSpPr>
+          <p:cNvPr id="11" name="Text 9"/>
+          <p:cNvSpPr txBox="1"/>
+          <p:nvPr/>
+        </p:nvSpPr>
+        <p:spPr>
+          <a:xfrm>
+            <a:off x="4206240" y="3063240"/>
+            <a:ext cx="1645920" cy="548640"/>
+          </a:xfrm>
+          <a:prstGeom prst="rect">
+            <a:avLst/>
+          </a:prstGeom>
+          <a:noFill/>
+          <a:ln/>
+        </p:spPr>
+        <p:txBody>
+          <a:bodyPr wrap="square" rtlCol="0" anchor="ctr"/>
+          <a:lstStyle/>
+          <a:p>
+            <a:pPr indent="0" marL="0">
+              <a:buNone/>
+            </a:pPr>
+            <a:r>
+              <a:rPr lang="en-US" sz="1500" dirty="0">
+                <a:solidFill>
+                  <a:srgbClr val="1F1F1F"/>
+                </a:solidFill>
+                <a:latin typeface="Calibri" pitchFamily="34" charset="0"/>
+                <a:ea typeface="Calibri" pitchFamily="34" charset="-122"/>
+                <a:cs typeface="Calibri" pitchFamily="34" charset="-120"/>
+              </a:rPr>
+              <a:t>p = 0.275</a:t>
+            </a:r>
+            <a:endParaRPr lang="en-US" sz="1500" dirty="0"/>
+          </a:p>
+        </p:txBody>
+      </p:sp>
+      <p:sp>
+        <p:nvSpPr>
+          <p:cNvPr id="12" name="Text 10"/>
+          <p:cNvSpPr txBox="1"/>
+          <p:nvPr/>
+        </p:nvSpPr>
+        <p:spPr>
+          <a:xfrm>
+            <a:off x="5943600" y="3063240"/>
+            <a:ext cx="1645920" cy="548640"/>
+          </a:xfrm>
+          <a:prstGeom prst="rect">
+            <a:avLst/>
+          </a:prstGeom>
+          <a:noFill/>
+          <a:ln/>
+        </p:spPr>
+        <p:txBody>
+          <a:bodyPr wrap="square" rtlCol="0" anchor="ctr"/>
+          <a:lstStyle/>
+          <a:p>
+            <a:pPr indent="0" marL="0">
+              <a:buNone/>
+            </a:pPr>
+            <a:r>
+              <a:rPr lang="en-US" sz="1500" dirty="0">
+                <a:solidFill>
+                  <a:srgbClr val="1F1F1F"/>
+                </a:solidFill>
+                <a:latin typeface="Calibri" pitchFamily="34" charset="0"/>
+                <a:ea typeface="Calibri" pitchFamily="34" charset="-122"/>
+                <a:cs typeface="Calibri" pitchFamily="34" charset="-120"/>
+              </a:rPr>
+              <a:t>d = −0.34</a:t>
+            </a:r>
+            <a:endParaRPr lang="en-US" sz="1500" dirty="0"/>
+          </a:p>
+        </p:txBody>
+      </p:sp>
+      <p:sp>
+        <p:nvSpPr>
+          <p:cNvPr id="13" name="Text 11"/>
+          <p:cNvSpPr txBox="1"/>
+          <p:nvPr/>
+        </p:nvSpPr>
+        <p:spPr>
+          <a:xfrm>
+            <a:off x="7680960" y="3063240"/>
+            <a:ext cx="3749040" cy="548640"/>
+          </a:xfrm>
+          <a:prstGeom prst="rect">
+            <a:avLst/>
+          </a:prstGeom>
+          <a:noFill/>
+          <a:ln/>
+        </p:spPr>
+        <p:txBody>
+          <a:bodyPr wrap="square" rtlCol="0" anchor="ctr"/>
+          <a:lstStyle/>
+          <a:p>
+            <a:pPr indent="0" marL="0">
+              <a:buNone/>
+            </a:pPr>
+            <a:r>
+              <a:rPr lang="en-US" sz="1500" dirty="0">
+                <a:solidFill>
+                  <a:srgbClr val="5F5E5A"/>
+                </a:solidFill>
+                <a:latin typeface="Calibri" pitchFamily="34" charset="0"/>
+                <a:ea typeface="Calibri" pitchFamily="34" charset="-122"/>
+                <a:cs typeface="Calibri" pitchFamily="34" charset="-120"/>
+              </a:rPr>
+              <a:t>Not significant</a:t>
+            </a:r>
+            <a:endParaRPr lang="en-US" sz="1500" dirty="0"/>
+          </a:p>
+        </p:txBody>
+      </p:sp>
+      <p:sp>
+        <p:nvSpPr>
+          <p:cNvPr id="14" name="Shape 12"/>
+          <p:cNvSpPr/>
+          <p:nvPr/>
+        </p:nvSpPr>
+        <p:spPr>
+          <a:xfrm>
+            <a:off x="548640" y="4297680"/>
+            <a:ext cx="11064240" cy="1188720"/>
           </a:xfrm>
           <a:prstGeom prst="rect">
             <a:avLst/>
@@ -4240,35 +5615,40 @@
           <a:solidFill>
             <a:srgbClr val="CADCFC"/>
           </a:solidFill>
-          <a:ln/>
-        </p:spPr>
-      </p:sp>
-      <p:sp>
-        <p:nvSpPr>
-          <p:cNvPr id="4" name="Text 2"/>
-          <p:cNvSpPr txBox="1"/>
-          <p:nvPr/>
-        </p:nvSpPr>
-        <p:spPr>
-          <a:xfrm>
-            <a:off x="685800" y="1645920"/>
-            <a:ext cx="2231136" cy="548640"/>
-          </a:xfrm>
-          <a:prstGeom prst="rect">
-            <a:avLst/>
-          </a:prstGeom>
-          <a:noFill/>
-          <a:ln/>
-        </p:spPr>
-        <p:txBody>
-          <a:bodyPr wrap="square" rtlCol="0" anchor="ctr"/>
-          <a:lstStyle/>
-          <a:p>
-            <a:pPr indent="0" marL="0">
-              <a:buNone/>
-            </a:pPr>
-            <a:r>
-              <a:rPr lang="en-US" sz="1600" b="1" dirty="0">
+          <a:ln w="25400">
+            <a:solidFill>
+              <a:srgbClr val="1E2761"/>
+            </a:solidFill>
+            <a:prstDash val="solid"/>
+          </a:ln>
+        </p:spPr>
+      </p:sp>
+      <p:sp>
+        <p:nvSpPr>
+          <p:cNvPr id="15" name="Text 13"/>
+          <p:cNvSpPr txBox="1"/>
+          <p:nvPr/>
+        </p:nvSpPr>
+        <p:spPr>
+          <a:xfrm>
+            <a:off x="822960" y="4434840"/>
+            <a:ext cx="3200400" cy="548640"/>
+          </a:xfrm>
+          <a:prstGeom prst="rect">
+            <a:avLst/>
+          </a:prstGeom>
+          <a:noFill/>
+          <a:ln/>
+        </p:spPr>
+        <p:txBody>
+          <a:bodyPr wrap="square" rtlCol="0" anchor="ctr"/>
+          <a:lstStyle/>
+          <a:p>
+            <a:pPr indent="0" marL="0">
+              <a:buNone/>
+            </a:pPr>
+            <a:r>
+              <a:rPr lang="en-US" sz="1700" b="1" dirty="0">
                 <a:solidFill>
                   <a:srgbClr val="1E2761"/>
                 </a:solidFill>
@@ -4276,38 +5656,38 @@
                 <a:ea typeface="Calibri" pitchFamily="34" charset="-122"/>
                 <a:cs typeface="Calibri" pitchFamily="34" charset="-120"/>
               </a:rPr>
-              <a:t>Construct</a:t>
-            </a:r>
-            <a:endParaRPr lang="en-US" sz="1600" dirty="0"/>
-          </a:p>
-        </p:txBody>
-      </p:sp>
-      <p:sp>
-        <p:nvSpPr>
-          <p:cNvPr id="5" name="Text 3"/>
-          <p:cNvSpPr txBox="1"/>
-          <p:nvPr/>
-        </p:nvSpPr>
-        <p:spPr>
-          <a:xfrm>
-            <a:off x="685800" y="2286000"/>
-            <a:ext cx="2231136" cy="3200400"/>
-          </a:xfrm>
-          <a:prstGeom prst="rect">
-            <a:avLst/>
-          </a:prstGeom>
-          <a:noFill/>
-          <a:ln/>
-        </p:spPr>
-        <p:txBody>
-          <a:bodyPr wrap="square" rtlCol="0" anchor="ctr"/>
-          <a:lstStyle/>
-          <a:p>
-            <a:pPr indent="0" marL="0">
-              <a:buNone/>
-            </a:pPr>
-            <a:r>
-              <a:rPr lang="en-US" sz="1200" dirty="0">
+              <a:t>Mistral vs. Groq</a:t>
+            </a:r>
+            <a:endParaRPr lang="en-US" sz="1700" dirty="0"/>
+          </a:p>
+        </p:txBody>
+      </p:sp>
+      <p:sp>
+        <p:nvSpPr>
+          <p:cNvPr id="16" name="Text 14"/>
+          <p:cNvSpPr txBox="1"/>
+          <p:nvPr/>
+        </p:nvSpPr>
+        <p:spPr>
+          <a:xfrm>
+            <a:off x="4206240" y="4434840"/>
+            <a:ext cx="1645920" cy="548640"/>
+          </a:xfrm>
+          <a:prstGeom prst="rect">
+            <a:avLst/>
+          </a:prstGeom>
+          <a:noFill/>
+          <a:ln/>
+        </p:spPr>
+        <p:txBody>
+          <a:bodyPr wrap="square" rtlCol="0" anchor="ctr"/>
+          <a:lstStyle/>
+          <a:p>
+            <a:pPr indent="0" marL="0">
+              <a:buNone/>
+            </a:pPr>
+            <a:r>
+              <a:rPr lang="en-US" sz="1500" dirty="0">
                 <a:solidFill>
                   <a:srgbClr val="1F1F1F"/>
                 </a:solidFill>
@@ -4315,97 +5695,38 @@
                 <a:ea typeface="Calibri" pitchFamily="34" charset="-122"/>
                 <a:cs typeface="Calibri" pitchFamily="34" charset="-120"/>
               </a:rPr>
-              <a:t>Modest judge-human agreement (κ = 0.20–0.23) means scores are directionally reliable, not exact</a:t>
-            </a:r>
-            <a:endParaRPr lang="en-US" sz="1200" dirty="0"/>
-          </a:p>
-        </p:txBody>
-      </p:sp>
-      <p:sp>
-        <p:nvSpPr>
-          <p:cNvPr id="6" name="Shape 4"/>
-          <p:cNvSpPr/>
-          <p:nvPr/>
-        </p:nvSpPr>
-        <p:spPr>
-          <a:xfrm>
-            <a:off x="3236976" y="1463040"/>
-            <a:ext cx="2551176" cy="4206240"/>
-          </a:xfrm>
-          <a:prstGeom prst="rect">
-            <a:avLst/>
-          </a:prstGeom>
-          <a:solidFill>
-            <a:srgbClr val="CADCFC"/>
-          </a:solidFill>
-          <a:ln/>
-        </p:spPr>
-      </p:sp>
-      <p:sp>
-        <p:nvSpPr>
-          <p:cNvPr id="7" name="Text 5"/>
-          <p:cNvSpPr txBox="1"/>
-          <p:nvPr/>
-        </p:nvSpPr>
-        <p:spPr>
-          <a:xfrm>
-            <a:off x="3374136" y="1645920"/>
-            <a:ext cx="2231136" cy="548640"/>
-          </a:xfrm>
-          <a:prstGeom prst="rect">
-            <a:avLst/>
-          </a:prstGeom>
-          <a:noFill/>
-          <a:ln/>
-        </p:spPr>
-        <p:txBody>
-          <a:bodyPr wrap="square" rtlCol="0" anchor="ctr"/>
-          <a:lstStyle/>
-          <a:p>
-            <a:pPr indent="0" marL="0">
-              <a:buNone/>
-            </a:pPr>
-            <a:r>
-              <a:rPr lang="en-US" sz="1600" b="1" dirty="0">
-                <a:solidFill>
-                  <a:srgbClr val="1E2761"/>
-                </a:solidFill>
-                <a:latin typeface="Calibri" pitchFamily="34" charset="0"/>
-                <a:ea typeface="Calibri" pitchFamily="34" charset="-122"/>
-                <a:cs typeface="Calibri" pitchFamily="34" charset="-120"/>
-              </a:rPr>
-              <a:t>Internal</a:t>
-            </a:r>
-            <a:endParaRPr lang="en-US" sz="1600" dirty="0"/>
-          </a:p>
-        </p:txBody>
-      </p:sp>
-      <p:sp>
-        <p:nvSpPr>
-          <p:cNvPr id="8" name="Text 6"/>
-          <p:cNvSpPr txBox="1"/>
-          <p:nvPr/>
-        </p:nvSpPr>
-        <p:spPr>
-          <a:xfrm>
-            <a:off x="3374136" y="2286000"/>
-            <a:ext cx="2231136" cy="3200400"/>
-          </a:xfrm>
-          <a:prstGeom prst="rect">
-            <a:avLst/>
-          </a:prstGeom>
-          <a:noFill/>
-          <a:ln/>
-        </p:spPr>
-        <p:txBody>
-          <a:bodyPr wrap="square" rtlCol="0" anchor="ctr"/>
-          <a:lstStyle/>
-          <a:p>
-            <a:pPr indent="0" marL="0">
-              <a:buNone/>
-            </a:pPr>
-            <a:r>
-              <a:rPr lang="en-US" sz="1200" dirty="0">
+              <a:t>p = 0.01</a:t>
+            </a:r>
+            <a:endParaRPr lang="en-US" sz="1500" dirty="0"/>
+          </a:p>
+        </p:txBody>
+      </p:sp>
+      <p:sp>
+        <p:nvSpPr>
+          <p:cNvPr id="17" name="Text 15"/>
+          <p:cNvSpPr txBox="1"/>
+          <p:nvPr/>
+        </p:nvSpPr>
+        <p:spPr>
+          <a:xfrm>
+            <a:off x="5943600" y="4434840"/>
+            <a:ext cx="1645920" cy="548640"/>
+          </a:xfrm>
+          <a:prstGeom prst="rect">
+            <a:avLst/>
+          </a:prstGeom>
+          <a:noFill/>
+          <a:ln/>
+        </p:spPr>
+        <p:txBody>
+          <a:bodyPr wrap="square" rtlCol="0" anchor="ctr"/>
+          <a:lstStyle/>
+          <a:p>
+            <a:pPr indent="0" marL="0">
+              <a:buNone/>
+            </a:pPr>
+            <a:r>
+              <a:rPr lang="en-US" sz="1500" dirty="0">
                 <a:solidFill>
                   <a:srgbClr val="1F1F1F"/>
                 </a:solidFill>
@@ -4413,205 +5734,87 @@
                 <a:ea typeface="Calibri" pitchFamily="34" charset="-122"/>
                 <a:cs typeface="Calibri" pitchFamily="34" charset="-120"/>
               </a:rPr>
-              <a:t>Difficulty–score correlation partly reflects a scoring-scale artifact, not pure capability</a:t>
-            </a:r>
-            <a:endParaRPr lang="en-US" sz="1200" dirty="0"/>
-          </a:p>
-        </p:txBody>
-      </p:sp>
-      <p:sp>
-        <p:nvSpPr>
-          <p:cNvPr id="9" name="Shape 7"/>
-          <p:cNvSpPr/>
-          <p:nvPr/>
-        </p:nvSpPr>
-        <p:spPr>
-          <a:xfrm>
-            <a:off x="5925312" y="1463040"/>
-            <a:ext cx="2551176" cy="4206240"/>
-          </a:xfrm>
-          <a:prstGeom prst="rect">
-            <a:avLst/>
-          </a:prstGeom>
-          <a:solidFill>
-            <a:srgbClr val="CADCFC"/>
-          </a:solidFill>
-          <a:ln/>
-        </p:spPr>
-      </p:sp>
-      <p:sp>
-        <p:nvSpPr>
-          <p:cNvPr id="10" name="Text 8"/>
-          <p:cNvSpPr txBox="1"/>
-          <p:nvPr/>
-        </p:nvSpPr>
-        <p:spPr>
-          <a:xfrm>
-            <a:off x="6062472" y="1645920"/>
-            <a:ext cx="2231136" cy="548640"/>
-          </a:xfrm>
-          <a:prstGeom prst="rect">
-            <a:avLst/>
-          </a:prstGeom>
-          <a:noFill/>
-          <a:ln/>
-        </p:spPr>
-        <p:txBody>
-          <a:bodyPr wrap="square" rtlCol="0" anchor="ctr"/>
-          <a:lstStyle/>
-          <a:p>
-            <a:pPr indent="0" marL="0">
-              <a:buNone/>
-            </a:pPr>
-            <a:r>
-              <a:rPr lang="en-US" sz="1600" b="1" dirty="0">
-                <a:solidFill>
-                  <a:srgbClr val="1E2761"/>
-                </a:solidFill>
-                <a:latin typeface="Calibri" pitchFamily="34" charset="0"/>
-                <a:ea typeface="Calibri" pitchFamily="34" charset="-122"/>
-                <a:cs typeface="Calibri" pitchFamily="34" charset="-120"/>
-              </a:rPr>
-              <a:t>External</a:t>
-            </a:r>
-            <a:endParaRPr lang="en-US" sz="1600" dirty="0"/>
-          </a:p>
-        </p:txBody>
-      </p:sp>
-      <p:sp>
-        <p:nvSpPr>
-          <p:cNvPr id="11" name="Text 9"/>
-          <p:cNvSpPr txBox="1"/>
-          <p:nvPr/>
-        </p:nvSpPr>
-        <p:spPr>
-          <a:xfrm>
-            <a:off x="6062472" y="2286000"/>
-            <a:ext cx="2231136" cy="3200400"/>
-          </a:xfrm>
-          <a:prstGeom prst="rect">
-            <a:avLst/>
-          </a:prstGeom>
-          <a:noFill/>
-          <a:ln/>
-        </p:spPr>
-        <p:txBody>
-          <a:bodyPr wrap="square" rtlCol="0" anchor="ctr"/>
-          <a:lstStyle/>
-          <a:p>
-            <a:pPr indent="0" marL="0">
-              <a:buNone/>
-            </a:pPr>
-            <a:r>
-              <a:rPr lang="en-US" sz="1200" dirty="0">
-                <a:solidFill>
-                  <a:srgbClr val="1F1F1F"/>
-                </a:solidFill>
-                <a:latin typeface="Calibri" pitchFamily="34" charset="0"/>
-                <a:ea typeface="Calibri" pitchFamily="34" charset="-122"/>
-                <a:cs typeface="Calibri" pitchFamily="34" charset="-120"/>
-              </a:rPr>
-              <a:t>Findings are scoped to these 3 specific free-tier configurations, at this point in time</a:t>
-            </a:r>
-            <a:endParaRPr lang="en-US" sz="1200" dirty="0"/>
-          </a:p>
-        </p:txBody>
-      </p:sp>
-      <p:sp>
-        <p:nvSpPr>
-          <p:cNvPr id="12" name="Shape 10"/>
-          <p:cNvSpPr/>
-          <p:nvPr/>
-        </p:nvSpPr>
-        <p:spPr>
-          <a:xfrm>
-            <a:off x="8613648" y="1463040"/>
-            <a:ext cx="2551176" cy="4206240"/>
-          </a:xfrm>
-          <a:prstGeom prst="rect">
-            <a:avLst/>
-          </a:prstGeom>
-          <a:solidFill>
-            <a:srgbClr val="CADCFC"/>
-          </a:solidFill>
-          <a:ln/>
-        </p:spPr>
-      </p:sp>
-      <p:sp>
-        <p:nvSpPr>
-          <p:cNvPr id="13" name="Text 11"/>
-          <p:cNvSpPr txBox="1"/>
-          <p:nvPr/>
-        </p:nvSpPr>
-        <p:spPr>
-          <a:xfrm>
-            <a:off x="8750808" y="1645920"/>
-            <a:ext cx="2231136" cy="548640"/>
-          </a:xfrm>
-          <a:prstGeom prst="rect">
-            <a:avLst/>
-          </a:prstGeom>
-          <a:noFill/>
-          <a:ln/>
-        </p:spPr>
-        <p:txBody>
-          <a:bodyPr wrap="square" rtlCol="0" anchor="ctr"/>
-          <a:lstStyle/>
-          <a:p>
-            <a:pPr indent="0" marL="0">
-              <a:buNone/>
-            </a:pPr>
-            <a:r>
-              <a:rPr lang="en-US" sz="1600" b="1" dirty="0">
-                <a:solidFill>
-                  <a:srgbClr val="1E2761"/>
-                </a:solidFill>
-                <a:latin typeface="Calibri" pitchFamily="34" charset="0"/>
-                <a:ea typeface="Calibri" pitchFamily="34" charset="-122"/>
-                <a:cs typeface="Calibri" pitchFamily="34" charset="-120"/>
-              </a:rPr>
-              <a:t>Conclusion</a:t>
-            </a:r>
-            <a:endParaRPr lang="en-US" sz="1600" dirty="0"/>
-          </a:p>
-        </p:txBody>
-      </p:sp>
-      <p:sp>
-        <p:nvSpPr>
-          <p:cNvPr id="14" name="Text 12"/>
-          <p:cNvSpPr txBox="1"/>
-          <p:nvPr/>
-        </p:nvSpPr>
-        <p:spPr>
-          <a:xfrm>
-            <a:off x="8750808" y="2286000"/>
-            <a:ext cx="2231136" cy="3200400"/>
-          </a:xfrm>
-          <a:prstGeom prst="rect">
-            <a:avLst/>
-          </a:prstGeom>
-          <a:noFill/>
-          <a:ln/>
-        </p:spPr>
-        <p:txBody>
-          <a:bodyPr wrap="square" rtlCol="0" anchor="ctr"/>
-          <a:lstStyle/>
-          <a:p>
-            <a:pPr indent="0" marL="0">
-              <a:buNone/>
-            </a:pPr>
-            <a:r>
-              <a:rPr lang="en-US" sz="1200" dirty="0">
-                <a:solidFill>
-                  <a:srgbClr val="1F1F1F"/>
-                </a:solidFill>
-                <a:latin typeface="Calibri" pitchFamily="34" charset="0"/>
-                <a:ea typeface="Calibri" pitchFamily="34" charset="-122"/>
-                <a:cs typeface="Calibri" pitchFamily="34" charset="-120"/>
-              </a:rPr>
-              <a:t>H1/H2 non-significance reflects limited statistical power — not proof of no effect</a:t>
-            </a:r>
-            <a:endParaRPr lang="en-US" sz="1200" dirty="0"/>
+              <a:t>d = −0.84</a:t>
+            </a:r>
+            <a:endParaRPr lang="en-US" sz="1500" dirty="0"/>
+          </a:p>
+        </p:txBody>
+      </p:sp>
+      <p:sp>
+        <p:nvSpPr>
+          <p:cNvPr id="18" name="Text 16"/>
+          <p:cNvSpPr txBox="1"/>
+          <p:nvPr/>
+        </p:nvSpPr>
+        <p:spPr>
+          <a:xfrm>
+            <a:off x="7680960" y="4434840"/>
+            <a:ext cx="3749040" cy="548640"/>
+          </a:xfrm>
+          <a:prstGeom prst="rect">
+            <a:avLst/>
+          </a:prstGeom>
+          <a:noFill/>
+          <a:ln/>
+        </p:spPr>
+        <p:txBody>
+          <a:bodyPr wrap="square" rtlCol="0" anchor="ctr"/>
+          <a:lstStyle/>
+          <a:p>
+            <a:pPr indent="0" marL="0">
+              <a:buNone/>
+            </a:pPr>
+            <a:r>
+              <a:rPr lang="en-US" sz="1500" b="1" dirty="0">
+                <a:solidFill>
+                  <a:srgbClr val="2E7D32"/>
+                </a:solidFill>
+                <a:latin typeface="Calibri" pitchFamily="34" charset="0"/>
+                <a:ea typeface="Calibri" pitchFamily="34" charset="-122"/>
+                <a:cs typeface="Calibri" pitchFamily="34" charset="-120"/>
+              </a:rPr>
+              <a:t>SIGNIFICANT — Large Effect</a:t>
+            </a:r>
+            <a:endParaRPr lang="en-US" sz="1500" dirty="0"/>
+          </a:p>
+        </p:txBody>
+      </p:sp>
+      <p:sp>
+        <p:nvSpPr>
+          <p:cNvPr id="19" name="Text 17"/>
+          <p:cNvSpPr txBox="1"/>
+          <p:nvPr/>
+        </p:nvSpPr>
+        <p:spPr>
+          <a:xfrm>
+            <a:off x="548640" y="5760720"/>
+            <a:ext cx="11064240" cy="731520"/>
+          </a:xfrm>
+          <a:prstGeom prst="rect">
+            <a:avLst/>
+          </a:prstGeom>
+          <a:noFill/>
+          <a:ln/>
+        </p:spPr>
+        <p:txBody>
+          <a:bodyPr wrap="square" rtlCol="0" anchor="ctr"/>
+          <a:lstStyle/>
+          <a:p>
+            <a:pPr indent="0" marL="0">
+              <a:buNone/>
+            </a:pPr>
+            <a:r>
+              <a:rPr lang="en-US" sz="1300" i="1" dirty="0">
+                <a:solidFill>
+                  <a:srgbClr val="5F5E5A"/>
+                </a:solidFill>
+                <a:latin typeface="Calibri" pitchFamily="34" charset="0"/>
+                <a:ea typeface="Calibri" pitchFamily="34" charset="-122"/>
+                <a:cs typeface="Calibri" pitchFamily="34" charset="-120"/>
+              </a:rPr>
+              <a:t>Only one comparison out of three reaches statistical significance — Groq's advantage over Mistral specifically. Gemini falls in between both providers on this dimension, not significantly different from either.</a:t>
+            </a:r>
+            <a:endParaRPr lang="en-US" sz="1300" dirty="0"/>
           </a:p>
         </p:txBody>
       </p:sp>
@@ -4656,23 +5859,23 @@
         <p:spPr>
           <a:xfrm>
             <a:off x="548640" y="365760"/>
-            <a:ext cx="10058400" cy="731520"/>
-          </a:xfrm>
-          <a:prstGeom prst="rect">
-            <a:avLst/>
-          </a:prstGeom>
-          <a:noFill/>
-          <a:ln/>
-        </p:spPr>
-        <p:txBody>
-          <a:bodyPr wrap="square" rtlCol="0" anchor="ctr"/>
-          <a:lstStyle/>
-          <a:p>
-            <a:pPr indent="0" marL="0">
-              <a:buNone/>
-            </a:pPr>
-            <a:r>
-              <a:rPr lang="en-US" sz="3200" b="1" dirty="0">
+            <a:ext cx="10515600" cy="640080"/>
+          </a:xfrm>
+          <a:prstGeom prst="rect">
+            <a:avLst/>
+          </a:prstGeom>
+          <a:noFill/>
+          <a:ln/>
+        </p:spPr>
+        <p:txBody>
+          <a:bodyPr wrap="square" rtlCol="0" anchor="ctr"/>
+          <a:lstStyle/>
+          <a:p>
+            <a:pPr indent="0" marL="0">
+              <a:buNone/>
+            </a:pPr>
+            <a:r>
+              <a:rPr lang="en-US" sz="3000" b="1" dirty="0">
                 <a:solidFill>
                   <a:srgbClr val="1E2761"/>
                 </a:solidFill>
@@ -4680,9 +5883,9 @@
                 <a:ea typeface="Cambria" pitchFamily="34" charset="-122"/>
                 <a:cs typeface="Cambria" pitchFamily="34" charset="-120"/>
               </a:rPr>
-              <a:t>Conclusions</a:t>
-            </a:r>
-            <a:endParaRPr lang="en-US" sz="3200" dirty="0"/>
+              <a:t>Hypothesis Testing: What Held Up?</a:t>
+            </a:r>
+            <a:endParaRPr lang="en-US" sz="3000" dirty="0"/>
           </a:p>
         </p:txBody>
       </p:sp>
@@ -4694,28 +5897,53 @@
         </p:nvSpPr>
         <p:spPr>
           <a:xfrm>
-            <a:off x="548640" y="1508760"/>
-            <a:ext cx="320040" cy="320040"/>
+            <a:off x="548640" y="1371600"/>
+            <a:ext cx="11064240" cy="1417320"/>
+          </a:xfrm>
+          <a:prstGeom prst="rect">
+            <a:avLst/>
+          </a:prstGeom>
+          <a:solidFill>
+            <a:srgbClr val="FFFFFF"/>
+          </a:solidFill>
+          <a:ln w="12700">
+            <a:solidFill>
+              <a:srgbClr val="D5D5D0"/>
+            </a:solidFill>
+            <a:prstDash val="solid"/>
+          </a:ln>
+        </p:spPr>
+      </p:sp>
+      <p:sp>
+        <p:nvSpPr>
+          <p:cNvPr id="4" name="Shape 2"/>
+          <p:cNvSpPr/>
+          <p:nvPr/>
+        </p:nvSpPr>
+        <p:spPr>
+          <a:xfrm>
+            <a:off x="822960" y="1691640"/>
+            <a:ext cx="731520" cy="731520"/>
           </a:xfrm>
           <a:prstGeom prst="ellipse">
             <a:avLst/>
           </a:prstGeom>
           <a:solidFill>
-            <a:srgbClr val="2E7D32"/>
+            <a:srgbClr val="5F5E5A"/>
           </a:solidFill>
           <a:ln/>
         </p:spPr>
       </p:sp>
       <p:sp>
         <p:nvSpPr>
-          <p:cNvPr id="4" name="Text 2"/>
-          <p:cNvSpPr txBox="1"/>
-          <p:nvPr/>
-        </p:nvSpPr>
-        <p:spPr>
-          <a:xfrm>
-            <a:off x="548640" y="1508760"/>
-            <a:ext cx="320040" cy="320040"/>
+          <p:cNvPr id="5" name="Text 3"/>
+          <p:cNvSpPr txBox="1"/>
+          <p:nvPr/>
+        </p:nvSpPr>
+        <p:spPr>
+          <a:xfrm>
+            <a:off x="822960" y="1691640"/>
+            <a:ext cx="731520" cy="731520"/>
           </a:xfrm>
           <a:prstGeom prst="rect">
             <a:avLst/>
@@ -4731,46 +5959,124 @@
               <a:buNone/>
             </a:pPr>
             <a:r>
-              <a:rPr lang="en-US" sz="1400" b="1" dirty="0">
+              <a:rPr lang="en-US" sz="1800" b="1" dirty="0">
                 <a:solidFill>
                   <a:srgbClr val="FFFFFF"/>
                 </a:solidFill>
-                <a:latin typeface="Calibri" pitchFamily="34" charset="0"/>
-                <a:ea typeface="Calibri" pitchFamily="34" charset="-122"/>
-                <a:cs typeface="Calibri" pitchFamily="34" charset="-120"/>
-              </a:rPr>
-              <a:t>✓</a:t>
-            </a:r>
-            <a:endParaRPr lang="en-US" sz="1400" dirty="0"/>
-          </a:p>
-        </p:txBody>
-      </p:sp>
-      <p:sp>
-        <p:nvSpPr>
-          <p:cNvPr id="5" name="Text 3"/>
-          <p:cNvSpPr txBox="1"/>
-          <p:nvPr/>
-        </p:nvSpPr>
-        <p:spPr>
-          <a:xfrm>
-            <a:off x="1051560" y="1463040"/>
-            <a:ext cx="10058400" cy="640080"/>
-          </a:xfrm>
-          <a:prstGeom prst="rect">
-            <a:avLst/>
-          </a:prstGeom>
-          <a:noFill/>
-          <a:ln/>
-        </p:spPr>
-        <p:txBody>
-          <a:bodyPr wrap="square" rtlCol="0" anchor="ctr"/>
-          <a:lstStyle/>
-          <a:p>
-            <a:pPr indent="0" marL="0">
-              <a:buNone/>
-            </a:pPr>
-            <a:r>
-              <a:rPr lang="en-US" sz="1600" dirty="0">
+                <a:latin typeface="Cambria" pitchFamily="34" charset="0"/>
+                <a:ea typeface="Cambria" pitchFamily="34" charset="-122"/>
+                <a:cs typeface="Cambria" pitchFamily="34" charset="-120"/>
+              </a:rPr>
+              <a:t>H1</a:t>
+            </a:r>
+            <a:endParaRPr lang="en-US" sz="1800" dirty="0"/>
+          </a:p>
+        </p:txBody>
+      </p:sp>
+      <p:sp>
+        <p:nvSpPr>
+          <p:cNvPr id="6" name="Text 4"/>
+          <p:cNvSpPr txBox="1"/>
+          <p:nvPr/>
+        </p:nvSpPr>
+        <p:spPr>
+          <a:xfrm>
+            <a:off x="1828800" y="1508760"/>
+            <a:ext cx="3931920" cy="457200"/>
+          </a:xfrm>
+          <a:prstGeom prst="rect">
+            <a:avLst/>
+          </a:prstGeom>
+          <a:noFill/>
+          <a:ln/>
+        </p:spPr>
+        <p:txBody>
+          <a:bodyPr wrap="square" rtlCol="0" anchor="ctr"/>
+          <a:lstStyle/>
+          <a:p>
+            <a:pPr indent="0" marL="0">
+              <a:buNone/>
+            </a:pPr>
+            <a:r>
+              <a:rPr lang="en-US" sz="1500" b="1" dirty="0">
+                <a:solidFill>
+                  <a:srgbClr val="1E2761"/>
+                </a:solidFill>
+                <a:latin typeface="Calibri" pitchFamily="34" charset="0"/>
+                <a:ea typeface="Calibri" pitchFamily="34" charset="-122"/>
+                <a:cs typeface="Calibri" pitchFamily="34" charset="-120"/>
+              </a:rPr>
+              <a:t>Reasoning vs. Retrieval</a:t>
+            </a:r>
+            <a:endParaRPr lang="en-US" sz="1500" dirty="0"/>
+          </a:p>
+        </p:txBody>
+      </p:sp>
+      <p:sp>
+        <p:nvSpPr>
+          <p:cNvPr id="7" name="Text 5"/>
+          <p:cNvSpPr txBox="1"/>
+          <p:nvPr/>
+        </p:nvSpPr>
+        <p:spPr>
+          <a:xfrm>
+            <a:off x="1828800" y="1965960"/>
+            <a:ext cx="3931920" cy="731520"/>
+          </a:xfrm>
+          <a:prstGeom prst="rect">
+            <a:avLst/>
+          </a:prstGeom>
+          <a:noFill/>
+          <a:ln/>
+        </p:spPr>
+        <p:txBody>
+          <a:bodyPr wrap="square" rtlCol="0" anchor="ctr"/>
+          <a:lstStyle/>
+          <a:p>
+            <a:pPr indent="0" marL="0">
+              <a:buNone/>
+            </a:pPr>
+            <a:r>
+              <a:rPr lang="en-US" sz="1050" i="1" dirty="0">
+                <a:solidFill>
+                  <a:srgbClr val="5F5E5A"/>
+                </a:solidFill>
+                <a:latin typeface="Calibri" pitchFamily="34" charset="0"/>
+                <a:ea typeface="Calibri" pitchFamily="34" charset="-122"/>
+                <a:cs typeface="Calibri" pitchFamily="34" charset="-120"/>
+              </a:rPr>
+              <a:t>Gemini/Groq: small-medium effect, consistent direction. Mistral: negligible.</a:t>
+            </a:r>
+            <a:endParaRPr lang="en-US" sz="1050" dirty="0"/>
+          </a:p>
+        </p:txBody>
+      </p:sp>
+      <p:sp>
+        <p:nvSpPr>
+          <p:cNvPr id="8" name="Text 6"/>
+          <p:cNvSpPr txBox="1"/>
+          <p:nvPr/>
+        </p:nvSpPr>
+        <p:spPr>
+          <a:xfrm>
+            <a:off x="5943600" y="1737360"/>
+            <a:ext cx="5486400" cy="640080"/>
+          </a:xfrm>
+          <a:prstGeom prst="rect">
+            <a:avLst/>
+          </a:prstGeom>
+          <a:noFill/>
+          <a:ln/>
+        </p:spPr>
+        <p:txBody>
+          <a:bodyPr wrap="square" rtlCol="0" anchor="ctr"/>
+          <a:lstStyle/>
+          <a:p>
+            <a:pPr indent="0" marL="0">
+              <a:buNone/>
+            </a:pPr>
+            <a:r>
+              <a:rPr lang="en-US" sz="1500" dirty="0">
                 <a:solidFill>
                   <a:srgbClr val="1F1F1F"/>
                 </a:solidFill>
@@ -4778,107 +6084,9 @@
                 <a:ea typeface="Calibri" pitchFamily="34" charset="-122"/>
                 <a:cs typeface="Calibri" pitchFamily="34" charset="-120"/>
               </a:rPr>
-              <a:t>Groq's hosted model: highest mean score, lowest variance, only confirmed category win</a:t>
-            </a:r>
-            <a:endParaRPr lang="en-US" sz="1600" dirty="0"/>
-          </a:p>
-        </p:txBody>
-      </p:sp>
-      <p:sp>
-        <p:nvSpPr>
-          <p:cNvPr id="6" name="Shape 4"/>
-          <p:cNvSpPr/>
-          <p:nvPr/>
-        </p:nvSpPr>
-        <p:spPr>
-          <a:xfrm>
-            <a:off x="548640" y="2468880"/>
-            <a:ext cx="320040" cy="320040"/>
-          </a:xfrm>
-          <a:prstGeom prst="ellipse">
-            <a:avLst/>
-          </a:prstGeom>
-          <a:solidFill>
-            <a:srgbClr val="2E7D32"/>
-          </a:solidFill>
-          <a:ln/>
-        </p:spPr>
-      </p:sp>
-      <p:sp>
-        <p:nvSpPr>
-          <p:cNvPr id="7" name="Text 5"/>
-          <p:cNvSpPr txBox="1"/>
-          <p:nvPr/>
-        </p:nvSpPr>
-        <p:spPr>
-          <a:xfrm>
-            <a:off x="548640" y="2468880"/>
-            <a:ext cx="320040" cy="320040"/>
-          </a:xfrm>
-          <a:prstGeom prst="rect">
-            <a:avLst/>
-          </a:prstGeom>
-          <a:noFill/>
-          <a:ln/>
-        </p:spPr>
-        <p:txBody>
-          <a:bodyPr wrap="square" lIns="0" tIns="0" rIns="0" bIns="0" rtlCol="0" anchor="ctr"/>
-          <a:lstStyle/>
-          <a:p>
-            <a:pPr algn="ctr" indent="0" marL="0">
-              <a:buNone/>
-            </a:pPr>
-            <a:r>
-              <a:rPr lang="en-US" sz="1400" b="1" dirty="0">
-                <a:solidFill>
-                  <a:srgbClr val="FFFFFF"/>
-                </a:solidFill>
-                <a:latin typeface="Calibri" pitchFamily="34" charset="0"/>
-                <a:ea typeface="Calibri" pitchFamily="34" charset="-122"/>
-                <a:cs typeface="Calibri" pitchFamily="34" charset="-120"/>
-              </a:rPr>
-              <a:t>✓</a:t>
-            </a:r>
-            <a:endParaRPr lang="en-US" sz="1400" dirty="0"/>
-          </a:p>
-        </p:txBody>
-      </p:sp>
-      <p:sp>
-        <p:nvSpPr>
-          <p:cNvPr id="8" name="Text 6"/>
-          <p:cNvSpPr txBox="1"/>
-          <p:nvPr/>
-        </p:nvSpPr>
-        <p:spPr>
-          <a:xfrm>
-            <a:off x="1051560" y="2423160"/>
-            <a:ext cx="10058400" cy="640080"/>
-          </a:xfrm>
-          <a:prstGeom prst="rect">
-            <a:avLst/>
-          </a:prstGeom>
-          <a:noFill/>
-          <a:ln/>
-        </p:spPr>
-        <p:txBody>
-          <a:bodyPr wrap="square" rtlCol="0" anchor="ctr"/>
-          <a:lstStyle/>
-          <a:p>
-            <a:pPr indent="0" marL="0">
-              <a:buNone/>
-            </a:pPr>
-            <a:r>
-              <a:rPr lang="en-US" sz="1600" dirty="0">
-                <a:solidFill>
-                  <a:srgbClr val="1F1F1F"/>
-                </a:solidFill>
-                <a:latin typeface="Calibri" pitchFamily="34" charset="0"/>
-                <a:ea typeface="Calibri" pitchFamily="34" charset="-122"/>
-                <a:cs typeface="Calibri" pitchFamily="34" charset="-120"/>
-              </a:rPr>
-              <a:t>Human validation is a standing methodological safeguard — not a one-time formality</a:t>
-            </a:r>
-            <a:endParaRPr lang="en-US" sz="1600" dirty="0"/>
+              <a:t>Not significant (all 3 providers)</a:t>
+            </a:r>
+            <a:endParaRPr lang="en-US" sz="1500" dirty="0"/>
           </a:p>
         </p:txBody>
       </p:sp>
@@ -4890,28 +6098,53 @@
         </p:nvSpPr>
         <p:spPr>
           <a:xfrm>
-            <a:off x="548640" y="3429000"/>
-            <a:ext cx="320040" cy="320040"/>
+            <a:off x="548640" y="2971800"/>
+            <a:ext cx="11064240" cy="1417320"/>
+          </a:xfrm>
+          <a:prstGeom prst="rect">
+            <a:avLst/>
+          </a:prstGeom>
+          <a:solidFill>
+            <a:srgbClr val="FFFFFF"/>
+          </a:solidFill>
+          <a:ln w="12700">
+            <a:solidFill>
+              <a:srgbClr val="D5D5D0"/>
+            </a:solidFill>
+            <a:prstDash val="solid"/>
+          </a:ln>
+        </p:spPr>
+      </p:sp>
+      <p:sp>
+        <p:nvSpPr>
+          <p:cNvPr id="10" name="Shape 8"/>
+          <p:cNvSpPr/>
+          <p:nvPr/>
+        </p:nvSpPr>
+        <p:spPr>
+          <a:xfrm>
+            <a:off x="822960" y="3291840"/>
+            <a:ext cx="731520" cy="731520"/>
           </a:xfrm>
           <a:prstGeom prst="ellipse">
             <a:avLst/>
           </a:prstGeom>
           <a:solidFill>
-            <a:srgbClr val="2E7D32"/>
+            <a:srgbClr val="5F5E5A"/>
           </a:solidFill>
           <a:ln/>
         </p:spPr>
       </p:sp>
       <p:sp>
         <p:nvSpPr>
-          <p:cNvPr id="10" name="Text 8"/>
-          <p:cNvSpPr txBox="1"/>
-          <p:nvPr/>
-        </p:nvSpPr>
-        <p:spPr>
-          <a:xfrm>
-            <a:off x="548640" y="3429000"/>
-            <a:ext cx="320040" cy="320040"/>
+          <p:cNvPr id="11" name="Text 9"/>
+          <p:cNvSpPr txBox="1"/>
+          <p:nvPr/>
+        </p:nvSpPr>
+        <p:spPr>
+          <a:xfrm>
+            <a:off x="822960" y="3291840"/>
+            <a:ext cx="731520" cy="731520"/>
           </a:xfrm>
           <a:prstGeom prst="rect">
             <a:avLst/>
@@ -4927,46 +6160,124 @@
               <a:buNone/>
             </a:pPr>
             <a:r>
-              <a:rPr lang="en-US" sz="1400" b="1" dirty="0">
+              <a:rPr lang="en-US" sz="1800" b="1" dirty="0">
                 <a:solidFill>
                   <a:srgbClr val="FFFFFF"/>
                 </a:solidFill>
-                <a:latin typeface="Calibri" pitchFamily="34" charset="0"/>
-                <a:ea typeface="Calibri" pitchFamily="34" charset="-122"/>
-                <a:cs typeface="Calibri" pitchFamily="34" charset="-120"/>
-              </a:rPr>
-              <a:t>✓</a:t>
-            </a:r>
-            <a:endParaRPr lang="en-US" sz="1400" dirty="0"/>
-          </a:p>
-        </p:txBody>
-      </p:sp>
-      <p:sp>
-        <p:nvSpPr>
-          <p:cNvPr id="11" name="Text 9"/>
-          <p:cNvSpPr txBox="1"/>
-          <p:nvPr/>
-        </p:nvSpPr>
-        <p:spPr>
-          <a:xfrm>
-            <a:off x="1051560" y="3383280"/>
-            <a:ext cx="10058400" cy="640080"/>
-          </a:xfrm>
-          <a:prstGeom prst="rect">
-            <a:avLst/>
-          </a:prstGeom>
-          <a:noFill/>
-          <a:ln/>
-        </p:spPr>
-        <p:txBody>
-          <a:bodyPr wrap="square" rtlCol="0" anchor="ctr"/>
-          <a:lstStyle/>
-          <a:p>
-            <a:pPr indent="0" marL="0">
-              <a:buNone/>
-            </a:pPr>
-            <a:r>
-              <a:rPr lang="en-US" sz="1600" dirty="0">
+                <a:latin typeface="Cambria" pitchFamily="34" charset="0"/>
+                <a:ea typeface="Cambria" pitchFamily="34" charset="-122"/>
+                <a:cs typeface="Cambria" pitchFamily="34" charset="-120"/>
+              </a:rPr>
+              <a:t>H2</a:t>
+            </a:r>
+            <a:endParaRPr lang="en-US" sz="1800" dirty="0"/>
+          </a:p>
+        </p:txBody>
+      </p:sp>
+      <p:sp>
+        <p:nvSpPr>
+          <p:cNvPr id="12" name="Text 10"/>
+          <p:cNvSpPr txBox="1"/>
+          <p:nvPr/>
+        </p:nvSpPr>
+        <p:spPr>
+          <a:xfrm>
+            <a:off x="1828800" y="3108960"/>
+            <a:ext cx="3931920" cy="457200"/>
+          </a:xfrm>
+          <a:prstGeom prst="rect">
+            <a:avLst/>
+          </a:prstGeom>
+          <a:noFill/>
+          <a:ln/>
+        </p:spPr>
+        <p:txBody>
+          <a:bodyPr wrap="square" rtlCol="0" anchor="ctr"/>
+          <a:lstStyle/>
+          <a:p>
+            <a:pPr indent="0" marL="0">
+              <a:buNone/>
+            </a:pPr>
+            <a:r>
+              <a:rPr lang="en-US" sz="1500" b="1" dirty="0">
+                <a:solidFill>
+                  <a:srgbClr val="1E2761"/>
+                </a:solidFill>
+                <a:latin typeface="Calibri" pitchFamily="34" charset="0"/>
+                <a:ea typeface="Calibri" pitchFamily="34" charset="-122"/>
+                <a:cs typeface="Calibri" pitchFamily="34" charset="-120"/>
+              </a:rPr>
+              <a:t>Instruction Following vs. Difficulty</a:t>
+            </a:r>
+            <a:endParaRPr lang="en-US" sz="1500" dirty="0"/>
+          </a:p>
+        </p:txBody>
+      </p:sp>
+      <p:sp>
+        <p:nvSpPr>
+          <p:cNvPr id="13" name="Text 11"/>
+          <p:cNvSpPr txBox="1"/>
+          <p:nvPr/>
+        </p:nvSpPr>
+        <p:spPr>
+          <a:xfrm>
+            <a:off x="1828800" y="3566160"/>
+            <a:ext cx="3931920" cy="731520"/>
+          </a:xfrm>
+          <a:prstGeom prst="rect">
+            <a:avLst/>
+          </a:prstGeom>
+          <a:noFill/>
+          <a:ln/>
+        </p:spPr>
+        <p:txBody>
+          <a:bodyPr wrap="square" rtlCol="0" anchor="ctr"/>
+          <a:lstStyle/>
+          <a:p>
+            <a:pPr indent="0" marL="0">
+              <a:buNone/>
+            </a:pPr>
+            <a:r>
+              <a:rPr lang="en-US" sz="1050" i="1" dirty="0">
+                <a:solidFill>
+                  <a:srgbClr val="5F5E5A"/>
+                </a:solidFill>
+                <a:latin typeface="Calibri" pitchFamily="34" charset="0"/>
+                <a:ea typeface="Calibri" pitchFamily="34" charset="-122"/>
+                <a:cs typeface="Calibri" pitchFamily="34" charset="-120"/>
+              </a:rPr>
+              <a:t>All weak, inconsistent correlation (|r| &lt; 0.25)</a:t>
+            </a:r>
+            <a:endParaRPr lang="en-US" sz="1050" dirty="0"/>
+          </a:p>
+        </p:txBody>
+      </p:sp>
+      <p:sp>
+        <p:nvSpPr>
+          <p:cNvPr id="14" name="Text 12"/>
+          <p:cNvSpPr txBox="1"/>
+          <p:nvPr/>
+        </p:nvSpPr>
+        <p:spPr>
+          <a:xfrm>
+            <a:off x="5943600" y="3337560"/>
+            <a:ext cx="5486400" cy="640080"/>
+          </a:xfrm>
+          <a:prstGeom prst="rect">
+            <a:avLst/>
+          </a:prstGeom>
+          <a:noFill/>
+          <a:ln/>
+        </p:spPr>
+        <p:txBody>
+          <a:bodyPr wrap="square" rtlCol="0" anchor="ctr"/>
+          <a:lstStyle/>
+          <a:p>
+            <a:pPr indent="0" marL="0">
+              <a:buNone/>
+            </a:pPr>
+            <a:r>
+              <a:rPr lang="en-US" sz="1500" dirty="0">
                 <a:solidFill>
                   <a:srgbClr val="1F1F1F"/>
                 </a:solidFill>
@@ -4974,42 +6285,67 @@
                 <a:ea typeface="Calibri" pitchFamily="34" charset="-122"/>
                 <a:cs typeface="Calibri" pitchFamily="34" charset="-120"/>
               </a:rPr>
-              <a:t>Free-tier LLM research requires treating provider instability as a first-class design constraint</a:t>
-            </a:r>
-            <a:endParaRPr lang="en-US" sz="1600" dirty="0"/>
-          </a:p>
-        </p:txBody>
-      </p:sp>
-      <p:sp>
-        <p:nvSpPr>
-          <p:cNvPr id="12" name="Shape 10"/>
+              <a:t>Not significant (all 3 providers)</a:t>
+            </a:r>
+            <a:endParaRPr lang="en-US" sz="1500" dirty="0"/>
+          </a:p>
+        </p:txBody>
+      </p:sp>
+      <p:sp>
+        <p:nvSpPr>
+          <p:cNvPr id="15" name="Shape 13"/>
           <p:cNvSpPr/>
           <p:nvPr/>
         </p:nvSpPr>
         <p:spPr>
           <a:xfrm>
-            <a:off x="548640" y="4389120"/>
-            <a:ext cx="320040" cy="320040"/>
+            <a:off x="548640" y="4572000"/>
+            <a:ext cx="11064240" cy="1417320"/>
+          </a:xfrm>
+          <a:prstGeom prst="rect">
+            <a:avLst/>
+          </a:prstGeom>
+          <a:solidFill>
+            <a:srgbClr val="CADCFC"/>
+          </a:solidFill>
+          <a:ln w="25400">
+            <a:solidFill>
+              <a:srgbClr val="1E2761"/>
+            </a:solidFill>
+            <a:prstDash val="solid"/>
+          </a:ln>
+        </p:spPr>
+      </p:sp>
+      <p:sp>
+        <p:nvSpPr>
+          <p:cNvPr id="16" name="Shape 14"/>
+          <p:cNvSpPr/>
+          <p:nvPr/>
+        </p:nvSpPr>
+        <p:spPr>
+          <a:xfrm>
+            <a:off x="822960" y="4892040"/>
+            <a:ext cx="731520" cy="731520"/>
           </a:xfrm>
           <a:prstGeom prst="ellipse">
             <a:avLst/>
           </a:prstGeom>
           <a:solidFill>
-            <a:srgbClr val="2E7D32"/>
+            <a:srgbClr val="1E2761"/>
           </a:solidFill>
           <a:ln/>
         </p:spPr>
       </p:sp>
       <p:sp>
         <p:nvSpPr>
-          <p:cNvPr id="13" name="Text 11"/>
-          <p:cNvSpPr txBox="1"/>
-          <p:nvPr/>
-        </p:nvSpPr>
-        <p:spPr>
-          <a:xfrm>
-            <a:off x="548640" y="4389120"/>
-            <a:ext cx="320040" cy="320040"/>
+          <p:cNvPr id="17" name="Text 15"/>
+          <p:cNvSpPr txBox="1"/>
+          <p:nvPr/>
+        </p:nvSpPr>
+        <p:spPr>
+          <a:xfrm>
+            <a:off x="822960" y="4892040"/>
+            <a:ext cx="731520" cy="731520"/>
           </a:xfrm>
           <a:prstGeom prst="rect">
             <a:avLst/>
@@ -5025,56 +6361,134 @@
               <a:buNone/>
             </a:pPr>
             <a:r>
-              <a:rPr lang="en-US" sz="1400" b="1" dirty="0">
+              <a:rPr lang="en-US" sz="1800" b="1" dirty="0">
                 <a:solidFill>
                   <a:srgbClr val="FFFFFF"/>
                 </a:solidFill>
-                <a:latin typeface="Calibri" pitchFamily="34" charset="0"/>
-                <a:ea typeface="Calibri" pitchFamily="34" charset="-122"/>
-                <a:cs typeface="Calibri" pitchFamily="34" charset="-120"/>
-              </a:rPr>
-              <a:t>✓</a:t>
-            </a:r>
-            <a:endParaRPr lang="en-US" sz="1400" dirty="0"/>
-          </a:p>
-        </p:txBody>
-      </p:sp>
-      <p:sp>
-        <p:nvSpPr>
-          <p:cNvPr id="14" name="Text 12"/>
-          <p:cNvSpPr txBox="1"/>
-          <p:nvPr/>
-        </p:nvSpPr>
-        <p:spPr>
-          <a:xfrm>
-            <a:off x="1051560" y="4343400"/>
-            <a:ext cx="10058400" cy="640080"/>
-          </a:xfrm>
-          <a:prstGeom prst="rect">
-            <a:avLst/>
-          </a:prstGeom>
-          <a:noFill/>
-          <a:ln/>
-        </p:spPr>
-        <p:txBody>
-          <a:bodyPr wrap="square" rtlCol="0" anchor="ctr"/>
-          <a:lstStyle/>
-          <a:p>
-            <a:pPr indent="0" marL="0">
-              <a:buNone/>
-            </a:pPr>
-            <a:r>
-              <a:rPr lang="en-US" sz="1600" dirty="0">
-                <a:solidFill>
-                  <a:srgbClr val="1F1F1F"/>
-                </a:solidFill>
-                <a:latin typeface="Calibri" pitchFamily="34" charset="0"/>
-                <a:ea typeface="Calibri" pitchFamily="34" charset="-122"/>
-                <a:cs typeface="Calibri" pitchFamily="34" charset="-120"/>
-              </a:rPr>
-              <a:t>Full reproducibility package: dataset, code, logs, and this report — openly documented</a:t>
-            </a:r>
-            <a:endParaRPr lang="en-US" sz="1600" dirty="0"/>
+                <a:latin typeface="Cambria" pitchFamily="34" charset="0"/>
+                <a:ea typeface="Cambria" pitchFamily="34" charset="-122"/>
+                <a:cs typeface="Cambria" pitchFamily="34" charset="-120"/>
+              </a:rPr>
+              <a:t>H3</a:t>
+            </a:r>
+            <a:endParaRPr lang="en-US" sz="1800" dirty="0"/>
+          </a:p>
+        </p:txBody>
+      </p:sp>
+      <p:sp>
+        <p:nvSpPr>
+          <p:cNvPr id="18" name="Text 16"/>
+          <p:cNvSpPr txBox="1"/>
+          <p:nvPr/>
+        </p:nvSpPr>
+        <p:spPr>
+          <a:xfrm>
+            <a:off x="1828800" y="4709160"/>
+            <a:ext cx="3931920" cy="457200"/>
+          </a:xfrm>
+          <a:prstGeom prst="rect">
+            <a:avLst/>
+          </a:prstGeom>
+          <a:noFill/>
+          <a:ln/>
+        </p:spPr>
+        <p:txBody>
+          <a:bodyPr wrap="square" rtlCol="0" anchor="ctr"/>
+          <a:lstStyle/>
+          <a:p>
+            <a:pPr indent="0" marL="0">
+              <a:buNone/>
+            </a:pPr>
+            <a:r>
+              <a:rPr lang="en-US" sz="1500" b="1" dirty="0">
+                <a:solidFill>
+                  <a:srgbClr val="1E2761"/>
+                </a:solidFill>
+                <a:latin typeface="Calibri" pitchFamily="34" charset="0"/>
+                <a:ea typeface="Calibri" pitchFamily="34" charset="-122"/>
+                <a:cs typeface="Calibri" pitchFamily="34" charset="-120"/>
+              </a:rPr>
+              <a:t>Hallucination: Mistral vs. Groq</a:t>
+            </a:r>
+            <a:endParaRPr lang="en-US" sz="1500" dirty="0"/>
+          </a:p>
+        </p:txBody>
+      </p:sp>
+      <p:sp>
+        <p:nvSpPr>
+          <p:cNvPr id="19" name="Text 17"/>
+          <p:cNvSpPr txBox="1"/>
+          <p:nvPr/>
+        </p:nvSpPr>
+        <p:spPr>
+          <a:xfrm>
+            <a:off x="1828800" y="5166360"/>
+            <a:ext cx="3931920" cy="731520"/>
+          </a:xfrm>
+          <a:prstGeom prst="rect">
+            <a:avLst/>
+          </a:prstGeom>
+          <a:noFill/>
+          <a:ln/>
+        </p:spPr>
+        <p:txBody>
+          <a:bodyPr wrap="square" rtlCol="0" anchor="ctr"/>
+          <a:lstStyle/>
+          <a:p>
+            <a:pPr indent="0" marL="0">
+              <a:buNone/>
+            </a:pPr>
+            <a:r>
+              <a:rPr lang="en-US" sz="1050" i="1" dirty="0">
+                <a:solidFill>
+                  <a:srgbClr val="5F5E5A"/>
+                </a:solidFill>
+                <a:latin typeface="Calibri" pitchFamily="34" charset="0"/>
+                <a:ea typeface="Calibri" pitchFamily="34" charset="-122"/>
+                <a:cs typeface="Calibri" pitchFamily="34" charset="-120"/>
+              </a:rPr>
+              <a:t>Large effect (d = 0.84). Only 1 of 3 pairwise comparisons.</a:t>
+            </a:r>
+            <a:endParaRPr lang="en-US" sz="1050" dirty="0"/>
+          </a:p>
+        </p:txBody>
+      </p:sp>
+      <p:sp>
+        <p:nvSpPr>
+          <p:cNvPr id="20" name="Text 18"/>
+          <p:cNvSpPr txBox="1"/>
+          <p:nvPr/>
+        </p:nvSpPr>
+        <p:spPr>
+          <a:xfrm>
+            <a:off x="5943600" y="4937760"/>
+            <a:ext cx="5486400" cy="640080"/>
+          </a:xfrm>
+          <a:prstGeom prst="rect">
+            <a:avLst/>
+          </a:prstGeom>
+          <a:noFill/>
+          <a:ln/>
+        </p:spPr>
+        <p:txBody>
+          <a:bodyPr wrap="square" rtlCol="0" anchor="ctr"/>
+          <a:lstStyle/>
+          <a:p>
+            <a:pPr indent="0" marL="0">
+              <a:buNone/>
+            </a:pPr>
+            <a:r>
+              <a:rPr lang="en-US" sz="1500" b="1" dirty="0">
+                <a:solidFill>
+                  <a:srgbClr val="2E7D32"/>
+                </a:solidFill>
+                <a:latin typeface="Calibri" pitchFamily="34" charset="0"/>
+                <a:ea typeface="Calibri" pitchFamily="34" charset="-122"/>
+                <a:cs typeface="Calibri" pitchFamily="34" charset="-120"/>
+              </a:rPr>
+              <a:t>p = 0.01 — SIGNIFICANT</a:t>
+            </a:r>
+            <a:endParaRPr lang="en-US" sz="1500" dirty="0"/>
           </a:p>
         </p:txBody>
       </p:sp>
@@ -5089,6 +6503,2278 @@
 <file path=ppt/slides/slide15.xml><?xml version="1.0" encoding="utf-8"?>
 <p:sld xmlns:a="http://schemas.openxmlformats.org/drawingml/2006/main" xmlns:r="http://schemas.openxmlformats.org/officeDocument/2006/relationships" xmlns:p="http://schemas.openxmlformats.org/presentationml/2006/main">
   <p:cSld name="Slide 15">
+    <p:bg>
+      <p:bgPr>
+        <a:solidFill>
+          <a:srgbClr val="FFFFFF"/>
+        </a:solidFill>
+      </p:bgPr>
+    </p:bg>
+    <p:spTree>
+      <p:nvGrpSpPr>
+        <p:cNvPr id="1" name=""/>
+        <p:cNvGrpSpPr/>
+        <p:nvPr/>
+      </p:nvGrpSpPr>
+      <p:grpSpPr>
+        <a:xfrm>
+          <a:off x="0" y="0"/>
+          <a:ext cx="0" cy="0"/>
+          <a:chOff x="0" y="0"/>
+          <a:chExt cx="0" cy="0"/>
+        </a:xfrm>
+      </p:grpSpPr>
+      <p:sp>
+        <p:nvSpPr>
+          <p:cNvPr id="2" name="Text 0"/>
+          <p:cNvSpPr txBox="1"/>
+          <p:nvPr/>
+        </p:nvSpPr>
+        <p:spPr>
+          <a:xfrm>
+            <a:off x="548640" y="365760"/>
+            <a:ext cx="10515600" cy="640080"/>
+          </a:xfrm>
+          <a:prstGeom prst="rect">
+            <a:avLst/>
+          </a:prstGeom>
+          <a:noFill/>
+          <a:ln/>
+        </p:spPr>
+        <p:txBody>
+          <a:bodyPr wrap="square" rtlCol="0" anchor="ctr"/>
+          <a:lstStyle/>
+          <a:p>
+            <a:pPr indent="0" marL="0">
+              <a:buNone/>
+            </a:pPr>
+            <a:r>
+              <a:rPr lang="en-US" sz="3000" b="1" dirty="0">
+                <a:solidFill>
+                  <a:srgbClr val="1E2761"/>
+                </a:solidFill>
+                <a:latin typeface="Cambria" pitchFamily="34" charset="0"/>
+                <a:ea typeface="Cambria" pitchFamily="34" charset="-122"/>
+                <a:cs typeface="Cambria" pitchFamily="34" charset="-120"/>
+              </a:rPr>
+              <a:t>Provider Profiles: All Three, Side by Side</a:t>
+            </a:r>
+            <a:endParaRPr lang="en-US" sz="3000" dirty="0"/>
+          </a:p>
+        </p:txBody>
+      </p:sp>
+      <p:sp>
+        <p:nvSpPr>
+          <p:cNvPr id="3" name="Shape 1"/>
+          <p:cNvSpPr/>
+          <p:nvPr/>
+        </p:nvSpPr>
+        <p:spPr>
+          <a:xfrm>
+            <a:off x="548640" y="1371600"/>
+            <a:ext cx="3593592" cy="4572000"/>
+          </a:xfrm>
+          <a:prstGeom prst="rect">
+            <a:avLst/>
+          </a:prstGeom>
+          <a:solidFill>
+            <a:srgbClr val="E6F1FB"/>
+          </a:solidFill>
+          <a:ln w="19050">
+            <a:solidFill>
+              <a:srgbClr val="185FA5"/>
+            </a:solidFill>
+            <a:prstDash val="solid"/>
+          </a:ln>
+        </p:spPr>
+      </p:sp>
+      <p:sp>
+        <p:nvSpPr>
+          <p:cNvPr id="4" name="Text 2"/>
+          <p:cNvSpPr txBox="1"/>
+          <p:nvPr/>
+        </p:nvSpPr>
+        <p:spPr>
+          <a:xfrm>
+            <a:off x="731520" y="1554480"/>
+            <a:ext cx="3227832" cy="548640"/>
+          </a:xfrm>
+          <a:prstGeom prst="rect">
+            <a:avLst/>
+          </a:prstGeom>
+          <a:noFill/>
+          <a:ln/>
+        </p:spPr>
+        <p:txBody>
+          <a:bodyPr wrap="square" rtlCol="0" anchor="ctr"/>
+          <a:lstStyle/>
+          <a:p>
+            <a:pPr indent="0" marL="0">
+              <a:buNone/>
+            </a:pPr>
+            <a:r>
+              <a:rPr lang="en-US" sz="2200" b="1" dirty="0">
+                <a:solidFill>
+                  <a:srgbClr val="185FA5"/>
+                </a:solidFill>
+                <a:latin typeface="Cambria" pitchFamily="34" charset="0"/>
+                <a:ea typeface="Cambria" pitchFamily="34" charset="-122"/>
+                <a:cs typeface="Cambria" pitchFamily="34" charset="-120"/>
+              </a:rPr>
+              <a:t>Gemini</a:t>
+            </a:r>
+            <a:endParaRPr lang="en-US" sz="2200" dirty="0"/>
+          </a:p>
+        </p:txBody>
+      </p:sp>
+      <p:sp>
+        <p:nvSpPr>
+          <p:cNvPr id="5" name="Text 3"/>
+          <p:cNvSpPr txBox="1"/>
+          <p:nvPr/>
+        </p:nvSpPr>
+        <p:spPr>
+          <a:xfrm>
+            <a:off x="731520" y="2103120"/>
+            <a:ext cx="3227832" cy="365760"/>
+          </a:xfrm>
+          <a:prstGeom prst="rect">
+            <a:avLst/>
+          </a:prstGeom>
+          <a:noFill/>
+          <a:ln/>
+        </p:spPr>
+        <p:txBody>
+          <a:bodyPr wrap="square" rtlCol="0" anchor="ctr"/>
+          <a:lstStyle/>
+          <a:p>
+            <a:pPr indent="0" marL="0">
+              <a:buNone/>
+            </a:pPr>
+            <a:r>
+              <a:rPr lang="en-US" sz="1100" i="1" dirty="0">
+                <a:solidFill>
+                  <a:srgbClr val="5F5E5A"/>
+                </a:solidFill>
+                <a:latin typeface="Calibri" pitchFamily="34" charset="0"/>
+                <a:ea typeface="Calibri" pitchFamily="34" charset="-122"/>
+                <a:cs typeface="Calibri" pitchFamily="34" charset="-120"/>
+              </a:rPr>
+              <a:t>gemini-3.5-flash-lite</a:t>
+            </a:r>
+            <a:endParaRPr lang="en-US" sz="1100" dirty="0"/>
+          </a:p>
+        </p:txBody>
+      </p:sp>
+      <p:sp>
+        <p:nvSpPr>
+          <p:cNvPr id="6" name="Text 4"/>
+          <p:cNvSpPr txBox="1"/>
+          <p:nvPr/>
+        </p:nvSpPr>
+        <p:spPr>
+          <a:xfrm>
+            <a:off x="731520" y="2651760"/>
+            <a:ext cx="3227832" cy="640080"/>
+          </a:xfrm>
+          <a:prstGeom prst="rect">
+            <a:avLst/>
+          </a:prstGeom>
+          <a:noFill/>
+          <a:ln/>
+        </p:spPr>
+        <p:txBody>
+          <a:bodyPr wrap="square" rtlCol="0" anchor="ctr"/>
+          <a:lstStyle/>
+          <a:p>
+            <a:pPr indent="0" marL="0">
+              <a:buNone/>
+            </a:pPr>
+            <a:r>
+              <a:rPr lang="en-US" sz="1250" dirty="0">
+                <a:solidFill>
+                  <a:srgbClr val="1F1F1F"/>
+                </a:solidFill>
+                <a:latin typeface="Calibri" pitchFamily="34" charset="0"/>
+                <a:ea typeface="Calibri" pitchFamily="34" charset="-122"/>
+                <a:cs typeface="Calibri" pitchFamily="34" charset="-120"/>
+              </a:rPr>
+              <a:t>• Mean: 11.03</a:t>
+            </a:r>
+            <a:endParaRPr lang="en-US" sz="1250" dirty="0"/>
+          </a:p>
+        </p:txBody>
+      </p:sp>
+      <p:sp>
+        <p:nvSpPr>
+          <p:cNvPr id="7" name="Text 5"/>
+          <p:cNvSpPr txBox="1"/>
+          <p:nvPr/>
+        </p:nvSpPr>
+        <p:spPr>
+          <a:xfrm>
+            <a:off x="731520" y="3337560"/>
+            <a:ext cx="3227832" cy="640080"/>
+          </a:xfrm>
+          <a:prstGeom prst="rect">
+            <a:avLst/>
+          </a:prstGeom>
+          <a:noFill/>
+          <a:ln/>
+        </p:spPr>
+        <p:txBody>
+          <a:bodyPr wrap="square" rtlCol="0" anchor="ctr"/>
+          <a:lstStyle/>
+          <a:p>
+            <a:pPr indent="0" marL="0">
+              <a:buNone/>
+            </a:pPr>
+            <a:r>
+              <a:rPr lang="en-US" sz="1250" dirty="0">
+                <a:solidFill>
+                  <a:srgbClr val="1F1F1F"/>
+                </a:solidFill>
+                <a:latin typeface="Calibri" pitchFamily="34" charset="0"/>
+                <a:ea typeface="Calibri" pitchFamily="34" charset="-122"/>
+                <a:cs typeface="Calibri" pitchFamily="34" charset="-120"/>
+              </a:rPr>
+              <a:t>• CV: 0.3056 (highest variance)</a:t>
+            </a:r>
+            <a:endParaRPr lang="en-US" sz="1250" dirty="0"/>
+          </a:p>
+        </p:txBody>
+      </p:sp>
+      <p:sp>
+        <p:nvSpPr>
+          <p:cNvPr id="8" name="Text 6"/>
+          <p:cNvSpPr txBox="1"/>
+          <p:nvPr/>
+        </p:nvSpPr>
+        <p:spPr>
+          <a:xfrm>
+            <a:off x="731520" y="4023360"/>
+            <a:ext cx="3227832" cy="640080"/>
+          </a:xfrm>
+          <a:prstGeom prst="rect">
+            <a:avLst/>
+          </a:prstGeom>
+          <a:noFill/>
+          <a:ln/>
+        </p:spPr>
+        <p:txBody>
+          <a:bodyPr wrap="square" rtlCol="0" anchor="ctr"/>
+          <a:lstStyle/>
+          <a:p>
+            <a:pPr indent="0" marL="0">
+              <a:buNone/>
+            </a:pPr>
+            <a:r>
+              <a:rPr lang="en-US" sz="1250" dirty="0">
+                <a:solidFill>
+                  <a:srgbClr val="1F1F1F"/>
+                </a:solidFill>
+                <a:latin typeface="Calibri" pitchFamily="34" charset="0"/>
+                <a:ea typeface="Calibri" pitchFamily="34" charset="-122"/>
+                <a:cs typeface="Calibri" pitchFamily="34" charset="-120"/>
+              </a:rPr>
+              <a:t>• Competitive average, least consistent</a:t>
+            </a:r>
+            <a:endParaRPr lang="en-US" sz="1250" dirty="0"/>
+          </a:p>
+        </p:txBody>
+      </p:sp>
+      <p:sp>
+        <p:nvSpPr>
+          <p:cNvPr id="9" name="Text 7"/>
+          <p:cNvSpPr txBox="1"/>
+          <p:nvPr/>
+        </p:nvSpPr>
+        <p:spPr>
+          <a:xfrm>
+            <a:off x="731520" y="4709160"/>
+            <a:ext cx="3227832" cy="640080"/>
+          </a:xfrm>
+          <a:prstGeom prst="rect">
+            <a:avLst/>
+          </a:prstGeom>
+          <a:noFill/>
+          <a:ln/>
+        </p:spPr>
+        <p:txBody>
+          <a:bodyPr wrap="square" rtlCol="0" anchor="ctr"/>
+          <a:lstStyle/>
+          <a:p>
+            <a:pPr indent="0" marL="0">
+              <a:buNone/>
+            </a:pPr>
+            <a:r>
+              <a:rPr lang="en-US" sz="1250" dirty="0">
+                <a:solidFill>
+                  <a:srgbClr val="1F1F1F"/>
+                </a:solidFill>
+                <a:latin typeface="Calibri" pitchFamily="34" charset="0"/>
+                <a:ea typeface="Calibri" pitchFamily="34" charset="-122"/>
+                <a:cs typeface="Calibri" pitchFamily="34" charset="-120"/>
+              </a:rPr>
+              <a:t>• H3: not significantly different from either</a:t>
+            </a:r>
+            <a:endParaRPr lang="en-US" sz="1250" dirty="0"/>
+          </a:p>
+        </p:txBody>
+      </p:sp>
+      <p:sp>
+        <p:nvSpPr>
+          <p:cNvPr id="10" name="Shape 8"/>
+          <p:cNvSpPr/>
+          <p:nvPr/>
+        </p:nvSpPr>
+        <p:spPr>
+          <a:xfrm>
+            <a:off x="4233672" y="1371600"/>
+            <a:ext cx="3593592" cy="4572000"/>
+          </a:xfrm>
+          <a:prstGeom prst="rect">
+            <a:avLst/>
+          </a:prstGeom>
+          <a:solidFill>
+            <a:srgbClr val="FAECE7"/>
+          </a:solidFill>
+          <a:ln w="19050">
+            <a:solidFill>
+              <a:srgbClr val="993C1D"/>
+            </a:solidFill>
+            <a:prstDash val="solid"/>
+          </a:ln>
+        </p:spPr>
+      </p:sp>
+      <p:sp>
+        <p:nvSpPr>
+          <p:cNvPr id="11" name="Text 9"/>
+          <p:cNvSpPr txBox="1"/>
+          <p:nvPr/>
+        </p:nvSpPr>
+        <p:spPr>
+          <a:xfrm>
+            <a:off x="4416552" y="1554480"/>
+            <a:ext cx="3227832" cy="548640"/>
+          </a:xfrm>
+          <a:prstGeom prst="rect">
+            <a:avLst/>
+          </a:prstGeom>
+          <a:noFill/>
+          <a:ln/>
+        </p:spPr>
+        <p:txBody>
+          <a:bodyPr wrap="square" rtlCol="0" anchor="ctr"/>
+          <a:lstStyle/>
+          <a:p>
+            <a:pPr indent="0" marL="0">
+              <a:buNone/>
+            </a:pPr>
+            <a:r>
+              <a:rPr lang="en-US" sz="2200" b="1" dirty="0">
+                <a:solidFill>
+                  <a:srgbClr val="993C1D"/>
+                </a:solidFill>
+                <a:latin typeface="Cambria" pitchFamily="34" charset="0"/>
+                <a:ea typeface="Cambria" pitchFamily="34" charset="-122"/>
+                <a:cs typeface="Cambria" pitchFamily="34" charset="-120"/>
+              </a:rPr>
+              <a:t>Mistral</a:t>
+            </a:r>
+            <a:endParaRPr lang="en-US" sz="2200" dirty="0"/>
+          </a:p>
+        </p:txBody>
+      </p:sp>
+      <p:sp>
+        <p:nvSpPr>
+          <p:cNvPr id="12" name="Text 10"/>
+          <p:cNvSpPr txBox="1"/>
+          <p:nvPr/>
+        </p:nvSpPr>
+        <p:spPr>
+          <a:xfrm>
+            <a:off x="4416552" y="2103120"/>
+            <a:ext cx="3227832" cy="365760"/>
+          </a:xfrm>
+          <a:prstGeom prst="rect">
+            <a:avLst/>
+          </a:prstGeom>
+          <a:noFill/>
+          <a:ln/>
+        </p:spPr>
+        <p:txBody>
+          <a:bodyPr wrap="square" rtlCol="0" anchor="ctr"/>
+          <a:lstStyle/>
+          <a:p>
+            <a:pPr indent="0" marL="0">
+              <a:buNone/>
+            </a:pPr>
+            <a:r>
+              <a:rPr lang="en-US" sz="1100" i="1" dirty="0">
+                <a:solidFill>
+                  <a:srgbClr val="5F5E5A"/>
+                </a:solidFill>
+                <a:latin typeface="Calibri" pitchFamily="34" charset="0"/>
+                <a:ea typeface="Calibri" pitchFamily="34" charset="-122"/>
+                <a:cs typeface="Calibri" pitchFamily="34" charset="-120"/>
+              </a:rPr>
+              <a:t>open-mistral-nemo</a:t>
+            </a:r>
+            <a:endParaRPr lang="en-US" sz="1100" dirty="0"/>
+          </a:p>
+        </p:txBody>
+      </p:sp>
+      <p:sp>
+        <p:nvSpPr>
+          <p:cNvPr id="13" name="Text 11"/>
+          <p:cNvSpPr txBox="1"/>
+          <p:nvPr/>
+        </p:nvSpPr>
+        <p:spPr>
+          <a:xfrm>
+            <a:off x="4416552" y="2651760"/>
+            <a:ext cx="3227832" cy="640080"/>
+          </a:xfrm>
+          <a:prstGeom prst="rect">
+            <a:avLst/>
+          </a:prstGeom>
+          <a:noFill/>
+          <a:ln/>
+        </p:spPr>
+        <p:txBody>
+          <a:bodyPr wrap="square" rtlCol="0" anchor="ctr"/>
+          <a:lstStyle/>
+          <a:p>
+            <a:pPr indent="0" marL="0">
+              <a:buNone/>
+            </a:pPr>
+            <a:r>
+              <a:rPr lang="en-US" sz="1250" dirty="0">
+                <a:solidFill>
+                  <a:srgbClr val="1F1F1F"/>
+                </a:solidFill>
+                <a:latin typeface="Calibri" pitchFamily="34" charset="0"/>
+                <a:ea typeface="Calibri" pitchFamily="34" charset="-122"/>
+                <a:cs typeface="Calibri" pitchFamily="34" charset="-120"/>
+              </a:rPr>
+              <a:t>• Mean: 10.36 (lowest)</a:t>
+            </a:r>
+            <a:endParaRPr lang="en-US" sz="1250" dirty="0"/>
+          </a:p>
+        </p:txBody>
+      </p:sp>
+      <p:sp>
+        <p:nvSpPr>
+          <p:cNvPr id="14" name="Text 12"/>
+          <p:cNvSpPr txBox="1"/>
+          <p:nvPr/>
+        </p:nvSpPr>
+        <p:spPr>
+          <a:xfrm>
+            <a:off x="4416552" y="3337560"/>
+            <a:ext cx="3227832" cy="640080"/>
+          </a:xfrm>
+          <a:prstGeom prst="rect">
+            <a:avLst/>
+          </a:prstGeom>
+          <a:noFill/>
+          <a:ln/>
+        </p:spPr>
+        <p:txBody>
+          <a:bodyPr wrap="square" rtlCol="0" anchor="ctr"/>
+          <a:lstStyle/>
+          <a:p>
+            <a:pPr indent="0" marL="0">
+              <a:buNone/>
+            </a:pPr>
+            <a:r>
+              <a:rPr lang="en-US" sz="1250" dirty="0">
+                <a:solidFill>
+                  <a:srgbClr val="1F1F1F"/>
+                </a:solidFill>
+                <a:latin typeface="Calibri" pitchFamily="34" charset="0"/>
+                <a:ea typeface="Calibri" pitchFamily="34" charset="-122"/>
+                <a:cs typeface="Calibri" pitchFamily="34" charset="-120"/>
+              </a:rPr>
+              <a:t>• CV: 0.2058</a:t>
+            </a:r>
+            <a:endParaRPr lang="en-US" sz="1250" dirty="0"/>
+          </a:p>
+        </p:txBody>
+      </p:sp>
+      <p:sp>
+        <p:nvSpPr>
+          <p:cNvPr id="15" name="Text 13"/>
+          <p:cNvSpPr txBox="1"/>
+          <p:nvPr/>
+        </p:nvSpPr>
+        <p:spPr>
+          <a:xfrm>
+            <a:off x="4416552" y="4023360"/>
+            <a:ext cx="3227832" cy="640080"/>
+          </a:xfrm>
+          <a:prstGeom prst="rect">
+            <a:avLst/>
+          </a:prstGeom>
+          <a:noFill/>
+          <a:ln/>
+        </p:spPr>
+        <p:txBody>
+          <a:bodyPr wrap="square" rtlCol="0" anchor="ctr"/>
+          <a:lstStyle/>
+          <a:p>
+            <a:pPr indent="0" marL="0">
+              <a:buNone/>
+            </a:pPr>
+            <a:r>
+              <a:rPr lang="en-US" sz="1250" dirty="0">
+                <a:solidFill>
+                  <a:srgbClr val="1F1F1F"/>
+                </a:solidFill>
+                <a:latin typeface="Calibri" pitchFamily="34" charset="0"/>
+                <a:ea typeface="Calibri" pitchFamily="34" charset="-122"/>
+                <a:cs typeface="Calibri" pitchFamily="34" charset="-120"/>
+              </a:rPr>
+              <a:t>• Weakest average score of the three</a:t>
+            </a:r>
+            <a:endParaRPr lang="en-US" sz="1250" dirty="0"/>
+          </a:p>
+        </p:txBody>
+      </p:sp>
+      <p:sp>
+        <p:nvSpPr>
+          <p:cNvPr id="16" name="Text 14"/>
+          <p:cNvSpPr txBox="1"/>
+          <p:nvPr/>
+        </p:nvSpPr>
+        <p:spPr>
+          <a:xfrm>
+            <a:off x="4416552" y="4709160"/>
+            <a:ext cx="3227832" cy="640080"/>
+          </a:xfrm>
+          <a:prstGeom prst="rect">
+            <a:avLst/>
+          </a:prstGeom>
+          <a:noFill/>
+          <a:ln/>
+        </p:spPr>
+        <p:txBody>
+          <a:bodyPr wrap="square" rtlCol="0" anchor="ctr"/>
+          <a:lstStyle/>
+          <a:p>
+            <a:pPr indent="0" marL="0">
+              <a:buNone/>
+            </a:pPr>
+            <a:r>
+              <a:rPr lang="en-US" sz="1250" dirty="0">
+                <a:solidFill>
+                  <a:srgbClr val="1F1F1F"/>
+                </a:solidFill>
+                <a:latin typeface="Calibri" pitchFamily="34" charset="0"/>
+                <a:ea typeface="Calibri" pitchFamily="34" charset="-122"/>
+                <a:cs typeface="Calibri" pitchFamily="34" charset="-120"/>
+              </a:rPr>
+              <a:t>• H3: significantly weaker than Groq (p=0.01)</a:t>
+            </a:r>
+            <a:endParaRPr lang="en-US" sz="1250" dirty="0"/>
+          </a:p>
+        </p:txBody>
+      </p:sp>
+      <p:sp>
+        <p:nvSpPr>
+          <p:cNvPr id="17" name="Shape 15"/>
+          <p:cNvSpPr/>
+          <p:nvPr/>
+        </p:nvSpPr>
+        <p:spPr>
+          <a:xfrm>
+            <a:off x="7918704" y="1371600"/>
+            <a:ext cx="3593592" cy="4572000"/>
+          </a:xfrm>
+          <a:prstGeom prst="rect">
+            <a:avLst/>
+          </a:prstGeom>
+          <a:solidFill>
+            <a:srgbClr val="EAF3DE"/>
+          </a:solidFill>
+          <a:ln w="19050">
+            <a:solidFill>
+              <a:srgbClr val="3B6D11"/>
+            </a:solidFill>
+            <a:prstDash val="solid"/>
+          </a:ln>
+        </p:spPr>
+      </p:sp>
+      <p:sp>
+        <p:nvSpPr>
+          <p:cNvPr id="18" name="Text 16"/>
+          <p:cNvSpPr txBox="1"/>
+          <p:nvPr/>
+        </p:nvSpPr>
+        <p:spPr>
+          <a:xfrm>
+            <a:off x="8101584" y="1554480"/>
+            <a:ext cx="3227832" cy="548640"/>
+          </a:xfrm>
+          <a:prstGeom prst="rect">
+            <a:avLst/>
+          </a:prstGeom>
+          <a:noFill/>
+          <a:ln/>
+        </p:spPr>
+        <p:txBody>
+          <a:bodyPr wrap="square" rtlCol="0" anchor="ctr"/>
+          <a:lstStyle/>
+          <a:p>
+            <a:pPr indent="0" marL="0">
+              <a:buNone/>
+            </a:pPr>
+            <a:r>
+              <a:rPr lang="en-US" sz="2200" b="1" dirty="0">
+                <a:solidFill>
+                  <a:srgbClr val="3B6D11"/>
+                </a:solidFill>
+                <a:latin typeface="Cambria" pitchFamily="34" charset="0"/>
+                <a:ea typeface="Cambria" pitchFamily="34" charset="-122"/>
+                <a:cs typeface="Cambria" pitchFamily="34" charset="-120"/>
+              </a:rPr>
+              <a:t>Groq</a:t>
+            </a:r>
+            <a:endParaRPr lang="en-US" sz="2200" dirty="0"/>
+          </a:p>
+        </p:txBody>
+      </p:sp>
+      <p:sp>
+        <p:nvSpPr>
+          <p:cNvPr id="19" name="Text 17"/>
+          <p:cNvSpPr txBox="1"/>
+          <p:nvPr/>
+        </p:nvSpPr>
+        <p:spPr>
+          <a:xfrm>
+            <a:off x="8101584" y="2103120"/>
+            <a:ext cx="3227832" cy="365760"/>
+          </a:xfrm>
+          <a:prstGeom prst="rect">
+            <a:avLst/>
+          </a:prstGeom>
+          <a:noFill/>
+          <a:ln/>
+        </p:spPr>
+        <p:txBody>
+          <a:bodyPr wrap="square" rtlCol="0" anchor="ctr"/>
+          <a:lstStyle/>
+          <a:p>
+            <a:pPr indent="0" marL="0">
+              <a:buNone/>
+            </a:pPr>
+            <a:r>
+              <a:rPr lang="en-US" sz="1100" i="1" dirty="0">
+                <a:solidFill>
+                  <a:srgbClr val="5F5E5A"/>
+                </a:solidFill>
+                <a:latin typeface="Calibri" pitchFamily="34" charset="0"/>
+                <a:ea typeface="Calibri" pitchFamily="34" charset="-122"/>
+                <a:cs typeface="Calibri" pitchFamily="34" charset="-120"/>
+              </a:rPr>
+              <a:t>openai/gpt-oss-120b (hosted)</a:t>
+            </a:r>
+            <a:endParaRPr lang="en-US" sz="1100" dirty="0"/>
+          </a:p>
+        </p:txBody>
+      </p:sp>
+      <p:sp>
+        <p:nvSpPr>
+          <p:cNvPr id="20" name="Text 18"/>
+          <p:cNvSpPr txBox="1"/>
+          <p:nvPr/>
+        </p:nvSpPr>
+        <p:spPr>
+          <a:xfrm>
+            <a:off x="8101584" y="2651760"/>
+            <a:ext cx="3227832" cy="640080"/>
+          </a:xfrm>
+          <a:prstGeom prst="rect">
+            <a:avLst/>
+          </a:prstGeom>
+          <a:noFill/>
+          <a:ln/>
+        </p:spPr>
+        <p:txBody>
+          <a:bodyPr wrap="square" rtlCol="0" anchor="ctr"/>
+          <a:lstStyle/>
+          <a:p>
+            <a:pPr indent="0" marL="0">
+              <a:buNone/>
+            </a:pPr>
+            <a:r>
+              <a:rPr lang="en-US" sz="1250" dirty="0">
+                <a:solidFill>
+                  <a:srgbClr val="1F1F1F"/>
+                </a:solidFill>
+                <a:latin typeface="Calibri" pitchFamily="34" charset="0"/>
+                <a:ea typeface="Calibri" pitchFamily="34" charset="-122"/>
+                <a:cs typeface="Calibri" pitchFamily="34" charset="-120"/>
+              </a:rPr>
+              <a:t>• Mean: 11.16 (highest)</a:t>
+            </a:r>
+            <a:endParaRPr lang="en-US" sz="1250" dirty="0"/>
+          </a:p>
+        </p:txBody>
+      </p:sp>
+      <p:sp>
+        <p:nvSpPr>
+          <p:cNvPr id="21" name="Text 19"/>
+          <p:cNvSpPr txBox="1"/>
+          <p:nvPr/>
+        </p:nvSpPr>
+        <p:spPr>
+          <a:xfrm>
+            <a:off x="8101584" y="3337560"/>
+            <a:ext cx="3227832" cy="640080"/>
+          </a:xfrm>
+          <a:prstGeom prst="rect">
+            <a:avLst/>
+          </a:prstGeom>
+          <a:noFill/>
+          <a:ln/>
+        </p:spPr>
+        <p:txBody>
+          <a:bodyPr wrap="square" rtlCol="0" anchor="ctr"/>
+          <a:lstStyle/>
+          <a:p>
+            <a:pPr indent="0" marL="0">
+              <a:buNone/>
+            </a:pPr>
+            <a:r>
+              <a:rPr lang="en-US" sz="1250" dirty="0">
+                <a:solidFill>
+                  <a:srgbClr val="1F1F1F"/>
+                </a:solidFill>
+                <a:latin typeface="Calibri" pitchFamily="34" charset="0"/>
+                <a:ea typeface="Calibri" pitchFamily="34" charset="-122"/>
+                <a:cs typeface="Calibri" pitchFamily="34" charset="-120"/>
+              </a:rPr>
+              <a:t>• CV: 0.1606 (most consistent)</a:t>
+            </a:r>
+            <a:endParaRPr lang="en-US" sz="1250" dirty="0"/>
+          </a:p>
+        </p:txBody>
+      </p:sp>
+      <p:sp>
+        <p:nvSpPr>
+          <p:cNvPr id="22" name="Text 20"/>
+          <p:cNvSpPr txBox="1"/>
+          <p:nvPr/>
+        </p:nvSpPr>
+        <p:spPr>
+          <a:xfrm>
+            <a:off x="8101584" y="4023360"/>
+            <a:ext cx="3227832" cy="640080"/>
+          </a:xfrm>
+          <a:prstGeom prst="rect">
+            <a:avLst/>
+          </a:prstGeom>
+          <a:noFill/>
+          <a:ln/>
+        </p:spPr>
+        <p:txBody>
+          <a:bodyPr wrap="square" rtlCol="0" anchor="ctr"/>
+          <a:lstStyle/>
+          <a:p>
+            <a:pPr indent="0" marL="0">
+              <a:buNone/>
+            </a:pPr>
+            <a:r>
+              <a:rPr lang="en-US" sz="1250" dirty="0">
+                <a:solidFill>
+                  <a:srgbClr val="1F1F1F"/>
+                </a:solidFill>
+                <a:latin typeface="Calibri" pitchFamily="34" charset="0"/>
+                <a:ea typeface="Calibri" pitchFamily="34" charset="-122"/>
+                <a:cs typeface="Calibri" pitchFamily="34" charset="-120"/>
+              </a:rPr>
+              <a:t>• Best combination of accuracy + consistency</a:t>
+            </a:r>
+            <a:endParaRPr lang="en-US" sz="1250" dirty="0"/>
+          </a:p>
+        </p:txBody>
+      </p:sp>
+      <p:sp>
+        <p:nvSpPr>
+          <p:cNvPr id="23" name="Text 21"/>
+          <p:cNvSpPr txBox="1"/>
+          <p:nvPr/>
+        </p:nvSpPr>
+        <p:spPr>
+          <a:xfrm>
+            <a:off x="8101584" y="4709160"/>
+            <a:ext cx="3227832" cy="640080"/>
+          </a:xfrm>
+          <a:prstGeom prst="rect">
+            <a:avLst/>
+          </a:prstGeom>
+          <a:noFill/>
+          <a:ln/>
+        </p:spPr>
+        <p:txBody>
+          <a:bodyPr wrap="square" rtlCol="0" anchor="ctr"/>
+          <a:lstStyle/>
+          <a:p>
+            <a:pPr indent="0" marL="0">
+              <a:buNone/>
+            </a:pPr>
+            <a:r>
+              <a:rPr lang="en-US" sz="1250" dirty="0">
+                <a:solidFill>
+                  <a:srgbClr val="1F1F1F"/>
+                </a:solidFill>
+                <a:latin typeface="Calibri" pitchFamily="34" charset="0"/>
+                <a:ea typeface="Calibri" pitchFamily="34" charset="-122"/>
+                <a:cs typeface="Calibri" pitchFamily="34" charset="-120"/>
+              </a:rPr>
+              <a:t>• H3: only provider with a confirmed advantage</a:t>
+            </a:r>
+            <a:endParaRPr lang="en-US" sz="1250" dirty="0"/>
+          </a:p>
+        </p:txBody>
+      </p:sp>
+    </p:spTree>
+  </p:cSld>
+  <p:clrMapOvr>
+    <a:masterClrMapping/>
+  </p:clrMapOvr>
+</p:sld>
+</file>
+
+<file path=ppt/slides/slide16.xml><?xml version="1.0" encoding="utf-8"?>
+<p:sld xmlns:a="http://schemas.openxmlformats.org/drawingml/2006/main" xmlns:r="http://schemas.openxmlformats.org/officeDocument/2006/relationships" xmlns:p="http://schemas.openxmlformats.org/presentationml/2006/main">
+  <p:cSld name="Slide 16">
+    <p:bg>
+      <p:bgPr>
+        <a:solidFill>
+          <a:srgbClr val="1E2761"/>
+        </a:solidFill>
+      </p:bgPr>
+    </p:bg>
+    <p:spTree>
+      <p:nvGrpSpPr>
+        <p:cNvPr id="1" name=""/>
+        <p:cNvGrpSpPr/>
+        <p:nvPr/>
+      </p:nvGrpSpPr>
+      <p:grpSpPr>
+        <a:xfrm>
+          <a:off x="0" y="0"/>
+          <a:ext cx="0" cy="0"/>
+          <a:chOff x="0" y="0"/>
+          <a:chExt cx="0" cy="0"/>
+        </a:xfrm>
+      </p:grpSpPr>
+      <p:sp>
+        <p:nvSpPr>
+          <p:cNvPr id="2" name="Text 0"/>
+          <p:cNvSpPr txBox="1"/>
+          <p:nvPr/>
+        </p:nvSpPr>
+        <p:spPr>
+          <a:xfrm>
+            <a:off x="548640" y="457200"/>
+            <a:ext cx="10515600" cy="640080"/>
+          </a:xfrm>
+          <a:prstGeom prst="rect">
+            <a:avLst/>
+          </a:prstGeom>
+          <a:noFill/>
+          <a:ln/>
+        </p:spPr>
+        <p:txBody>
+          <a:bodyPr wrap="square" rtlCol="0" anchor="ctr"/>
+          <a:lstStyle/>
+          <a:p>
+            <a:pPr indent="0" marL="0">
+              <a:buNone/>
+            </a:pPr>
+            <a:r>
+              <a:rPr lang="en-US" sz="2800" dirty="0">
+                <a:solidFill>
+                  <a:srgbClr val="CADCFC"/>
+                </a:solidFill>
+                <a:latin typeface="Cambria" pitchFamily="34" charset="0"/>
+                <a:ea typeface="Cambria" pitchFamily="34" charset="-122"/>
+                <a:cs typeface="Cambria" pitchFamily="34" charset="-120"/>
+              </a:rPr>
+              <a:t>The Headline Finding</a:t>
+            </a:r>
+            <a:endParaRPr lang="en-US" sz="2800" dirty="0"/>
+          </a:p>
+        </p:txBody>
+      </p:sp>
+      <p:sp>
+        <p:nvSpPr>
+          <p:cNvPr id="3" name="Text 1"/>
+          <p:cNvSpPr txBox="1"/>
+          <p:nvPr/>
+        </p:nvSpPr>
+        <p:spPr>
+          <a:xfrm>
+            <a:off x="548640" y="1188720"/>
+            <a:ext cx="10515600" cy="1188720"/>
+          </a:xfrm>
+          <a:prstGeom prst="rect">
+            <a:avLst/>
+          </a:prstGeom>
+          <a:noFill/>
+          <a:ln/>
+        </p:spPr>
+        <p:txBody>
+          <a:bodyPr wrap="square" rtlCol="0" anchor="ctr"/>
+          <a:lstStyle/>
+          <a:p>
+            <a:pPr indent="0" marL="0">
+              <a:buNone/>
+            </a:pPr>
+            <a:r>
+              <a:rPr lang="en-US" sz="3600" b="1" dirty="0">
+                <a:solidFill>
+                  <a:srgbClr val="FFFFFF"/>
+                </a:solidFill>
+                <a:latin typeface="Cambria" pitchFamily="34" charset="0"/>
+                <a:ea typeface="Cambria" pitchFamily="34" charset="-122"/>
+                <a:cs typeface="Cambria" pitchFamily="34" charset="-120"/>
+              </a:rPr>
+              <a:t>Groq significantly outperforms Mistral</a:t>
+            </a:r>
+            <a:endParaRPr lang="en-US" sz="3600" dirty="0"/>
+          </a:p>
+          <a:p>
+            <a:pPr indent="0" marL="0">
+              <a:buNone/>
+            </a:pPr>
+            <a:r>
+              <a:rPr lang="en-US" sz="3600" b="1" dirty="0">
+                <a:solidFill>
+                  <a:srgbClr val="FFFFFF"/>
+                </a:solidFill>
+                <a:latin typeface="Cambria" pitchFamily="34" charset="0"/>
+                <a:ea typeface="Cambria" pitchFamily="34" charset="-122"/>
+                <a:cs typeface="Cambria" pitchFamily="34" charset="-120"/>
+              </a:rPr>
+              <a:t>on hallucination resistance</a:t>
+            </a:r>
+            <a:endParaRPr lang="en-US" sz="3600" dirty="0"/>
+          </a:p>
+        </p:txBody>
+      </p:sp>
+      <p:sp>
+        <p:nvSpPr>
+          <p:cNvPr id="4" name="Text 2"/>
+          <p:cNvSpPr txBox="1"/>
+          <p:nvPr/>
+        </p:nvSpPr>
+        <p:spPr>
+          <a:xfrm>
+            <a:off x="548640" y="2743200"/>
+            <a:ext cx="3566160" cy="914400"/>
+          </a:xfrm>
+          <a:prstGeom prst="rect">
+            <a:avLst/>
+          </a:prstGeom>
+          <a:noFill/>
+          <a:ln/>
+        </p:spPr>
+        <p:txBody>
+          <a:bodyPr wrap="square" lIns="0" tIns="0" rIns="0" bIns="0" rtlCol="0" anchor="ctr"/>
+          <a:lstStyle/>
+          <a:p>
+            <a:pPr algn="ctr" indent="0" marL="0">
+              <a:buNone/>
+            </a:pPr>
+            <a:r>
+              <a:rPr lang="en-US" sz="4000" b="1" dirty="0">
+                <a:solidFill>
+                  <a:srgbClr val="CADCFC"/>
+                </a:solidFill>
+                <a:latin typeface="Cambria" pitchFamily="34" charset="0"/>
+                <a:ea typeface="Cambria" pitchFamily="34" charset="-122"/>
+                <a:cs typeface="Cambria" pitchFamily="34" charset="-120"/>
+              </a:rPr>
+              <a:t>p = 0.01</a:t>
+            </a:r>
+            <a:endParaRPr lang="en-US" sz="4000" dirty="0"/>
+          </a:p>
+        </p:txBody>
+      </p:sp>
+      <p:sp>
+        <p:nvSpPr>
+          <p:cNvPr id="5" name="Text 3"/>
+          <p:cNvSpPr txBox="1"/>
+          <p:nvPr/>
+        </p:nvSpPr>
+        <p:spPr>
+          <a:xfrm>
+            <a:off x="548640" y="3657600"/>
+            <a:ext cx="3566160" cy="548640"/>
+          </a:xfrm>
+          <a:prstGeom prst="rect">
+            <a:avLst/>
+          </a:prstGeom>
+          <a:noFill/>
+          <a:ln/>
+        </p:spPr>
+        <p:txBody>
+          <a:bodyPr wrap="square" rtlCol="0" anchor="ctr"/>
+          <a:lstStyle/>
+          <a:p>
+            <a:pPr algn="ctr" indent="0" marL="0">
+              <a:buNone/>
+            </a:pPr>
+            <a:r>
+              <a:rPr lang="en-US" sz="1300" dirty="0">
+                <a:solidFill>
+                  <a:srgbClr val="FFFFFF"/>
+                </a:solidFill>
+                <a:latin typeface="Calibri" pitchFamily="34" charset="0"/>
+                <a:ea typeface="Calibri" pitchFamily="34" charset="-122"/>
+                <a:cs typeface="Calibri" pitchFamily="34" charset="-120"/>
+              </a:rPr>
+              <a:t>Statistically significant</a:t>
+            </a:r>
+            <a:endParaRPr lang="en-US" sz="1300" dirty="0"/>
+          </a:p>
+        </p:txBody>
+      </p:sp>
+      <p:sp>
+        <p:nvSpPr>
+          <p:cNvPr id="6" name="Text 4"/>
+          <p:cNvSpPr txBox="1"/>
+          <p:nvPr/>
+        </p:nvSpPr>
+        <p:spPr>
+          <a:xfrm>
+            <a:off x="4251960" y="2743200"/>
+            <a:ext cx="3566160" cy="914400"/>
+          </a:xfrm>
+          <a:prstGeom prst="rect">
+            <a:avLst/>
+          </a:prstGeom>
+          <a:noFill/>
+          <a:ln/>
+        </p:spPr>
+        <p:txBody>
+          <a:bodyPr wrap="square" lIns="0" tIns="0" rIns="0" bIns="0" rtlCol="0" anchor="ctr"/>
+          <a:lstStyle/>
+          <a:p>
+            <a:pPr algn="ctr" indent="0" marL="0">
+              <a:buNone/>
+            </a:pPr>
+            <a:r>
+              <a:rPr lang="en-US" sz="4000" b="1" dirty="0">
+                <a:solidFill>
+                  <a:srgbClr val="CADCFC"/>
+                </a:solidFill>
+                <a:latin typeface="Cambria" pitchFamily="34" charset="0"/>
+                <a:ea typeface="Cambria" pitchFamily="34" charset="-122"/>
+                <a:cs typeface="Cambria" pitchFamily="34" charset="-120"/>
+              </a:rPr>
+              <a:t>d = 0.84</a:t>
+            </a:r>
+            <a:endParaRPr lang="en-US" sz="4000" dirty="0"/>
+          </a:p>
+        </p:txBody>
+      </p:sp>
+      <p:sp>
+        <p:nvSpPr>
+          <p:cNvPr id="7" name="Text 5"/>
+          <p:cNvSpPr txBox="1"/>
+          <p:nvPr/>
+        </p:nvSpPr>
+        <p:spPr>
+          <a:xfrm>
+            <a:off x="4251960" y="3657600"/>
+            <a:ext cx="3566160" cy="548640"/>
+          </a:xfrm>
+          <a:prstGeom prst="rect">
+            <a:avLst/>
+          </a:prstGeom>
+          <a:noFill/>
+          <a:ln/>
+        </p:spPr>
+        <p:txBody>
+          <a:bodyPr wrap="square" rtlCol="0" anchor="ctr"/>
+          <a:lstStyle/>
+          <a:p>
+            <a:pPr algn="ctr" indent="0" marL="0">
+              <a:buNone/>
+            </a:pPr>
+            <a:r>
+              <a:rPr lang="en-US" sz="1300" dirty="0">
+                <a:solidFill>
+                  <a:srgbClr val="FFFFFF"/>
+                </a:solidFill>
+                <a:latin typeface="Calibri" pitchFamily="34" charset="0"/>
+                <a:ea typeface="Calibri" pitchFamily="34" charset="-122"/>
+                <a:cs typeface="Calibri" pitchFamily="34" charset="-120"/>
+              </a:rPr>
+              <a:t>Large effect size</a:t>
+            </a:r>
+            <a:endParaRPr lang="en-US" sz="1300" dirty="0"/>
+          </a:p>
+        </p:txBody>
+      </p:sp>
+      <p:sp>
+        <p:nvSpPr>
+          <p:cNvPr id="8" name="Text 6"/>
+          <p:cNvSpPr txBox="1"/>
+          <p:nvPr/>
+        </p:nvSpPr>
+        <p:spPr>
+          <a:xfrm>
+            <a:off x="7955280" y="2743200"/>
+            <a:ext cx="3566160" cy="914400"/>
+          </a:xfrm>
+          <a:prstGeom prst="rect">
+            <a:avLst/>
+          </a:prstGeom>
+          <a:noFill/>
+          <a:ln/>
+        </p:spPr>
+        <p:txBody>
+          <a:bodyPr wrap="square" lIns="0" tIns="0" rIns="0" bIns="0" rtlCol="0" anchor="ctr"/>
+          <a:lstStyle/>
+          <a:p>
+            <a:pPr algn="ctr" indent="0" marL="0">
+              <a:buNone/>
+            </a:pPr>
+            <a:r>
+              <a:rPr lang="en-US" sz="4000" b="1" dirty="0">
+                <a:solidFill>
+                  <a:srgbClr val="CADCFC"/>
+                </a:solidFill>
+                <a:latin typeface="Cambria" pitchFamily="34" charset="0"/>
+                <a:ea typeface="Cambria" pitchFamily="34" charset="-122"/>
+                <a:cs typeface="Cambria" pitchFamily="34" charset="-120"/>
+              </a:rPr>
+              <a:t>1 of 3</a:t>
+            </a:r>
+            <a:endParaRPr lang="en-US" sz="4000" dirty="0"/>
+          </a:p>
+        </p:txBody>
+      </p:sp>
+      <p:sp>
+        <p:nvSpPr>
+          <p:cNvPr id="9" name="Text 7"/>
+          <p:cNvSpPr txBox="1"/>
+          <p:nvPr/>
+        </p:nvSpPr>
+        <p:spPr>
+          <a:xfrm>
+            <a:off x="7955280" y="3657600"/>
+            <a:ext cx="3566160" cy="548640"/>
+          </a:xfrm>
+          <a:prstGeom prst="rect">
+            <a:avLst/>
+          </a:prstGeom>
+          <a:noFill/>
+          <a:ln/>
+        </p:spPr>
+        <p:txBody>
+          <a:bodyPr wrap="square" rtlCol="0" anchor="ctr"/>
+          <a:lstStyle/>
+          <a:p>
+            <a:pPr algn="ctr" indent="0" marL="0">
+              <a:buNone/>
+            </a:pPr>
+            <a:r>
+              <a:rPr lang="en-US" sz="1300" dirty="0">
+                <a:solidFill>
+                  <a:srgbClr val="FFFFFF"/>
+                </a:solidFill>
+                <a:latin typeface="Calibri" pitchFamily="34" charset="0"/>
+                <a:ea typeface="Calibri" pitchFamily="34" charset="-122"/>
+                <a:cs typeface="Calibri" pitchFamily="34" charset="-120"/>
+              </a:rPr>
+              <a:t>pairwise comparisons confirmed</a:t>
+            </a:r>
+            <a:endParaRPr lang="en-US" sz="1300" dirty="0"/>
+          </a:p>
+        </p:txBody>
+      </p:sp>
+      <p:sp>
+        <p:nvSpPr>
+          <p:cNvPr id="10" name="Text 8"/>
+          <p:cNvSpPr txBox="1"/>
+          <p:nvPr/>
+        </p:nvSpPr>
+        <p:spPr>
+          <a:xfrm>
+            <a:off x="548640" y="4663440"/>
+            <a:ext cx="10515600" cy="1463040"/>
+          </a:xfrm>
+          <a:prstGeom prst="rect">
+            <a:avLst/>
+          </a:prstGeom>
+          <a:noFill/>
+          <a:ln/>
+        </p:spPr>
+        <p:txBody>
+          <a:bodyPr wrap="square" rtlCol="0" anchor="ctr"/>
+          <a:lstStyle/>
+          <a:p>
+            <a:pPr indent="0" marL="0">
+              <a:buNone/>
+            </a:pPr>
+            <a:r>
+              <a:rPr lang="en-US" sz="1500" i="1" dirty="0">
+                <a:solidFill>
+                  <a:srgbClr val="CADCFC"/>
+                </a:solidFill>
+                <a:latin typeface="Calibri" pitchFamily="34" charset="0"/>
+                <a:ea typeface="Calibri" pitchFamily="34" charset="-122"/>
+                <a:cs typeface="Calibri" pitchFamily="34" charset="-120"/>
+              </a:rPr>
+              <a:t>Why it matters: hallucination resistance is the capability dimension with the greatest practical consequence — a confidently fabricated answer carries real cost in higher-stakes applications. Gemini sits between both providers on this dimension, not significantly different from either.</a:t>
+            </a:r>
+            <a:endParaRPr lang="en-US" sz="1500" dirty="0"/>
+          </a:p>
+        </p:txBody>
+      </p:sp>
+    </p:spTree>
+  </p:cSld>
+  <p:clrMapOvr>
+    <a:masterClrMapping/>
+  </p:clrMapOvr>
+</p:sld>
+</file>
+
+<file path=ppt/slides/slide17.xml><?xml version="1.0" encoding="utf-8"?>
+<p:sld xmlns:a="http://schemas.openxmlformats.org/drawingml/2006/main" xmlns:r="http://schemas.openxmlformats.org/officeDocument/2006/relationships" xmlns:p="http://schemas.openxmlformats.org/presentationml/2006/main">
+  <p:cSld name="Slide 17">
+    <p:bg>
+      <p:bgPr>
+        <a:solidFill>
+          <a:srgbClr val="FFFFFF"/>
+        </a:solidFill>
+      </p:bgPr>
+    </p:bg>
+    <p:spTree>
+      <p:nvGrpSpPr>
+        <p:cNvPr id="1" name=""/>
+        <p:cNvGrpSpPr/>
+        <p:nvPr/>
+      </p:nvGrpSpPr>
+      <p:grpSpPr>
+        <a:xfrm>
+          <a:off x="0" y="0"/>
+          <a:ext cx="0" cy="0"/>
+          <a:chOff x="0" y="0"/>
+          <a:chExt cx="0" cy="0"/>
+        </a:xfrm>
+      </p:grpSpPr>
+      <p:sp>
+        <p:nvSpPr>
+          <p:cNvPr id="2" name="Text 0"/>
+          <p:cNvSpPr txBox="1"/>
+          <p:nvPr/>
+        </p:nvSpPr>
+        <p:spPr>
+          <a:xfrm>
+            <a:off x="548640" y="365760"/>
+            <a:ext cx="10515600" cy="640080"/>
+          </a:xfrm>
+          <a:prstGeom prst="rect">
+            <a:avLst/>
+          </a:prstGeom>
+          <a:noFill/>
+          <a:ln/>
+        </p:spPr>
+        <p:txBody>
+          <a:bodyPr wrap="square" rtlCol="0" anchor="ctr"/>
+          <a:lstStyle/>
+          <a:p>
+            <a:pPr indent="0" marL="0">
+              <a:buNone/>
+            </a:pPr>
+            <a:r>
+              <a:rPr lang="en-US" sz="3000" b="1" dirty="0">
+                <a:solidFill>
+                  <a:srgbClr val="1E2761"/>
+                </a:solidFill>
+                <a:latin typeface="Cambria" pitchFamily="34" charset="0"/>
+                <a:ea typeface="Cambria" pitchFamily="34" charset="-122"/>
+                <a:cs typeface="Cambria" pitchFamily="34" charset="-120"/>
+              </a:rPr>
+              <a:t>Limitations — Stated Plainly</a:t>
+            </a:r>
+            <a:endParaRPr lang="en-US" sz="3000" dirty="0"/>
+          </a:p>
+        </p:txBody>
+      </p:sp>
+      <p:sp>
+        <p:nvSpPr>
+          <p:cNvPr id="3" name="Shape 1"/>
+          <p:cNvSpPr/>
+          <p:nvPr/>
+        </p:nvSpPr>
+        <p:spPr>
+          <a:xfrm>
+            <a:off x="548640" y="1463040"/>
+            <a:ext cx="2551176" cy="4206240"/>
+          </a:xfrm>
+          <a:prstGeom prst="rect">
+            <a:avLst/>
+          </a:prstGeom>
+          <a:solidFill>
+            <a:srgbClr val="CADCFC"/>
+          </a:solidFill>
+          <a:ln/>
+        </p:spPr>
+      </p:sp>
+      <p:sp>
+        <p:nvSpPr>
+          <p:cNvPr id="4" name="Text 2"/>
+          <p:cNvSpPr txBox="1"/>
+          <p:nvPr/>
+        </p:nvSpPr>
+        <p:spPr>
+          <a:xfrm>
+            <a:off x="685800" y="1645920"/>
+            <a:ext cx="2231136" cy="548640"/>
+          </a:xfrm>
+          <a:prstGeom prst="rect">
+            <a:avLst/>
+          </a:prstGeom>
+          <a:noFill/>
+          <a:ln/>
+        </p:spPr>
+        <p:txBody>
+          <a:bodyPr wrap="square" rtlCol="0" anchor="ctr"/>
+          <a:lstStyle/>
+          <a:p>
+            <a:pPr indent="0" marL="0">
+              <a:buNone/>
+            </a:pPr>
+            <a:r>
+              <a:rPr lang="en-US" sz="1600" b="1" dirty="0">
+                <a:solidFill>
+                  <a:srgbClr val="1E2761"/>
+                </a:solidFill>
+                <a:latin typeface="Calibri" pitchFamily="34" charset="0"/>
+                <a:ea typeface="Calibri" pitchFamily="34" charset="-122"/>
+                <a:cs typeface="Calibri" pitchFamily="34" charset="-120"/>
+              </a:rPr>
+              <a:t>Construct</a:t>
+            </a:r>
+            <a:endParaRPr lang="en-US" sz="1600" dirty="0"/>
+          </a:p>
+        </p:txBody>
+      </p:sp>
+      <p:sp>
+        <p:nvSpPr>
+          <p:cNvPr id="5" name="Text 3"/>
+          <p:cNvSpPr txBox="1"/>
+          <p:nvPr/>
+        </p:nvSpPr>
+        <p:spPr>
+          <a:xfrm>
+            <a:off x="685800" y="2286000"/>
+            <a:ext cx="2231136" cy="3200400"/>
+          </a:xfrm>
+          <a:prstGeom prst="rect">
+            <a:avLst/>
+          </a:prstGeom>
+          <a:noFill/>
+          <a:ln/>
+        </p:spPr>
+        <p:txBody>
+          <a:bodyPr wrap="square" rtlCol="0" anchor="ctr"/>
+          <a:lstStyle/>
+          <a:p>
+            <a:pPr indent="0" marL="0">
+              <a:buNone/>
+            </a:pPr>
+            <a:r>
+              <a:rPr lang="en-US" sz="1200" dirty="0">
+                <a:solidFill>
+                  <a:srgbClr val="1F1F1F"/>
+                </a:solidFill>
+                <a:latin typeface="Calibri" pitchFamily="34" charset="0"/>
+                <a:ea typeface="Calibri" pitchFamily="34" charset="-122"/>
+                <a:cs typeface="Calibri" pitchFamily="34" charset="-120"/>
+              </a:rPr>
+              <a:t>Modest judge-human agreement (κ = 0.20–0.23) means scores are directionally reliable, not exact</a:t>
+            </a:r>
+            <a:endParaRPr lang="en-US" sz="1200" dirty="0"/>
+          </a:p>
+        </p:txBody>
+      </p:sp>
+      <p:sp>
+        <p:nvSpPr>
+          <p:cNvPr id="6" name="Shape 4"/>
+          <p:cNvSpPr/>
+          <p:nvPr/>
+        </p:nvSpPr>
+        <p:spPr>
+          <a:xfrm>
+            <a:off x="3236976" y="1463040"/>
+            <a:ext cx="2551176" cy="4206240"/>
+          </a:xfrm>
+          <a:prstGeom prst="rect">
+            <a:avLst/>
+          </a:prstGeom>
+          <a:solidFill>
+            <a:srgbClr val="CADCFC"/>
+          </a:solidFill>
+          <a:ln/>
+        </p:spPr>
+      </p:sp>
+      <p:sp>
+        <p:nvSpPr>
+          <p:cNvPr id="7" name="Text 5"/>
+          <p:cNvSpPr txBox="1"/>
+          <p:nvPr/>
+        </p:nvSpPr>
+        <p:spPr>
+          <a:xfrm>
+            <a:off x="3374136" y="1645920"/>
+            <a:ext cx="2231136" cy="548640"/>
+          </a:xfrm>
+          <a:prstGeom prst="rect">
+            <a:avLst/>
+          </a:prstGeom>
+          <a:noFill/>
+          <a:ln/>
+        </p:spPr>
+        <p:txBody>
+          <a:bodyPr wrap="square" rtlCol="0" anchor="ctr"/>
+          <a:lstStyle/>
+          <a:p>
+            <a:pPr indent="0" marL="0">
+              <a:buNone/>
+            </a:pPr>
+            <a:r>
+              <a:rPr lang="en-US" sz="1600" b="1" dirty="0">
+                <a:solidFill>
+                  <a:srgbClr val="1E2761"/>
+                </a:solidFill>
+                <a:latin typeface="Calibri" pitchFamily="34" charset="0"/>
+                <a:ea typeface="Calibri" pitchFamily="34" charset="-122"/>
+                <a:cs typeface="Calibri" pitchFamily="34" charset="-120"/>
+              </a:rPr>
+              <a:t>Internal</a:t>
+            </a:r>
+            <a:endParaRPr lang="en-US" sz="1600" dirty="0"/>
+          </a:p>
+        </p:txBody>
+      </p:sp>
+      <p:sp>
+        <p:nvSpPr>
+          <p:cNvPr id="8" name="Text 6"/>
+          <p:cNvSpPr txBox="1"/>
+          <p:nvPr/>
+        </p:nvSpPr>
+        <p:spPr>
+          <a:xfrm>
+            <a:off x="3374136" y="2286000"/>
+            <a:ext cx="2231136" cy="3200400"/>
+          </a:xfrm>
+          <a:prstGeom prst="rect">
+            <a:avLst/>
+          </a:prstGeom>
+          <a:noFill/>
+          <a:ln/>
+        </p:spPr>
+        <p:txBody>
+          <a:bodyPr wrap="square" rtlCol="0" anchor="ctr"/>
+          <a:lstStyle/>
+          <a:p>
+            <a:pPr indent="0" marL="0">
+              <a:buNone/>
+            </a:pPr>
+            <a:r>
+              <a:rPr lang="en-US" sz="1200" dirty="0">
+                <a:solidFill>
+                  <a:srgbClr val="1F1F1F"/>
+                </a:solidFill>
+                <a:latin typeface="Calibri" pitchFamily="34" charset="0"/>
+                <a:ea typeface="Calibri" pitchFamily="34" charset="-122"/>
+                <a:cs typeface="Calibri" pitchFamily="34" charset="-120"/>
+              </a:rPr>
+              <a:t>Difficulty–score correlation partly reflects a scoring-scale artifact, not pure capability</a:t>
+            </a:r>
+            <a:endParaRPr lang="en-US" sz="1200" dirty="0"/>
+          </a:p>
+        </p:txBody>
+      </p:sp>
+      <p:sp>
+        <p:nvSpPr>
+          <p:cNvPr id="9" name="Shape 7"/>
+          <p:cNvSpPr/>
+          <p:nvPr/>
+        </p:nvSpPr>
+        <p:spPr>
+          <a:xfrm>
+            <a:off x="5925312" y="1463040"/>
+            <a:ext cx="2551176" cy="4206240"/>
+          </a:xfrm>
+          <a:prstGeom prst="rect">
+            <a:avLst/>
+          </a:prstGeom>
+          <a:solidFill>
+            <a:srgbClr val="CADCFC"/>
+          </a:solidFill>
+          <a:ln/>
+        </p:spPr>
+      </p:sp>
+      <p:sp>
+        <p:nvSpPr>
+          <p:cNvPr id="10" name="Text 8"/>
+          <p:cNvSpPr txBox="1"/>
+          <p:nvPr/>
+        </p:nvSpPr>
+        <p:spPr>
+          <a:xfrm>
+            <a:off x="6062472" y="1645920"/>
+            <a:ext cx="2231136" cy="548640"/>
+          </a:xfrm>
+          <a:prstGeom prst="rect">
+            <a:avLst/>
+          </a:prstGeom>
+          <a:noFill/>
+          <a:ln/>
+        </p:spPr>
+        <p:txBody>
+          <a:bodyPr wrap="square" rtlCol="0" anchor="ctr"/>
+          <a:lstStyle/>
+          <a:p>
+            <a:pPr indent="0" marL="0">
+              <a:buNone/>
+            </a:pPr>
+            <a:r>
+              <a:rPr lang="en-US" sz="1600" b="1" dirty="0">
+                <a:solidFill>
+                  <a:srgbClr val="1E2761"/>
+                </a:solidFill>
+                <a:latin typeface="Calibri" pitchFamily="34" charset="0"/>
+                <a:ea typeface="Calibri" pitchFamily="34" charset="-122"/>
+                <a:cs typeface="Calibri" pitchFamily="34" charset="-120"/>
+              </a:rPr>
+              <a:t>External</a:t>
+            </a:r>
+            <a:endParaRPr lang="en-US" sz="1600" dirty="0"/>
+          </a:p>
+        </p:txBody>
+      </p:sp>
+      <p:sp>
+        <p:nvSpPr>
+          <p:cNvPr id="11" name="Text 9"/>
+          <p:cNvSpPr txBox="1"/>
+          <p:nvPr/>
+        </p:nvSpPr>
+        <p:spPr>
+          <a:xfrm>
+            <a:off x="6062472" y="2286000"/>
+            <a:ext cx="2231136" cy="3200400"/>
+          </a:xfrm>
+          <a:prstGeom prst="rect">
+            <a:avLst/>
+          </a:prstGeom>
+          <a:noFill/>
+          <a:ln/>
+        </p:spPr>
+        <p:txBody>
+          <a:bodyPr wrap="square" rtlCol="0" anchor="ctr"/>
+          <a:lstStyle/>
+          <a:p>
+            <a:pPr indent="0" marL="0">
+              <a:buNone/>
+            </a:pPr>
+            <a:r>
+              <a:rPr lang="en-US" sz="1200" dirty="0">
+                <a:solidFill>
+                  <a:srgbClr val="1F1F1F"/>
+                </a:solidFill>
+                <a:latin typeface="Calibri" pitchFamily="34" charset="0"/>
+                <a:ea typeface="Calibri" pitchFamily="34" charset="-122"/>
+                <a:cs typeface="Calibri" pitchFamily="34" charset="-120"/>
+              </a:rPr>
+              <a:t>Findings are scoped to these 3 specific free-tier configurations, at this point in time</a:t>
+            </a:r>
+            <a:endParaRPr lang="en-US" sz="1200" dirty="0"/>
+          </a:p>
+        </p:txBody>
+      </p:sp>
+      <p:sp>
+        <p:nvSpPr>
+          <p:cNvPr id="12" name="Shape 10"/>
+          <p:cNvSpPr/>
+          <p:nvPr/>
+        </p:nvSpPr>
+        <p:spPr>
+          <a:xfrm>
+            <a:off x="8613648" y="1463040"/>
+            <a:ext cx="2551176" cy="4206240"/>
+          </a:xfrm>
+          <a:prstGeom prst="rect">
+            <a:avLst/>
+          </a:prstGeom>
+          <a:solidFill>
+            <a:srgbClr val="CADCFC"/>
+          </a:solidFill>
+          <a:ln/>
+        </p:spPr>
+      </p:sp>
+      <p:sp>
+        <p:nvSpPr>
+          <p:cNvPr id="13" name="Text 11"/>
+          <p:cNvSpPr txBox="1"/>
+          <p:nvPr/>
+        </p:nvSpPr>
+        <p:spPr>
+          <a:xfrm>
+            <a:off x="8750808" y="1645920"/>
+            <a:ext cx="2231136" cy="548640"/>
+          </a:xfrm>
+          <a:prstGeom prst="rect">
+            <a:avLst/>
+          </a:prstGeom>
+          <a:noFill/>
+          <a:ln/>
+        </p:spPr>
+        <p:txBody>
+          <a:bodyPr wrap="square" rtlCol="0" anchor="ctr"/>
+          <a:lstStyle/>
+          <a:p>
+            <a:pPr indent="0" marL="0">
+              <a:buNone/>
+            </a:pPr>
+            <a:r>
+              <a:rPr lang="en-US" sz="1600" b="1" dirty="0">
+                <a:solidFill>
+                  <a:srgbClr val="1E2761"/>
+                </a:solidFill>
+                <a:latin typeface="Calibri" pitchFamily="34" charset="0"/>
+                <a:ea typeface="Calibri" pitchFamily="34" charset="-122"/>
+                <a:cs typeface="Calibri" pitchFamily="34" charset="-120"/>
+              </a:rPr>
+              <a:t>Conclusion</a:t>
+            </a:r>
+            <a:endParaRPr lang="en-US" sz="1600" dirty="0"/>
+          </a:p>
+        </p:txBody>
+      </p:sp>
+      <p:sp>
+        <p:nvSpPr>
+          <p:cNvPr id="14" name="Text 12"/>
+          <p:cNvSpPr txBox="1"/>
+          <p:nvPr/>
+        </p:nvSpPr>
+        <p:spPr>
+          <a:xfrm>
+            <a:off x="8750808" y="2286000"/>
+            <a:ext cx="2231136" cy="3200400"/>
+          </a:xfrm>
+          <a:prstGeom prst="rect">
+            <a:avLst/>
+          </a:prstGeom>
+          <a:noFill/>
+          <a:ln/>
+        </p:spPr>
+        <p:txBody>
+          <a:bodyPr wrap="square" rtlCol="0" anchor="ctr"/>
+          <a:lstStyle/>
+          <a:p>
+            <a:pPr indent="0" marL="0">
+              <a:buNone/>
+            </a:pPr>
+            <a:r>
+              <a:rPr lang="en-US" sz="1200" dirty="0">
+                <a:solidFill>
+                  <a:srgbClr val="1F1F1F"/>
+                </a:solidFill>
+                <a:latin typeface="Calibri" pitchFamily="34" charset="0"/>
+                <a:ea typeface="Calibri" pitchFamily="34" charset="-122"/>
+                <a:cs typeface="Calibri" pitchFamily="34" charset="-120"/>
+              </a:rPr>
+              <a:t>H1/H2 non-significance reflects limited statistical power — not proof of no effect</a:t>
+            </a:r>
+            <a:endParaRPr lang="en-US" sz="1200" dirty="0"/>
+          </a:p>
+        </p:txBody>
+      </p:sp>
+    </p:spTree>
+  </p:cSld>
+  <p:clrMapOvr>
+    <a:masterClrMapping/>
+  </p:clrMapOvr>
+</p:sld>
+</file>
+
+<file path=ppt/slides/slide18.xml><?xml version="1.0" encoding="utf-8"?>
+<p:sld xmlns:a="http://schemas.openxmlformats.org/drawingml/2006/main" xmlns:r="http://schemas.openxmlformats.org/officeDocument/2006/relationships" xmlns:p="http://schemas.openxmlformats.org/presentationml/2006/main">
+  <p:cSld name="Slide 18">
+    <p:bg>
+      <p:bgPr>
+        <a:solidFill>
+          <a:srgbClr val="FFFFFF"/>
+        </a:solidFill>
+      </p:bgPr>
+    </p:bg>
+    <p:spTree>
+      <p:nvGrpSpPr>
+        <p:cNvPr id="1" name=""/>
+        <p:cNvGrpSpPr/>
+        <p:nvPr/>
+      </p:nvGrpSpPr>
+      <p:grpSpPr>
+        <a:xfrm>
+          <a:off x="0" y="0"/>
+          <a:ext cx="0" cy="0"/>
+          <a:chOff x="0" y="0"/>
+          <a:chExt cx="0" cy="0"/>
+        </a:xfrm>
+      </p:grpSpPr>
+      <p:sp>
+        <p:nvSpPr>
+          <p:cNvPr id="2" name="Text 0"/>
+          <p:cNvSpPr txBox="1"/>
+          <p:nvPr/>
+        </p:nvSpPr>
+        <p:spPr>
+          <a:xfrm>
+            <a:off x="548640" y="365760"/>
+            <a:ext cx="10058400" cy="731520"/>
+          </a:xfrm>
+          <a:prstGeom prst="rect">
+            <a:avLst/>
+          </a:prstGeom>
+          <a:noFill/>
+          <a:ln/>
+        </p:spPr>
+        <p:txBody>
+          <a:bodyPr wrap="square" rtlCol="0" anchor="ctr"/>
+          <a:lstStyle/>
+          <a:p>
+            <a:pPr indent="0" marL="0">
+              <a:buNone/>
+            </a:pPr>
+            <a:r>
+              <a:rPr lang="en-US" sz="3200" b="1" dirty="0">
+                <a:solidFill>
+                  <a:srgbClr val="1E2761"/>
+                </a:solidFill>
+                <a:latin typeface="Cambria" pitchFamily="34" charset="0"/>
+                <a:ea typeface="Cambria" pitchFamily="34" charset="-122"/>
+                <a:cs typeface="Cambria" pitchFamily="34" charset="-120"/>
+              </a:rPr>
+              <a:t>Conclusions</a:t>
+            </a:r>
+            <a:endParaRPr lang="en-US" sz="3200" dirty="0"/>
+          </a:p>
+        </p:txBody>
+      </p:sp>
+      <p:sp>
+        <p:nvSpPr>
+          <p:cNvPr id="3" name="Shape 1"/>
+          <p:cNvSpPr/>
+          <p:nvPr/>
+        </p:nvSpPr>
+        <p:spPr>
+          <a:xfrm>
+            <a:off x="548640" y="1417320"/>
+            <a:ext cx="320040" cy="320040"/>
+          </a:xfrm>
+          <a:prstGeom prst="ellipse">
+            <a:avLst/>
+          </a:prstGeom>
+          <a:solidFill>
+            <a:srgbClr val="2E7D32"/>
+          </a:solidFill>
+          <a:ln/>
+        </p:spPr>
+      </p:sp>
+      <p:sp>
+        <p:nvSpPr>
+          <p:cNvPr id="4" name="Text 2"/>
+          <p:cNvSpPr txBox="1"/>
+          <p:nvPr/>
+        </p:nvSpPr>
+        <p:spPr>
+          <a:xfrm>
+            <a:off x="548640" y="1417320"/>
+            <a:ext cx="320040" cy="320040"/>
+          </a:xfrm>
+          <a:prstGeom prst="rect">
+            <a:avLst/>
+          </a:prstGeom>
+          <a:noFill/>
+          <a:ln/>
+        </p:spPr>
+        <p:txBody>
+          <a:bodyPr wrap="square" lIns="0" tIns="0" rIns="0" bIns="0" rtlCol="0" anchor="ctr"/>
+          <a:lstStyle/>
+          <a:p>
+            <a:pPr algn="ctr" indent="0" marL="0">
+              <a:buNone/>
+            </a:pPr>
+            <a:r>
+              <a:rPr lang="en-US" sz="1400" b="1" dirty="0">
+                <a:solidFill>
+                  <a:srgbClr val="FFFFFF"/>
+                </a:solidFill>
+                <a:latin typeface="Calibri" pitchFamily="34" charset="0"/>
+                <a:ea typeface="Calibri" pitchFamily="34" charset="-122"/>
+                <a:cs typeface="Calibri" pitchFamily="34" charset="-120"/>
+              </a:rPr>
+              <a:t>✓</a:t>
+            </a:r>
+            <a:endParaRPr lang="en-US" sz="1400" dirty="0"/>
+          </a:p>
+        </p:txBody>
+      </p:sp>
+      <p:sp>
+        <p:nvSpPr>
+          <p:cNvPr id="5" name="Text 3"/>
+          <p:cNvSpPr txBox="1"/>
+          <p:nvPr/>
+        </p:nvSpPr>
+        <p:spPr>
+          <a:xfrm>
+            <a:off x="1051560" y="1371600"/>
+            <a:ext cx="10058400" cy="640080"/>
+          </a:xfrm>
+          <a:prstGeom prst="rect">
+            <a:avLst/>
+          </a:prstGeom>
+          <a:noFill/>
+          <a:ln/>
+        </p:spPr>
+        <p:txBody>
+          <a:bodyPr wrap="square" rtlCol="0" anchor="ctr"/>
+          <a:lstStyle/>
+          <a:p>
+            <a:pPr indent="0" marL="0">
+              <a:buNone/>
+            </a:pPr>
+            <a:r>
+              <a:rPr lang="en-US" sz="1500" dirty="0">
+                <a:solidFill>
+                  <a:srgbClr val="1F1F1F"/>
+                </a:solidFill>
+                <a:latin typeface="Calibri" pitchFamily="34" charset="0"/>
+                <a:ea typeface="Calibri" pitchFamily="34" charset="-122"/>
+                <a:cs typeface="Calibri" pitchFamily="34" charset="-120"/>
+              </a:rPr>
+              <a:t>Groq's hosted model: highest mean score, lowest variance, only confirmed category win</a:t>
+            </a:r>
+            <a:endParaRPr lang="en-US" sz="1500" dirty="0"/>
+          </a:p>
+        </p:txBody>
+      </p:sp>
+      <p:sp>
+        <p:nvSpPr>
+          <p:cNvPr id="6" name="Shape 4"/>
+          <p:cNvSpPr/>
+          <p:nvPr/>
+        </p:nvSpPr>
+        <p:spPr>
+          <a:xfrm>
+            <a:off x="548640" y="2286000"/>
+            <a:ext cx="320040" cy="320040"/>
+          </a:xfrm>
+          <a:prstGeom prst="ellipse">
+            <a:avLst/>
+          </a:prstGeom>
+          <a:solidFill>
+            <a:srgbClr val="2E7D32"/>
+          </a:solidFill>
+          <a:ln/>
+        </p:spPr>
+      </p:sp>
+      <p:sp>
+        <p:nvSpPr>
+          <p:cNvPr id="7" name="Text 5"/>
+          <p:cNvSpPr txBox="1"/>
+          <p:nvPr/>
+        </p:nvSpPr>
+        <p:spPr>
+          <a:xfrm>
+            <a:off x="548640" y="2286000"/>
+            <a:ext cx="320040" cy="320040"/>
+          </a:xfrm>
+          <a:prstGeom prst="rect">
+            <a:avLst/>
+          </a:prstGeom>
+          <a:noFill/>
+          <a:ln/>
+        </p:spPr>
+        <p:txBody>
+          <a:bodyPr wrap="square" lIns="0" tIns="0" rIns="0" bIns="0" rtlCol="0" anchor="ctr"/>
+          <a:lstStyle/>
+          <a:p>
+            <a:pPr algn="ctr" indent="0" marL="0">
+              <a:buNone/>
+            </a:pPr>
+            <a:r>
+              <a:rPr lang="en-US" sz="1400" b="1" dirty="0">
+                <a:solidFill>
+                  <a:srgbClr val="FFFFFF"/>
+                </a:solidFill>
+                <a:latin typeface="Calibri" pitchFamily="34" charset="0"/>
+                <a:ea typeface="Calibri" pitchFamily="34" charset="-122"/>
+                <a:cs typeface="Calibri" pitchFamily="34" charset="-120"/>
+              </a:rPr>
+              <a:t>✓</a:t>
+            </a:r>
+            <a:endParaRPr lang="en-US" sz="1400" dirty="0"/>
+          </a:p>
+        </p:txBody>
+      </p:sp>
+      <p:sp>
+        <p:nvSpPr>
+          <p:cNvPr id="8" name="Text 6"/>
+          <p:cNvSpPr txBox="1"/>
+          <p:nvPr/>
+        </p:nvSpPr>
+        <p:spPr>
+          <a:xfrm>
+            <a:off x="1051560" y="2240280"/>
+            <a:ext cx="10058400" cy="640080"/>
+          </a:xfrm>
+          <a:prstGeom prst="rect">
+            <a:avLst/>
+          </a:prstGeom>
+          <a:noFill/>
+          <a:ln/>
+        </p:spPr>
+        <p:txBody>
+          <a:bodyPr wrap="square" rtlCol="0" anchor="ctr"/>
+          <a:lstStyle/>
+          <a:p>
+            <a:pPr indent="0" marL="0">
+              <a:buNone/>
+            </a:pPr>
+            <a:r>
+              <a:rPr lang="en-US" sz="1500" dirty="0">
+                <a:solidFill>
+                  <a:srgbClr val="1F1F1F"/>
+                </a:solidFill>
+                <a:latin typeface="Calibri" pitchFamily="34" charset="0"/>
+                <a:ea typeface="Calibri" pitchFamily="34" charset="-122"/>
+                <a:cs typeface="Calibri" pitchFamily="34" charset="-120"/>
+              </a:rPr>
+              <a:t>Gemini and Mistral show no significant differences on H1 or H2, across any provider</a:t>
+            </a:r>
+            <a:endParaRPr lang="en-US" sz="1500" dirty="0"/>
+          </a:p>
+        </p:txBody>
+      </p:sp>
+      <p:sp>
+        <p:nvSpPr>
+          <p:cNvPr id="9" name="Shape 7"/>
+          <p:cNvSpPr/>
+          <p:nvPr/>
+        </p:nvSpPr>
+        <p:spPr>
+          <a:xfrm>
+            <a:off x="548640" y="3154680"/>
+            <a:ext cx="320040" cy="320040"/>
+          </a:xfrm>
+          <a:prstGeom prst="ellipse">
+            <a:avLst/>
+          </a:prstGeom>
+          <a:solidFill>
+            <a:srgbClr val="2E7D32"/>
+          </a:solidFill>
+          <a:ln/>
+        </p:spPr>
+      </p:sp>
+      <p:sp>
+        <p:nvSpPr>
+          <p:cNvPr id="10" name="Text 8"/>
+          <p:cNvSpPr txBox="1"/>
+          <p:nvPr/>
+        </p:nvSpPr>
+        <p:spPr>
+          <a:xfrm>
+            <a:off x="548640" y="3154680"/>
+            <a:ext cx="320040" cy="320040"/>
+          </a:xfrm>
+          <a:prstGeom prst="rect">
+            <a:avLst/>
+          </a:prstGeom>
+          <a:noFill/>
+          <a:ln/>
+        </p:spPr>
+        <p:txBody>
+          <a:bodyPr wrap="square" lIns="0" tIns="0" rIns="0" bIns="0" rtlCol="0" anchor="ctr"/>
+          <a:lstStyle/>
+          <a:p>
+            <a:pPr algn="ctr" indent="0" marL="0">
+              <a:buNone/>
+            </a:pPr>
+            <a:r>
+              <a:rPr lang="en-US" sz="1400" b="1" dirty="0">
+                <a:solidFill>
+                  <a:srgbClr val="FFFFFF"/>
+                </a:solidFill>
+                <a:latin typeface="Calibri" pitchFamily="34" charset="0"/>
+                <a:ea typeface="Calibri" pitchFamily="34" charset="-122"/>
+                <a:cs typeface="Calibri" pitchFamily="34" charset="-120"/>
+              </a:rPr>
+              <a:t>✓</a:t>
+            </a:r>
+            <a:endParaRPr lang="en-US" sz="1400" dirty="0"/>
+          </a:p>
+        </p:txBody>
+      </p:sp>
+      <p:sp>
+        <p:nvSpPr>
+          <p:cNvPr id="11" name="Text 9"/>
+          <p:cNvSpPr txBox="1"/>
+          <p:nvPr/>
+        </p:nvSpPr>
+        <p:spPr>
+          <a:xfrm>
+            <a:off x="1051560" y="3108960"/>
+            <a:ext cx="10058400" cy="640080"/>
+          </a:xfrm>
+          <a:prstGeom prst="rect">
+            <a:avLst/>
+          </a:prstGeom>
+          <a:noFill/>
+          <a:ln/>
+        </p:spPr>
+        <p:txBody>
+          <a:bodyPr wrap="square" rtlCol="0" anchor="ctr"/>
+          <a:lstStyle/>
+          <a:p>
+            <a:pPr indent="0" marL="0">
+              <a:buNone/>
+            </a:pPr>
+            <a:r>
+              <a:rPr lang="en-US" sz="1500" dirty="0">
+                <a:solidFill>
+                  <a:srgbClr val="1F1F1F"/>
+                </a:solidFill>
+                <a:latin typeface="Calibri" pitchFamily="34" charset="0"/>
+                <a:ea typeface="Calibri" pitchFamily="34" charset="-122"/>
+                <a:cs typeface="Calibri" pitchFamily="34" charset="-120"/>
+              </a:rPr>
+              <a:t>Human validation is a standing methodological safeguard — not a one-time formality</a:t>
+            </a:r>
+            <a:endParaRPr lang="en-US" sz="1500" dirty="0"/>
+          </a:p>
+        </p:txBody>
+      </p:sp>
+      <p:sp>
+        <p:nvSpPr>
+          <p:cNvPr id="12" name="Shape 10"/>
+          <p:cNvSpPr/>
+          <p:nvPr/>
+        </p:nvSpPr>
+        <p:spPr>
+          <a:xfrm>
+            <a:off x="548640" y="4023360"/>
+            <a:ext cx="320040" cy="320040"/>
+          </a:xfrm>
+          <a:prstGeom prst="ellipse">
+            <a:avLst/>
+          </a:prstGeom>
+          <a:solidFill>
+            <a:srgbClr val="2E7D32"/>
+          </a:solidFill>
+          <a:ln/>
+        </p:spPr>
+      </p:sp>
+      <p:sp>
+        <p:nvSpPr>
+          <p:cNvPr id="13" name="Text 11"/>
+          <p:cNvSpPr txBox="1"/>
+          <p:nvPr/>
+        </p:nvSpPr>
+        <p:spPr>
+          <a:xfrm>
+            <a:off x="548640" y="4023360"/>
+            <a:ext cx="320040" cy="320040"/>
+          </a:xfrm>
+          <a:prstGeom prst="rect">
+            <a:avLst/>
+          </a:prstGeom>
+          <a:noFill/>
+          <a:ln/>
+        </p:spPr>
+        <p:txBody>
+          <a:bodyPr wrap="square" lIns="0" tIns="0" rIns="0" bIns="0" rtlCol="0" anchor="ctr"/>
+          <a:lstStyle/>
+          <a:p>
+            <a:pPr algn="ctr" indent="0" marL="0">
+              <a:buNone/>
+            </a:pPr>
+            <a:r>
+              <a:rPr lang="en-US" sz="1400" b="1" dirty="0">
+                <a:solidFill>
+                  <a:srgbClr val="FFFFFF"/>
+                </a:solidFill>
+                <a:latin typeface="Calibri" pitchFamily="34" charset="0"/>
+                <a:ea typeface="Calibri" pitchFamily="34" charset="-122"/>
+                <a:cs typeface="Calibri" pitchFamily="34" charset="-120"/>
+              </a:rPr>
+              <a:t>✓</a:t>
+            </a:r>
+            <a:endParaRPr lang="en-US" sz="1400" dirty="0"/>
+          </a:p>
+        </p:txBody>
+      </p:sp>
+      <p:sp>
+        <p:nvSpPr>
+          <p:cNvPr id="14" name="Text 12"/>
+          <p:cNvSpPr txBox="1"/>
+          <p:nvPr/>
+        </p:nvSpPr>
+        <p:spPr>
+          <a:xfrm>
+            <a:off x="1051560" y="3977640"/>
+            <a:ext cx="10058400" cy="640080"/>
+          </a:xfrm>
+          <a:prstGeom prst="rect">
+            <a:avLst/>
+          </a:prstGeom>
+          <a:noFill/>
+          <a:ln/>
+        </p:spPr>
+        <p:txBody>
+          <a:bodyPr wrap="square" rtlCol="0" anchor="ctr"/>
+          <a:lstStyle/>
+          <a:p>
+            <a:pPr indent="0" marL="0">
+              <a:buNone/>
+            </a:pPr>
+            <a:r>
+              <a:rPr lang="en-US" sz="1500" dirty="0">
+                <a:solidFill>
+                  <a:srgbClr val="1F1F1F"/>
+                </a:solidFill>
+                <a:latin typeface="Calibri" pitchFamily="34" charset="0"/>
+                <a:ea typeface="Calibri" pitchFamily="34" charset="-122"/>
+                <a:cs typeface="Calibri" pitchFamily="34" charset="-120"/>
+              </a:rPr>
+              <a:t>Free-tier LLM research requires treating provider instability as a first-class design constraint</a:t>
+            </a:r>
+            <a:endParaRPr lang="en-US" sz="1500" dirty="0"/>
+          </a:p>
+        </p:txBody>
+      </p:sp>
+      <p:sp>
+        <p:nvSpPr>
+          <p:cNvPr id="15" name="Shape 13"/>
+          <p:cNvSpPr/>
+          <p:nvPr/>
+        </p:nvSpPr>
+        <p:spPr>
+          <a:xfrm>
+            <a:off x="548640" y="4892040"/>
+            <a:ext cx="320040" cy="320040"/>
+          </a:xfrm>
+          <a:prstGeom prst="ellipse">
+            <a:avLst/>
+          </a:prstGeom>
+          <a:solidFill>
+            <a:srgbClr val="2E7D32"/>
+          </a:solidFill>
+          <a:ln/>
+        </p:spPr>
+      </p:sp>
+      <p:sp>
+        <p:nvSpPr>
+          <p:cNvPr id="16" name="Text 14"/>
+          <p:cNvSpPr txBox="1"/>
+          <p:nvPr/>
+        </p:nvSpPr>
+        <p:spPr>
+          <a:xfrm>
+            <a:off x="548640" y="4892040"/>
+            <a:ext cx="320040" cy="320040"/>
+          </a:xfrm>
+          <a:prstGeom prst="rect">
+            <a:avLst/>
+          </a:prstGeom>
+          <a:noFill/>
+          <a:ln/>
+        </p:spPr>
+        <p:txBody>
+          <a:bodyPr wrap="square" lIns="0" tIns="0" rIns="0" bIns="0" rtlCol="0" anchor="ctr"/>
+          <a:lstStyle/>
+          <a:p>
+            <a:pPr algn="ctr" indent="0" marL="0">
+              <a:buNone/>
+            </a:pPr>
+            <a:r>
+              <a:rPr lang="en-US" sz="1400" b="1" dirty="0">
+                <a:solidFill>
+                  <a:srgbClr val="FFFFFF"/>
+                </a:solidFill>
+                <a:latin typeface="Calibri" pitchFamily="34" charset="0"/>
+                <a:ea typeface="Calibri" pitchFamily="34" charset="-122"/>
+                <a:cs typeface="Calibri" pitchFamily="34" charset="-120"/>
+              </a:rPr>
+              <a:t>✓</a:t>
+            </a:r>
+            <a:endParaRPr lang="en-US" sz="1400" dirty="0"/>
+          </a:p>
+        </p:txBody>
+      </p:sp>
+      <p:sp>
+        <p:nvSpPr>
+          <p:cNvPr id="17" name="Text 15"/>
+          <p:cNvSpPr txBox="1"/>
+          <p:nvPr/>
+        </p:nvSpPr>
+        <p:spPr>
+          <a:xfrm>
+            <a:off x="1051560" y="4846320"/>
+            <a:ext cx="10058400" cy="640080"/>
+          </a:xfrm>
+          <a:prstGeom prst="rect">
+            <a:avLst/>
+          </a:prstGeom>
+          <a:noFill/>
+          <a:ln/>
+        </p:spPr>
+        <p:txBody>
+          <a:bodyPr wrap="square" rtlCol="0" anchor="ctr"/>
+          <a:lstStyle/>
+          <a:p>
+            <a:pPr indent="0" marL="0">
+              <a:buNone/>
+            </a:pPr>
+            <a:r>
+              <a:rPr lang="en-US" sz="1500" dirty="0">
+                <a:solidFill>
+                  <a:srgbClr val="1F1F1F"/>
+                </a:solidFill>
+                <a:latin typeface="Calibri" pitchFamily="34" charset="0"/>
+                <a:ea typeface="Calibri" pitchFamily="34" charset="-122"/>
+                <a:cs typeface="Calibri" pitchFamily="34" charset="-120"/>
+              </a:rPr>
+              <a:t>Full reproducibility package: dataset, code, logs, and this report — openly documented</a:t>
+            </a:r>
+            <a:endParaRPr lang="en-US" sz="1500" dirty="0"/>
+          </a:p>
+        </p:txBody>
+      </p:sp>
+    </p:spTree>
+  </p:cSld>
+  <p:clrMapOvr>
+    <a:masterClrMapping/>
+  </p:clrMapOvr>
+</p:sld>
+</file>
+
+<file path=ppt/slides/slide19.xml><?xml version="1.0" encoding="utf-8"?>
+<p:sld xmlns:a="http://schemas.openxmlformats.org/drawingml/2006/main" xmlns:r="http://schemas.openxmlformats.org/officeDocument/2006/relationships" xmlns:p="http://schemas.openxmlformats.org/presentationml/2006/main">
+  <p:cSld name="Slide 19">
     <p:bg>
       <p:bgPr>
         <a:solidFill>
@@ -5326,8 +9012,8 @@
         </p:nvSpPr>
         <p:spPr>
           <a:xfrm>
-            <a:off x="548640" y="1371600"/>
-            <a:ext cx="502920" cy="502920"/>
+            <a:off x="548640" y="1234440"/>
+            <a:ext cx="457200" cy="457200"/>
           </a:xfrm>
           <a:prstGeom prst="ellipse">
             <a:avLst/>
@@ -5346,8 +9032,8 @@
         </p:nvSpPr>
         <p:spPr>
           <a:xfrm>
-            <a:off x="548640" y="1371600"/>
-            <a:ext cx="502920" cy="502920"/>
+            <a:off x="548640" y="1234440"/>
+            <a:ext cx="457200" cy="457200"/>
           </a:xfrm>
           <a:prstGeom prst="rect">
             <a:avLst/>
@@ -5363,7 +9049,7 @@
               <a:buNone/>
             </a:pPr>
             <a:r>
-              <a:rPr lang="en-US" sz="1600" b="1" dirty="0">
+              <a:rPr lang="en-US" sz="1400" b="1" dirty="0">
                 <a:solidFill>
                   <a:srgbClr val="FFFFFF"/>
                 </a:solidFill>
@@ -5373,46 +9059,46 @@
               </a:rPr>
               <a:t>01</a:t>
             </a:r>
+            <a:endParaRPr lang="en-US" sz="1400" dirty="0"/>
+          </a:p>
+        </p:txBody>
+      </p:sp>
+      <p:sp>
+        <p:nvSpPr>
+          <p:cNvPr id="5" name="Text 3"/>
+          <p:cNvSpPr txBox="1"/>
+          <p:nvPr/>
+        </p:nvSpPr>
+        <p:spPr>
+          <a:xfrm>
+            <a:off x="1188720" y="1261872"/>
+            <a:ext cx="9144000" cy="411480"/>
+          </a:xfrm>
+          <a:prstGeom prst="rect">
+            <a:avLst/>
+          </a:prstGeom>
+          <a:noFill/>
+          <a:ln/>
+        </p:spPr>
+        <p:txBody>
+          <a:bodyPr wrap="square" rtlCol="0" anchor="ctr"/>
+          <a:lstStyle/>
+          <a:p>
+            <a:pPr indent="0" marL="0">
+              <a:buNone/>
+            </a:pPr>
+            <a:r>
+              <a:rPr lang="en-US" sz="1600" dirty="0">
+                <a:solidFill>
+                  <a:srgbClr val="1F1F1F"/>
+                </a:solidFill>
+                <a:latin typeface="Calibri" pitchFamily="34" charset="0"/>
+                <a:ea typeface="Calibri" pitchFamily="34" charset="-122"/>
+                <a:cs typeface="Calibri" pitchFamily="34" charset="-120"/>
+              </a:rPr>
+              <a:t>Motivation &amp; Research Questions</a:t>
+            </a:r>
             <a:endParaRPr lang="en-US" sz="1600" dirty="0"/>
-          </a:p>
-        </p:txBody>
-      </p:sp>
-      <p:sp>
-        <p:nvSpPr>
-          <p:cNvPr id="5" name="Text 3"/>
-          <p:cNvSpPr txBox="1"/>
-          <p:nvPr/>
-        </p:nvSpPr>
-        <p:spPr>
-          <a:xfrm>
-            <a:off x="1280160" y="1417320"/>
-            <a:ext cx="8229600" cy="457200"/>
-          </a:xfrm>
-          <a:prstGeom prst="rect">
-            <a:avLst/>
-          </a:prstGeom>
-          <a:noFill/>
-          <a:ln/>
-        </p:spPr>
-        <p:txBody>
-          <a:bodyPr wrap="square" rtlCol="0" anchor="ctr"/>
-          <a:lstStyle/>
-          <a:p>
-            <a:pPr indent="0" marL="0">
-              <a:buNone/>
-            </a:pPr>
-            <a:r>
-              <a:rPr lang="en-US" sz="1800" dirty="0">
-                <a:solidFill>
-                  <a:srgbClr val="1F1F1F"/>
-                </a:solidFill>
-                <a:latin typeface="Calibri" pitchFamily="34" charset="0"/>
-                <a:ea typeface="Calibri" pitchFamily="34" charset="-122"/>
-                <a:cs typeface="Calibri" pitchFamily="34" charset="-120"/>
-              </a:rPr>
-              <a:t>Motivation &amp; Research Questions</a:t>
-            </a:r>
-            <a:endParaRPr lang="en-US" sz="1800" dirty="0"/>
           </a:p>
         </p:txBody>
       </p:sp>
@@ -5424,8 +9110,8 @@
         </p:nvSpPr>
         <p:spPr>
           <a:xfrm>
-            <a:off x="548640" y="2148840"/>
-            <a:ext cx="502920" cy="502920"/>
+            <a:off x="548640" y="1856232"/>
+            <a:ext cx="457200" cy="457200"/>
           </a:xfrm>
           <a:prstGeom prst="ellipse">
             <a:avLst/>
@@ -5444,8 +9130,8 @@
         </p:nvSpPr>
         <p:spPr>
           <a:xfrm>
-            <a:off x="548640" y="2148840"/>
-            <a:ext cx="502920" cy="502920"/>
+            <a:off x="548640" y="1856232"/>
+            <a:ext cx="457200" cy="457200"/>
           </a:xfrm>
           <a:prstGeom prst="rect">
             <a:avLst/>
@@ -5461,7 +9147,7 @@
               <a:buNone/>
             </a:pPr>
             <a:r>
-              <a:rPr lang="en-US" sz="1600" b="1" dirty="0">
+              <a:rPr lang="en-US" sz="1400" b="1" dirty="0">
                 <a:solidFill>
                   <a:srgbClr val="FFFFFF"/>
                 </a:solidFill>
@@ -5471,46 +9157,46 @@
               </a:rPr>
               <a:t>02</a:t>
             </a:r>
+            <a:endParaRPr lang="en-US" sz="1400" dirty="0"/>
+          </a:p>
+        </p:txBody>
+      </p:sp>
+      <p:sp>
+        <p:nvSpPr>
+          <p:cNvPr id="8" name="Text 6"/>
+          <p:cNvSpPr txBox="1"/>
+          <p:nvPr/>
+        </p:nvSpPr>
+        <p:spPr>
+          <a:xfrm>
+            <a:off x="1188720" y="1883664"/>
+            <a:ext cx="9144000" cy="411480"/>
+          </a:xfrm>
+          <a:prstGeom prst="rect">
+            <a:avLst/>
+          </a:prstGeom>
+          <a:noFill/>
+          <a:ln/>
+        </p:spPr>
+        <p:txBody>
+          <a:bodyPr wrap="square" rtlCol="0" anchor="ctr"/>
+          <a:lstStyle/>
+          <a:p>
+            <a:pPr indent="0" marL="0">
+              <a:buNone/>
+            </a:pPr>
+            <a:r>
+              <a:rPr lang="en-US" sz="1600" dirty="0">
+                <a:solidFill>
+                  <a:srgbClr val="1F1F1F"/>
+                </a:solidFill>
+                <a:latin typeface="Calibri" pitchFamily="34" charset="0"/>
+                <a:ea typeface="Calibri" pitchFamily="34" charset="-122"/>
+                <a:cs typeface="Calibri" pitchFamily="34" charset="-120"/>
+              </a:rPr>
+              <a:t>Methodology: Dataset, Rubric, Architecture</a:t>
+            </a:r>
             <a:endParaRPr lang="en-US" sz="1600" dirty="0"/>
-          </a:p>
-        </p:txBody>
-      </p:sp>
-      <p:sp>
-        <p:nvSpPr>
-          <p:cNvPr id="8" name="Text 6"/>
-          <p:cNvSpPr txBox="1"/>
-          <p:nvPr/>
-        </p:nvSpPr>
-        <p:spPr>
-          <a:xfrm>
-            <a:off x="1280160" y="2194560"/>
-            <a:ext cx="8229600" cy="457200"/>
-          </a:xfrm>
-          <a:prstGeom prst="rect">
-            <a:avLst/>
-          </a:prstGeom>
-          <a:noFill/>
-          <a:ln/>
-        </p:spPr>
-        <p:txBody>
-          <a:bodyPr wrap="square" rtlCol="0" anchor="ctr"/>
-          <a:lstStyle/>
-          <a:p>
-            <a:pPr indent="0" marL="0">
-              <a:buNone/>
-            </a:pPr>
-            <a:r>
-              <a:rPr lang="en-US" sz="1800" dirty="0">
-                <a:solidFill>
-                  <a:srgbClr val="1F1F1F"/>
-                </a:solidFill>
-                <a:latin typeface="Calibri" pitchFamily="34" charset="0"/>
-                <a:ea typeface="Calibri" pitchFamily="34" charset="-122"/>
-                <a:cs typeface="Calibri" pitchFamily="34" charset="-120"/>
-              </a:rPr>
-              <a:t>Methodology: Dataset, Rubric, Architecture</a:t>
-            </a:r>
-            <a:endParaRPr lang="en-US" sz="1800" dirty="0"/>
           </a:p>
         </p:txBody>
       </p:sp>
@@ -5522,8 +9208,8 @@
         </p:nvSpPr>
         <p:spPr>
           <a:xfrm>
-            <a:off x="548640" y="2926080"/>
-            <a:ext cx="502920" cy="502920"/>
+            <a:off x="548640" y="2478024"/>
+            <a:ext cx="457200" cy="457200"/>
           </a:xfrm>
           <a:prstGeom prst="ellipse">
             <a:avLst/>
@@ -5542,8 +9228,8 @@
         </p:nvSpPr>
         <p:spPr>
           <a:xfrm>
-            <a:off x="548640" y="2926080"/>
-            <a:ext cx="502920" cy="502920"/>
+            <a:off x="548640" y="2478024"/>
+            <a:ext cx="457200" cy="457200"/>
           </a:xfrm>
           <a:prstGeom prst="rect">
             <a:avLst/>
@@ -5559,7 +9245,7 @@
               <a:buNone/>
             </a:pPr>
             <a:r>
-              <a:rPr lang="en-US" sz="1600" b="1" dirty="0">
+              <a:rPr lang="en-US" sz="1400" b="1" dirty="0">
                 <a:solidFill>
                   <a:srgbClr val="FFFFFF"/>
                 </a:solidFill>
@@ -5569,46 +9255,46 @@
               </a:rPr>
               <a:t>03</a:t>
             </a:r>
+            <a:endParaRPr lang="en-US" sz="1400" dirty="0"/>
+          </a:p>
+        </p:txBody>
+      </p:sp>
+      <p:sp>
+        <p:nvSpPr>
+          <p:cNvPr id="11" name="Text 9"/>
+          <p:cNvSpPr txBox="1"/>
+          <p:nvPr/>
+        </p:nvSpPr>
+        <p:spPr>
+          <a:xfrm>
+            <a:off x="1188720" y="2505456"/>
+            <a:ext cx="9144000" cy="411480"/>
+          </a:xfrm>
+          <a:prstGeom prst="rect">
+            <a:avLst/>
+          </a:prstGeom>
+          <a:noFill/>
+          <a:ln/>
+        </p:spPr>
+        <p:txBody>
+          <a:bodyPr wrap="square" rtlCol="0" anchor="ctr"/>
+          <a:lstStyle/>
+          <a:p>
+            <a:pPr indent="0" marL="0">
+              <a:buNone/>
+            </a:pPr>
+            <a:r>
+              <a:rPr lang="en-US" sz="1600" dirty="0">
+                <a:solidFill>
+                  <a:srgbClr val="1F1F1F"/>
+                </a:solidFill>
+                <a:latin typeface="Calibri" pitchFamily="34" charset="0"/>
+                <a:ea typeface="Calibri" pitchFamily="34" charset="-122"/>
+                <a:cs typeface="Calibri" pitchFamily="34" charset="-120"/>
+              </a:rPr>
+              <a:t>Human-in-the-Loop Validation</a:t>
+            </a:r>
             <a:endParaRPr lang="en-US" sz="1600" dirty="0"/>
-          </a:p>
-        </p:txBody>
-      </p:sp>
-      <p:sp>
-        <p:nvSpPr>
-          <p:cNvPr id="11" name="Text 9"/>
-          <p:cNvSpPr txBox="1"/>
-          <p:nvPr/>
-        </p:nvSpPr>
-        <p:spPr>
-          <a:xfrm>
-            <a:off x="1280160" y="2971800"/>
-            <a:ext cx="8229600" cy="457200"/>
-          </a:xfrm>
-          <a:prstGeom prst="rect">
-            <a:avLst/>
-          </a:prstGeom>
-          <a:noFill/>
-          <a:ln/>
-        </p:spPr>
-        <p:txBody>
-          <a:bodyPr wrap="square" rtlCol="0" anchor="ctr"/>
-          <a:lstStyle/>
-          <a:p>
-            <a:pPr indent="0" marL="0">
-              <a:buNone/>
-            </a:pPr>
-            <a:r>
-              <a:rPr lang="en-US" sz="1800" dirty="0">
-                <a:solidFill>
-                  <a:srgbClr val="1F1F1F"/>
-                </a:solidFill>
-                <a:latin typeface="Calibri" pitchFamily="34" charset="0"/>
-                <a:ea typeface="Calibri" pitchFamily="34" charset="-122"/>
-                <a:cs typeface="Calibri" pitchFamily="34" charset="-120"/>
-              </a:rPr>
-              <a:t>Human-in-the-Loop Validation</a:t>
-            </a:r>
-            <a:endParaRPr lang="en-US" sz="1800" dirty="0"/>
           </a:p>
         </p:txBody>
       </p:sp>
@@ -5620,8 +9306,8 @@
         </p:nvSpPr>
         <p:spPr>
           <a:xfrm>
-            <a:off x="548640" y="3703320"/>
-            <a:ext cx="502920" cy="502920"/>
+            <a:off x="548640" y="3099816"/>
+            <a:ext cx="457200" cy="457200"/>
           </a:xfrm>
           <a:prstGeom prst="ellipse">
             <a:avLst/>
@@ -5640,8 +9326,8 @@
         </p:nvSpPr>
         <p:spPr>
           <a:xfrm>
-            <a:off x="548640" y="3703320"/>
-            <a:ext cx="502920" cy="502920"/>
+            <a:off x="548640" y="3099816"/>
+            <a:ext cx="457200" cy="457200"/>
           </a:xfrm>
           <a:prstGeom prst="rect">
             <a:avLst/>
@@ -5657,7 +9343,7 @@
               <a:buNone/>
             </a:pPr>
             <a:r>
-              <a:rPr lang="en-US" sz="1600" b="1" dirty="0">
+              <a:rPr lang="en-US" sz="1400" b="1" dirty="0">
                 <a:solidFill>
                   <a:srgbClr val="FFFFFF"/>
                 </a:solidFill>
@@ -5667,46 +9353,46 @@
               </a:rPr>
               <a:t>04</a:t>
             </a:r>
+            <a:endParaRPr lang="en-US" sz="1400" dirty="0"/>
+          </a:p>
+        </p:txBody>
+      </p:sp>
+      <p:sp>
+        <p:nvSpPr>
+          <p:cNvPr id="14" name="Text 12"/>
+          <p:cNvSpPr txBox="1"/>
+          <p:nvPr/>
+        </p:nvSpPr>
+        <p:spPr>
+          <a:xfrm>
+            <a:off x="1188720" y="3127248"/>
+            <a:ext cx="9144000" cy="411480"/>
+          </a:xfrm>
+          <a:prstGeom prst="rect">
+            <a:avLst/>
+          </a:prstGeom>
+          <a:noFill/>
+          <a:ln/>
+        </p:spPr>
+        <p:txBody>
+          <a:bodyPr wrap="square" rtlCol="0" anchor="ctr"/>
+          <a:lstStyle/>
+          <a:p>
+            <a:pPr indent="0" marL="0">
+              <a:buNone/>
+            </a:pPr>
+            <a:r>
+              <a:rPr lang="en-US" sz="1600" dirty="0">
+                <a:solidFill>
+                  <a:srgbClr val="1F1F1F"/>
+                </a:solidFill>
+                <a:latin typeface="Calibri" pitchFamily="34" charset="0"/>
+                <a:ea typeface="Calibri" pitchFamily="34" charset="-122"/>
+                <a:cs typeface="Calibri" pitchFamily="34" charset="-120"/>
+              </a:rPr>
+              <a:t>Overall Results: All Three Providers</a:t>
+            </a:r>
             <a:endParaRPr lang="en-US" sz="1600" dirty="0"/>
-          </a:p>
-        </p:txBody>
-      </p:sp>
-      <p:sp>
-        <p:nvSpPr>
-          <p:cNvPr id="14" name="Text 12"/>
-          <p:cNvSpPr txBox="1"/>
-          <p:nvPr/>
-        </p:nvSpPr>
-        <p:spPr>
-          <a:xfrm>
-            <a:off x="1280160" y="3749040"/>
-            <a:ext cx="8229600" cy="457200"/>
-          </a:xfrm>
-          <a:prstGeom prst="rect">
-            <a:avLst/>
-          </a:prstGeom>
-          <a:noFill/>
-          <a:ln/>
-        </p:spPr>
-        <p:txBody>
-          <a:bodyPr wrap="square" rtlCol="0" anchor="ctr"/>
-          <a:lstStyle/>
-          <a:p>
-            <a:pPr indent="0" marL="0">
-              <a:buNone/>
-            </a:pPr>
-            <a:r>
-              <a:rPr lang="en-US" sz="1800" dirty="0">
-                <a:solidFill>
-                  <a:srgbClr val="1F1F1F"/>
-                </a:solidFill>
-                <a:latin typeface="Calibri" pitchFamily="34" charset="0"/>
-                <a:ea typeface="Calibri" pitchFamily="34" charset="-122"/>
-                <a:cs typeface="Calibri" pitchFamily="34" charset="-120"/>
-              </a:rPr>
-              <a:t>Statistical Results</a:t>
-            </a:r>
-            <a:endParaRPr lang="en-US" sz="1800" dirty="0"/>
           </a:p>
         </p:txBody>
       </p:sp>
@@ -5718,8 +9404,8 @@
         </p:nvSpPr>
         <p:spPr>
           <a:xfrm>
-            <a:off x="548640" y="4480560"/>
-            <a:ext cx="502920" cy="502920"/>
+            <a:off x="548640" y="3721608"/>
+            <a:ext cx="457200" cy="457200"/>
           </a:xfrm>
           <a:prstGeom prst="ellipse">
             <a:avLst/>
@@ -5738,8 +9424,8 @@
         </p:nvSpPr>
         <p:spPr>
           <a:xfrm>
-            <a:off x="548640" y="4480560"/>
-            <a:ext cx="502920" cy="502920"/>
+            <a:off x="548640" y="3721608"/>
+            <a:ext cx="457200" cy="457200"/>
           </a:xfrm>
           <a:prstGeom prst="rect">
             <a:avLst/>
@@ -5755,7 +9441,7 @@
               <a:buNone/>
             </a:pPr>
             <a:r>
-              <a:rPr lang="en-US" sz="1600" b="1" dirty="0">
+              <a:rPr lang="en-US" sz="1400" b="1" dirty="0">
                 <a:solidFill>
                   <a:srgbClr val="FFFFFF"/>
                 </a:solidFill>
@@ -5765,46 +9451,46 @@
               </a:rPr>
               <a:t>05</a:t>
             </a:r>
+            <a:endParaRPr lang="en-US" sz="1400" dirty="0"/>
+          </a:p>
+        </p:txBody>
+      </p:sp>
+      <p:sp>
+        <p:nvSpPr>
+          <p:cNvPr id="17" name="Text 15"/>
+          <p:cNvSpPr txBox="1"/>
+          <p:nvPr/>
+        </p:nvSpPr>
+        <p:spPr>
+          <a:xfrm>
+            <a:off x="1188720" y="3749040"/>
+            <a:ext cx="9144000" cy="411480"/>
+          </a:xfrm>
+          <a:prstGeom prst="rect">
+            <a:avLst/>
+          </a:prstGeom>
+          <a:noFill/>
+          <a:ln/>
+        </p:spPr>
+        <p:txBody>
+          <a:bodyPr wrap="square" rtlCol="0" anchor="ctr"/>
+          <a:lstStyle/>
+          <a:p>
+            <a:pPr indent="0" marL="0">
+              <a:buNone/>
+            </a:pPr>
+            <a:r>
+              <a:rPr lang="en-US" sz="1600" dirty="0">
+                <a:solidFill>
+                  <a:srgbClr val="1F1F1F"/>
+                </a:solidFill>
+                <a:latin typeface="Calibri" pitchFamily="34" charset="0"/>
+                <a:ea typeface="Calibri" pitchFamily="34" charset="-122"/>
+                <a:cs typeface="Calibri" pitchFamily="34" charset="-120"/>
+              </a:rPr>
+              <a:t>H1 — Reasoning vs. Retrieval (All Providers)</a:t>
+            </a:r>
             <a:endParaRPr lang="en-US" sz="1600" dirty="0"/>
-          </a:p>
-        </p:txBody>
-      </p:sp>
-      <p:sp>
-        <p:nvSpPr>
-          <p:cNvPr id="17" name="Text 15"/>
-          <p:cNvSpPr txBox="1"/>
-          <p:nvPr/>
-        </p:nvSpPr>
-        <p:spPr>
-          <a:xfrm>
-            <a:off x="1280160" y="4526280"/>
-            <a:ext cx="8229600" cy="457200"/>
-          </a:xfrm>
-          <a:prstGeom prst="rect">
-            <a:avLst/>
-          </a:prstGeom>
-          <a:noFill/>
-          <a:ln/>
-        </p:spPr>
-        <p:txBody>
-          <a:bodyPr wrap="square" rtlCol="0" anchor="ctr"/>
-          <a:lstStyle/>
-          <a:p>
-            <a:pPr indent="0" marL="0">
-              <a:buNone/>
-            </a:pPr>
-            <a:r>
-              <a:rPr lang="en-US" sz="1800" dirty="0">
-                <a:solidFill>
-                  <a:srgbClr val="1F1F1F"/>
-                </a:solidFill>
-                <a:latin typeface="Calibri" pitchFamily="34" charset="0"/>
-                <a:ea typeface="Calibri" pitchFamily="34" charset="-122"/>
-                <a:cs typeface="Calibri" pitchFamily="34" charset="-120"/>
-              </a:rPr>
-              <a:t>Key Finding: Hallucination Resistance</a:t>
-            </a:r>
-            <a:endParaRPr lang="en-US" sz="1800" dirty="0"/>
           </a:p>
         </p:txBody>
       </p:sp>
@@ -5816,8 +9502,8 @@
         </p:nvSpPr>
         <p:spPr>
           <a:xfrm>
-            <a:off x="548640" y="5257800"/>
-            <a:ext cx="502920" cy="502920"/>
+            <a:off x="548640" y="4343400"/>
+            <a:ext cx="457200" cy="457200"/>
           </a:xfrm>
           <a:prstGeom prst="ellipse">
             <a:avLst/>
@@ -5836,8 +9522,8 @@
         </p:nvSpPr>
         <p:spPr>
           <a:xfrm>
-            <a:off x="548640" y="5257800"/>
-            <a:ext cx="502920" cy="502920"/>
+            <a:off x="548640" y="4343400"/>
+            <a:ext cx="457200" cy="457200"/>
           </a:xfrm>
           <a:prstGeom prst="rect">
             <a:avLst/>
@@ -5853,7 +9539,7 @@
               <a:buNone/>
             </a:pPr>
             <a:r>
-              <a:rPr lang="en-US" sz="1600" b="1" dirty="0">
+              <a:rPr lang="en-US" sz="1400" b="1" dirty="0">
                 <a:solidFill>
                   <a:srgbClr val="FFFFFF"/>
                 </a:solidFill>
@@ -5863,36 +9549,134 @@
               </a:rPr>
               <a:t>06</a:t>
             </a:r>
+            <a:endParaRPr lang="en-US" sz="1400" dirty="0"/>
+          </a:p>
+        </p:txBody>
+      </p:sp>
+      <p:sp>
+        <p:nvSpPr>
+          <p:cNvPr id="20" name="Text 18"/>
+          <p:cNvSpPr txBox="1"/>
+          <p:nvPr/>
+        </p:nvSpPr>
+        <p:spPr>
+          <a:xfrm>
+            <a:off x="1188720" y="4370832"/>
+            <a:ext cx="9144000" cy="411480"/>
+          </a:xfrm>
+          <a:prstGeom prst="rect">
+            <a:avLst/>
+          </a:prstGeom>
+          <a:noFill/>
+          <a:ln/>
+        </p:spPr>
+        <p:txBody>
+          <a:bodyPr wrap="square" rtlCol="0" anchor="ctr"/>
+          <a:lstStyle/>
+          <a:p>
+            <a:pPr indent="0" marL="0">
+              <a:buNone/>
+            </a:pPr>
+            <a:r>
+              <a:rPr lang="en-US" sz="1600" dirty="0">
+                <a:solidFill>
+                  <a:srgbClr val="1F1F1F"/>
+                </a:solidFill>
+                <a:latin typeface="Calibri" pitchFamily="34" charset="0"/>
+                <a:ea typeface="Calibri" pitchFamily="34" charset="-122"/>
+                <a:cs typeface="Calibri" pitchFamily="34" charset="-120"/>
+              </a:rPr>
+              <a:t>H2 — Instruction Following vs. Difficulty (All Providers)</a:t>
+            </a:r>
             <a:endParaRPr lang="en-US" sz="1600" dirty="0"/>
           </a:p>
         </p:txBody>
       </p:sp>
       <p:sp>
         <p:nvSpPr>
-          <p:cNvPr id="20" name="Text 18"/>
-          <p:cNvSpPr txBox="1"/>
-          <p:nvPr/>
-        </p:nvSpPr>
-        <p:spPr>
-          <a:xfrm>
-            <a:off x="1280160" y="5303520"/>
-            <a:ext cx="8229600" cy="457200"/>
-          </a:xfrm>
-          <a:prstGeom prst="rect">
-            <a:avLst/>
-          </a:prstGeom>
-          <a:noFill/>
-          <a:ln/>
-        </p:spPr>
-        <p:txBody>
-          <a:bodyPr wrap="square" rtlCol="0" anchor="ctr"/>
-          <a:lstStyle/>
-          <a:p>
-            <a:pPr indent="0" marL="0">
-              <a:buNone/>
-            </a:pPr>
-            <a:r>
-              <a:rPr lang="en-US" sz="1800" dirty="0">
+          <p:cNvPr id="21" name="Shape 19"/>
+          <p:cNvSpPr/>
+          <p:nvPr/>
+        </p:nvSpPr>
+        <p:spPr>
+          <a:xfrm>
+            <a:off x="548640" y="4965192"/>
+            <a:ext cx="457200" cy="457200"/>
+          </a:xfrm>
+          <a:prstGeom prst="ellipse">
+            <a:avLst/>
+          </a:prstGeom>
+          <a:solidFill>
+            <a:srgbClr val="1E2761"/>
+          </a:solidFill>
+          <a:ln/>
+        </p:spPr>
+      </p:sp>
+      <p:sp>
+        <p:nvSpPr>
+          <p:cNvPr id="22" name="Text 20"/>
+          <p:cNvSpPr txBox="1"/>
+          <p:nvPr/>
+        </p:nvSpPr>
+        <p:spPr>
+          <a:xfrm>
+            <a:off x="548640" y="4965192"/>
+            <a:ext cx="457200" cy="457200"/>
+          </a:xfrm>
+          <a:prstGeom prst="rect">
+            <a:avLst/>
+          </a:prstGeom>
+          <a:noFill/>
+          <a:ln/>
+        </p:spPr>
+        <p:txBody>
+          <a:bodyPr wrap="square" lIns="0" tIns="0" rIns="0" bIns="0" rtlCol="0" anchor="ctr"/>
+          <a:lstStyle/>
+          <a:p>
+            <a:pPr algn="ctr" indent="0" marL="0">
+              <a:buNone/>
+            </a:pPr>
+            <a:r>
+              <a:rPr lang="en-US" sz="1400" b="1" dirty="0">
+                <a:solidFill>
+                  <a:srgbClr val="FFFFFF"/>
+                </a:solidFill>
+                <a:latin typeface="Calibri" pitchFamily="34" charset="0"/>
+                <a:ea typeface="Calibri" pitchFamily="34" charset="-122"/>
+                <a:cs typeface="Calibri" pitchFamily="34" charset="-120"/>
+              </a:rPr>
+              <a:t>07</a:t>
+            </a:r>
+            <a:endParaRPr lang="en-US" sz="1400" dirty="0"/>
+          </a:p>
+        </p:txBody>
+      </p:sp>
+      <p:sp>
+        <p:nvSpPr>
+          <p:cNvPr id="23" name="Text 21"/>
+          <p:cNvSpPr txBox="1"/>
+          <p:nvPr/>
+        </p:nvSpPr>
+        <p:spPr>
+          <a:xfrm>
+            <a:off x="1188720" y="4992624"/>
+            <a:ext cx="9144000" cy="411480"/>
+          </a:xfrm>
+          <a:prstGeom prst="rect">
+            <a:avLst/>
+          </a:prstGeom>
+          <a:noFill/>
+          <a:ln/>
+        </p:spPr>
+        <p:txBody>
+          <a:bodyPr wrap="square" rtlCol="0" anchor="ctr"/>
+          <a:lstStyle/>
+          <a:p>
+            <a:pPr indent="0" marL="0">
+              <a:buNone/>
+            </a:pPr>
+            <a:r>
+              <a:rPr lang="en-US" sz="1600" dirty="0">
                 <a:solidFill>
                   <a:srgbClr val="1F1F1F"/>
                 </a:solidFill>
@@ -5900,9 +9684,107 @@
                 <a:ea typeface="Calibri" pitchFamily="34" charset="-122"/>
                 <a:cs typeface="Calibri" pitchFamily="34" charset="-120"/>
               </a:rPr>
-              <a:t>Limitations &amp; Conclusions</a:t>
-            </a:r>
-            <a:endParaRPr lang="en-US" sz="1800" dirty="0"/>
+              <a:t>H3 — Hallucination Resistance (All Pairwise Comparisons)</a:t>
+            </a:r>
+            <a:endParaRPr lang="en-US" sz="1600" dirty="0"/>
+          </a:p>
+        </p:txBody>
+      </p:sp>
+      <p:sp>
+        <p:nvSpPr>
+          <p:cNvPr id="24" name="Shape 22"/>
+          <p:cNvSpPr/>
+          <p:nvPr/>
+        </p:nvSpPr>
+        <p:spPr>
+          <a:xfrm>
+            <a:off x="548640" y="5586984"/>
+            <a:ext cx="457200" cy="457200"/>
+          </a:xfrm>
+          <a:prstGeom prst="ellipse">
+            <a:avLst/>
+          </a:prstGeom>
+          <a:solidFill>
+            <a:srgbClr val="1E2761"/>
+          </a:solidFill>
+          <a:ln/>
+        </p:spPr>
+      </p:sp>
+      <p:sp>
+        <p:nvSpPr>
+          <p:cNvPr id="25" name="Text 23"/>
+          <p:cNvSpPr txBox="1"/>
+          <p:nvPr/>
+        </p:nvSpPr>
+        <p:spPr>
+          <a:xfrm>
+            <a:off x="548640" y="5586984"/>
+            <a:ext cx="457200" cy="457200"/>
+          </a:xfrm>
+          <a:prstGeom prst="rect">
+            <a:avLst/>
+          </a:prstGeom>
+          <a:noFill/>
+          <a:ln/>
+        </p:spPr>
+        <p:txBody>
+          <a:bodyPr wrap="square" lIns="0" tIns="0" rIns="0" bIns="0" rtlCol="0" anchor="ctr"/>
+          <a:lstStyle/>
+          <a:p>
+            <a:pPr algn="ctr" indent="0" marL="0">
+              <a:buNone/>
+            </a:pPr>
+            <a:r>
+              <a:rPr lang="en-US" sz="1400" b="1" dirty="0">
+                <a:solidFill>
+                  <a:srgbClr val="FFFFFF"/>
+                </a:solidFill>
+                <a:latin typeface="Calibri" pitchFamily="34" charset="0"/>
+                <a:ea typeface="Calibri" pitchFamily="34" charset="-122"/>
+                <a:cs typeface="Calibri" pitchFamily="34" charset="-120"/>
+              </a:rPr>
+              <a:t>08</a:t>
+            </a:r>
+            <a:endParaRPr lang="en-US" sz="1400" dirty="0"/>
+          </a:p>
+        </p:txBody>
+      </p:sp>
+      <p:sp>
+        <p:nvSpPr>
+          <p:cNvPr id="26" name="Text 24"/>
+          <p:cNvSpPr txBox="1"/>
+          <p:nvPr/>
+        </p:nvSpPr>
+        <p:spPr>
+          <a:xfrm>
+            <a:off x="1188720" y="5614416"/>
+            <a:ext cx="9144000" cy="411480"/>
+          </a:xfrm>
+          <a:prstGeom prst="rect">
+            <a:avLst/>
+          </a:prstGeom>
+          <a:noFill/>
+          <a:ln/>
+        </p:spPr>
+        <p:txBody>
+          <a:bodyPr wrap="square" rtlCol="0" anchor="ctr"/>
+          <a:lstStyle/>
+          <a:p>
+            <a:pPr indent="0" marL="0">
+              <a:buNone/>
+            </a:pPr>
+            <a:r>
+              <a:rPr lang="en-US" sz="1600" dirty="0">
+                <a:solidFill>
+                  <a:srgbClr val="1F1F1F"/>
+                </a:solidFill>
+                <a:latin typeface="Calibri" pitchFamily="34" charset="0"/>
+                <a:ea typeface="Calibri" pitchFamily="34" charset="-122"/>
+                <a:cs typeface="Calibri" pitchFamily="34" charset="-120"/>
+              </a:rPr>
+              <a:t>Provider Profiles &amp; Conclusions</a:t>
+            </a:r>
+            <a:endParaRPr lang="en-US" sz="1600" dirty="0"/>
           </a:p>
         </p:txBody>
       </p:sp>
@@ -9726,7 +13608,7 @@
                 <a:ea typeface="Calibri" pitchFamily="34" charset="-122"/>
                 <a:cs typeface="Calibri" pitchFamily="34" charset="-120"/>
               </a:rPr>
-              <a:t>An AI judge scored 660 responses. But is the judge trustworthy?</a:t>
+              <a:t>An AI judge scored 900 responses. But is the judge trustworthy?</a:t>
             </a:r>
             <a:endParaRPr lang="en-US" sz="1600" dirty="0"/>
           </a:p>
@@ -10086,7 +13968,7 @@
         <p:spPr>
           <a:xfrm>
             <a:off x="548640" y="4343400"/>
-            <a:ext cx="10515600" cy="914400"/>
+            <a:ext cx="10515600" cy="1097280"/>
           </a:xfrm>
           <a:prstGeom prst="rect">
             <a:avLst/>
@@ -10110,7 +13992,7 @@
                 <a:ea typeface="Calibri" pitchFamily="34" charset="-122"/>
                 <a:cs typeface="Calibri" pitchFamily="34" charset="-120"/>
               </a:rPr>
-              <a:t>Raw agreement can look reassuring even when scores cluster by chance. Kappa corrects for agreement expected by chance alone — the standard, defensible statistic for inter-rater reliability.</a:t>
+              <a:t>Raw agreement can look reassuring even when scores cluster by chance. Kappa corrects for agreement expected by chance alone — the standard, defensible statistic for inter-rater reliability. Result: κ = 0.20–0.23 (fair agreement), within-one-point agreement of 82.6–86.0%.</a:t>
             </a:r>
             <a:endParaRPr lang="en-US" sz="1300" dirty="0"/>
           </a:p>
